--- a/applications/girlcode/documents/girlcode_ppt.pptx
+++ b/applications/girlcode/documents/girlcode_ppt.pptx
@@ -14,7 +14,6 @@
     <p:sldId id="262" r:id="rId13"/>
     <p:sldId id="263" r:id="rId14"/>
     <p:sldId id="264" r:id="rId15"/>
-    <p:sldId id="265" r:id="rId16"/>
   </p:sldIdLst>
   <p:sldSz cx="12191695" cy="6858000" type="screen4x3"/>
   <p:notesSz cx="6858000" cy="9144000"/>
@@ -3107,7 +3106,6 @@
         </p:nvPicPr>
         <p:blipFill>
           <a:blip r:embed="rId2"/>
-          <a:srcRect l="33" r="33"/>
           <a:stretch>
             <a:fillRect/>
           </a:stretch>
@@ -3130,8 +3128,8 @@
         </p:nvSpPr>
         <p:spPr>
           <a:xfrm>
-            <a:off x="0" y="3474720"/>
-            <a:ext cx="12191695" cy="3383280"/>
+            <a:off x="0" y="3749040"/>
+            <a:ext cx="12191695" cy="3108960"/>
           </a:xfrm>
           <a:prstGeom prst="rect">
             <a:avLst/>
@@ -3142,7 +3140,6 @@
           <a:ln>
             <a:noFill/>
           </a:ln>
-          <a:effectLst/>
         </p:spPr>
         <p:style>
           <a:lnRef idx="1">
@@ -3174,7 +3171,7 @@
         </p:nvSpPr>
         <p:spPr>
           <a:xfrm>
-            <a:off x="594360" y="3749040"/>
+            <a:off x="548640" y="4023360"/>
             <a:ext cx="10972800" cy="320040"/>
           </a:xfrm>
           <a:prstGeom prst="rect">
@@ -3183,16 +3180,12 @@
           <a:noFill/>
         </p:spPr>
         <p:txBody>
-          <a:bodyPr wrap="square" anchor="t">
+          <a:bodyPr wrap="square">
             <a:spAutoFit/>
           </a:bodyPr>
           <a:lstStyle/>
           <a:p>
-            <a:pPr algn="l">
-              <a:spcAft>
-                <a:spcPts val="0"/>
-              </a:spcAft>
-            </a:pPr>
+            <a:pPr algn="l"/>
             <a:r>
               <a:rPr sz="1300" b="1" i="0">
                 <a:solidFill>
@@ -3213,8 +3206,8 @@
         </p:nvSpPr>
         <p:spPr>
           <a:xfrm>
-            <a:off x="594360" y="4206240"/>
-            <a:ext cx="10972800" cy="640080"/>
+            <a:off x="548640" y="4434840"/>
+            <a:ext cx="10972800" cy="548640"/>
           </a:xfrm>
           <a:prstGeom prst="rect">
             <a:avLst/>
@@ -3222,16 +3215,12 @@
           <a:noFill/>
         </p:spPr>
         <p:txBody>
-          <a:bodyPr wrap="square" anchor="t">
+          <a:bodyPr wrap="square">
             <a:spAutoFit/>
           </a:bodyPr>
           <a:lstStyle/>
           <a:p>
-            <a:pPr algn="l">
-              <a:spcAft>
-                <a:spcPts val="0"/>
-              </a:spcAft>
-            </a:pPr>
+            <a:pPr algn="l"/>
             <a:r>
               <a:rPr sz="2600" b="1" i="0">
                 <a:solidFill>
@@ -3239,7 +3228,7 @@
                 </a:solidFill>
                 <a:latin typeface="Calibri"/>
               </a:rPr>
-              <a:t>FCHIP Hack Challenge: AI for Community Health</a:t>
+              <a:t>Challenge Brief &amp; Mentorship Offer</a:t>
             </a:r>
           </a:p>
         </p:txBody>
@@ -3252,8 +3241,8 @@
         </p:nvSpPr>
         <p:spPr>
           <a:xfrm>
-            <a:off x="594360" y="4983481"/>
-            <a:ext cx="10972800" cy="365760"/>
+            <a:off x="548640" y="5257800"/>
+            <a:ext cx="10972800" cy="320040"/>
           </a:xfrm>
           <a:prstGeom prst="rect">
             <a:avLst/>
@@ -3261,24 +3250,20 @@
           <a:noFill/>
         </p:spPr>
         <p:txBody>
-          <a:bodyPr wrap="square" anchor="t">
+          <a:bodyPr wrap="square">
             <a:spAutoFit/>
           </a:bodyPr>
           <a:lstStyle/>
           <a:p>
-            <a:pPr algn="l">
-              <a:spcAft>
-                <a:spcPts val="0"/>
-              </a:spcAft>
-            </a:pPr>
-            <a:r>
-              <a:rPr sz="1500" b="0" i="1">
-                <a:solidFill>
-                  <a:srgbClr val="F2C79B"/>
+            <a:pPr algn="l"/>
+            <a:r>
+              <a:rPr sz="1400" b="0" i="0">
+                <a:solidFill>
+                  <a:srgbClr val="D0E8E8"/>
                 </a:solidFill>
                 <a:latin typeface="Calibri"/>
               </a:rPr>
-              <a:t>Women builders prototype tools that help CHWs act before crises</a:t>
+              <a:t>30-hour build sprint · UICT Nakawa · 5–6 September 2026</a:t>
             </a:r>
           </a:p>
         </p:txBody>
@@ -3291,8 +3276,8 @@
         </p:nvSpPr>
         <p:spPr>
           <a:xfrm>
-            <a:off x="594360" y="5532120"/>
-            <a:ext cx="10972800" cy="274320"/>
+            <a:off x="548640" y="5806440"/>
+            <a:ext cx="10972800" cy="320040"/>
           </a:xfrm>
           <a:prstGeom prst="rect">
             <a:avLst/>
@@ -3300,298 +3285,12 @@
           <a:noFill/>
         </p:spPr>
         <p:txBody>
-          <a:bodyPr wrap="square" anchor="t">
+          <a:bodyPr wrap="square">
             <a:spAutoFit/>
           </a:bodyPr>
           <a:lstStyle/>
           <a:p>
-            <a:pPr algn="l">
-              <a:spcAft>
-                <a:spcPts val="0"/>
-              </a:spcAft>
-            </a:pPr>
-            <a:r>
-              <a:rPr sz="1300" b="1" i="0">
-                <a:solidFill>
-                  <a:srgbClr val="FFFFFF"/>
-                </a:solidFill>
-                <a:latin typeface="Calibri"/>
-              </a:rPr>
-              <a:t>Your health, our mission.</a:t>
-            </a:r>
-          </a:p>
-        </p:txBody>
-      </p:sp>
-      <p:sp>
-        <p:nvSpPr>
-          <p:cNvPr id="8" name="TextBox 7"/>
-          <p:cNvSpPr txBox="1"/>
-          <p:nvPr/>
-        </p:nvSpPr>
-        <p:spPr>
-          <a:xfrm>
-            <a:off x="594360" y="5989320"/>
-            <a:ext cx="10972800" cy="365760"/>
-          </a:xfrm>
-          <a:prstGeom prst="rect">
-            <a:avLst/>
-          </a:prstGeom>
-          <a:noFill/>
-        </p:spPr>
-        <p:txBody>
-          <a:bodyPr wrap="square" anchor="t">
-            <a:spAutoFit/>
-          </a:bodyPr>
-          <a:lstStyle/>
-          <a:p>
-            <a:pPr algn="l">
-              <a:spcAft>
-                <a:spcPts val="0"/>
-              </a:spcAft>
-            </a:pPr>
-            <a:r>
-              <a:rPr sz="1200" b="0" i="0">
-                <a:solidFill>
-                  <a:srgbClr val="D0E8E8"/>
-                </a:solidFill>
-                <a:latin typeface="Calibri"/>
-              </a:rPr>
-              <a:t>Register / host FairBanks women builders at the Kampala GirlCode Hackathon.</a:t>
-            </a:r>
-          </a:p>
-        </p:txBody>
-      </p:sp>
-    </p:spTree>
-  </p:cSld>
-  <p:clrMapOvr>
-    <a:masterClrMapping/>
-  </p:clrMapOvr>
-</p:sld>
-</file>
-
-<file path=ppt/slides/slide10.xml><?xml version="1.0" encoding="utf-8"?>
-<p:sld xmlns:a="http://schemas.openxmlformats.org/drawingml/2006/main" xmlns:p="http://schemas.openxmlformats.org/presentationml/2006/main" xmlns:r="http://schemas.openxmlformats.org/officeDocument/2006/relationships">
-  <p:cSld>
-    <p:spTree>
-      <p:nvGrpSpPr>
-        <p:cNvPr id="1" name=""/>
-        <p:cNvGrpSpPr/>
-        <p:nvPr/>
-      </p:nvGrpSpPr>
-      <p:grpSpPr/>
-      <p:pic>
-        <p:nvPicPr>
-          <p:cNvPr id="2" name="Picture 1" descr="outreach_audience_full_group_01_opt.jpg"/>
-          <p:cNvPicPr>
-            <a:picLocks noChangeAspect="1"/>
-          </p:cNvPicPr>
-          <p:nvPr/>
-        </p:nvPicPr>
-        <p:blipFill>
-          <a:blip r:embed="rId2"/>
-          <a:srcRect t="7796" b="7796"/>
-          <a:stretch>
-            <a:fillRect/>
-          </a:stretch>
-        </p:blipFill>
-        <p:spPr>
-          <a:xfrm>
-            <a:off x="0" y="0"/>
-            <a:ext cx="12191695" cy="6858000"/>
-          </a:xfrm>
-          <a:prstGeom prst="rect">
-            <a:avLst/>
-          </a:prstGeom>
-        </p:spPr>
-      </p:pic>
-      <p:sp>
-        <p:nvSpPr>
-          <p:cNvPr id="3" name="Rectangle 2"/>
-          <p:cNvSpPr/>
-          <p:nvPr/>
-        </p:nvSpPr>
-        <p:spPr>
-          <a:xfrm>
-            <a:off x="0" y="3657600"/>
-            <a:ext cx="12191695" cy="3200400"/>
-          </a:xfrm>
-          <a:prstGeom prst="rect">
-            <a:avLst/>
-          </a:prstGeom>
-          <a:solidFill>
-            <a:srgbClr val="0A1F2E"/>
-          </a:solidFill>
-          <a:ln>
-            <a:noFill/>
-          </a:ln>
-          <a:effectLst/>
-        </p:spPr>
-        <p:style>
-          <a:lnRef idx="1">
-            <a:schemeClr val="accent1"/>
-          </a:lnRef>
-          <a:fillRef idx="3">
-            <a:schemeClr val="accent1"/>
-          </a:fillRef>
-          <a:effectRef idx="2">
-            <a:schemeClr val="accent1"/>
-          </a:effectRef>
-          <a:fontRef idx="minor">
-            <a:schemeClr val="lt1"/>
-          </a:fontRef>
-        </p:style>
-        <p:txBody>
-          <a:bodyPr rtlCol="0" anchor="ctr"/>
-          <a:lstStyle/>
-          <a:p>
-            <a:pPr algn="ctr"/>
-          </a:p>
-        </p:txBody>
-      </p:sp>
-      <p:sp>
-        <p:nvSpPr>
-          <p:cNvPr id="4" name="TextBox 3"/>
-          <p:cNvSpPr txBox="1"/>
-          <p:nvPr/>
-        </p:nvSpPr>
-        <p:spPr>
-          <a:xfrm>
-            <a:off x="594360" y="3931920"/>
-            <a:ext cx="10972800" cy="274320"/>
-          </a:xfrm>
-          <a:prstGeom prst="rect">
-            <a:avLst/>
-          </a:prstGeom>
-          <a:noFill/>
-        </p:spPr>
-        <p:txBody>
-          <a:bodyPr wrap="square" anchor="t">
-            <a:spAutoFit/>
-          </a:bodyPr>
-          <a:lstStyle/>
-          <a:p>
-            <a:pPr algn="l">
-              <a:spcAft>
-                <a:spcPts val="0"/>
-              </a:spcAft>
-            </a:pPr>
-            <a:r>
-              <a:rPr sz="1300" b="1" i="0">
-                <a:solidFill>
-                  <a:srgbClr val="14A3A3"/>
-                </a:solidFill>
-                <a:latin typeface="Calibri"/>
-              </a:rPr>
-              <a:t>The ask</a:t>
-            </a:r>
-          </a:p>
-        </p:txBody>
-      </p:sp>
-      <p:sp>
-        <p:nvSpPr>
-          <p:cNvPr id="5" name="TextBox 4"/>
-          <p:cNvSpPr txBox="1"/>
-          <p:nvPr/>
-        </p:nvSpPr>
-        <p:spPr>
-          <a:xfrm>
-            <a:off x="594360" y="4389120"/>
-            <a:ext cx="10972800" cy="822960"/>
-          </a:xfrm>
-          <a:prstGeom prst="rect">
-            <a:avLst/>
-          </a:prstGeom>
-          <a:noFill/>
-        </p:spPr>
-        <p:txBody>
-          <a:bodyPr wrap="square" anchor="t">
-            <a:spAutoFit/>
-          </a:bodyPr>
-          <a:lstStyle/>
-          <a:p>
-            <a:pPr algn="l">
-              <a:spcAft>
-                <a:spcPts val="0"/>
-              </a:spcAft>
-            </a:pPr>
-            <a:r>
-              <a:rPr sz="2200" b="1" i="0">
-                <a:solidFill>
-                  <a:srgbClr val="FFFFFF"/>
-                </a:solidFill>
-                <a:latin typeface="Calibri"/>
-              </a:rPr>
-              <a:t>Register / host FairBanks women builders at the Kampala GirlCode Hackathon.</a:t>
-            </a:r>
-          </a:p>
-        </p:txBody>
-      </p:sp>
-      <p:sp>
-        <p:nvSpPr>
-          <p:cNvPr id="6" name="TextBox 5"/>
-          <p:cNvSpPr txBox="1"/>
-          <p:nvPr/>
-        </p:nvSpPr>
-        <p:spPr>
-          <a:xfrm>
-            <a:off x="594360" y="5394960"/>
-            <a:ext cx="10972800" cy="365760"/>
-          </a:xfrm>
-          <a:prstGeom prst="rect">
-            <a:avLst/>
-          </a:prstGeom>
-          <a:noFill/>
-        </p:spPr>
-        <p:txBody>
-          <a:bodyPr wrap="square" anchor="t">
-            <a:spAutoFit/>
-          </a:bodyPr>
-          <a:lstStyle/>
-          <a:p>
-            <a:pPr algn="l">
-              <a:spcAft>
-                <a:spcPts val="0"/>
-              </a:spcAft>
-            </a:pPr>
-            <a:r>
-              <a:rPr sz="1400" b="0" i="1">
-                <a:solidFill>
-                  <a:srgbClr val="F2C79B"/>
-                </a:solidFill>
-                <a:latin typeface="Calibri"/>
-              </a:rPr>
-              <a:t>Women builders prototype tools that help CHWs act before crises</a:t>
-            </a:r>
-          </a:p>
-        </p:txBody>
-      </p:sp>
-      <p:sp>
-        <p:nvSpPr>
-          <p:cNvPr id="7" name="TextBox 6"/>
-          <p:cNvSpPr txBox="1"/>
-          <p:nvPr/>
-        </p:nvSpPr>
-        <p:spPr>
-          <a:xfrm>
-            <a:off x="594360" y="5943600"/>
-            <a:ext cx="10972800" cy="320040"/>
-          </a:xfrm>
-          <a:prstGeom prst="rect">
-            <a:avLst/>
-          </a:prstGeom>
-          <a:noFill/>
-        </p:spPr>
-        <p:txBody>
-          <a:bodyPr wrap="square" anchor="t">
-            <a:spAutoFit/>
-          </a:bodyPr>
-          <a:lstStyle/>
-          <a:p>
-            <a:pPr algn="l">
-              <a:spcAft>
-                <a:spcPts val="0"/>
-              </a:spcAft>
-            </a:pPr>
+            <a:pPr algn="l"/>
             <a:r>
               <a:rPr sz="1400" b="1" i="0">
                 <a:solidFill>
@@ -3631,7 +3330,7 @@
         <p:spPr>
           <a:xfrm>
             <a:off x="0" y="0"/>
-            <a:ext cx="12191695" cy="960120"/>
+            <a:ext cx="12191695" cy="914400"/>
           </a:xfrm>
           <a:prstGeom prst="rect">
             <a:avLst/>
@@ -3642,7 +3341,6 @@
           <a:ln>
             <a:noFill/>
           </a:ln>
-          <a:effectLst/>
         </p:spPr>
         <p:style>
           <a:lnRef idx="1">
@@ -3675,7 +3373,7 @@
         <p:spPr>
           <a:xfrm>
             <a:off x="0" y="0"/>
-            <a:ext cx="164592" cy="960120"/>
+            <a:ext cx="137160" cy="914400"/>
           </a:xfrm>
           <a:prstGeom prst="rect">
             <a:avLst/>
@@ -3686,7 +3384,6 @@
           <a:ln>
             <a:noFill/>
           </a:ln>
-          <a:effectLst/>
         </p:spPr>
         <p:style>
           <a:lnRef idx="1">
@@ -3718,125 +3415,8 @@
         </p:nvSpPr>
         <p:spPr>
           <a:xfrm>
-            <a:off x="457200" y="109728"/>
-            <a:ext cx="10972800" cy="256032"/>
-          </a:xfrm>
-          <a:prstGeom prst="rect">
-            <a:avLst/>
-          </a:prstGeom>
-          <a:noFill/>
-        </p:spPr>
-        <p:txBody>
-          <a:bodyPr wrap="square" anchor="t">
-            <a:spAutoFit/>
-          </a:bodyPr>
-          <a:lstStyle/>
-          <a:p>
-            <a:pPr algn="l">
-              <a:spcAft>
-                <a:spcPts val="0"/>
-              </a:spcAft>
-            </a:pPr>
-            <a:r>
-              <a:rPr sz="1100" b="1" i="0">
-                <a:solidFill>
-                  <a:srgbClr val="C45C26"/>
-                </a:solidFill>
-                <a:latin typeface="Calibri"/>
-              </a:rPr>
-              <a:t>WIN-WIN</a:t>
-            </a:r>
-          </a:p>
-        </p:txBody>
-      </p:sp>
-      <p:sp>
-        <p:nvSpPr>
-          <p:cNvPr id="5" name="TextBox 4"/>
-          <p:cNvSpPr txBox="1"/>
-          <p:nvPr/>
-        </p:nvSpPr>
-        <p:spPr>
-          <a:xfrm>
-            <a:off x="457200" y="384048"/>
-            <a:ext cx="11247120" cy="475488"/>
-          </a:xfrm>
-          <a:prstGeom prst="rect">
-            <a:avLst/>
-          </a:prstGeom>
-          <a:noFill/>
-        </p:spPr>
-        <p:txBody>
-          <a:bodyPr wrap="square" anchor="t">
-            <a:spAutoFit/>
-          </a:bodyPr>
-          <a:lstStyle/>
-          <a:p>
-            <a:pPr algn="l">
-              <a:spcAft>
-                <a:spcPts val="0"/>
-              </a:spcAft>
-            </a:pPr>
-            <a:r>
-              <a:rPr sz="2200" b="1" i="0">
-                <a:solidFill>
-                  <a:srgbClr val="0A1F2E"/>
-                </a:solidFill>
-                <a:latin typeface="Calibri"/>
-              </a:rPr>
-              <a:t>Mutual value for FairBanks and the programme</a:t>
-            </a:r>
-          </a:p>
-        </p:txBody>
-      </p:sp>
-      <p:sp>
-        <p:nvSpPr>
-          <p:cNvPr id="6" name="TextBox 5"/>
-          <p:cNvSpPr txBox="1"/>
-          <p:nvPr/>
-        </p:nvSpPr>
-        <p:spPr>
-          <a:xfrm>
-            <a:off x="457200" y="1143000"/>
-            <a:ext cx="5486400" cy="320040"/>
-          </a:xfrm>
-          <a:prstGeom prst="rect">
-            <a:avLst/>
-          </a:prstGeom>
-          <a:noFill/>
-        </p:spPr>
-        <p:txBody>
-          <a:bodyPr wrap="square" anchor="t">
-            <a:spAutoFit/>
-          </a:bodyPr>
-          <a:lstStyle/>
-          <a:p>
-            <a:pPr algn="l">
-              <a:spcAft>
-                <a:spcPts val="0"/>
-              </a:spcAft>
-            </a:pPr>
-            <a:r>
-              <a:rPr sz="1600" b="1" i="0">
-                <a:solidFill>
-                  <a:srgbClr val="0D6E6E"/>
-                </a:solidFill>
-                <a:latin typeface="Calibri"/>
-              </a:rPr>
-              <a:t>What we gain</a:t>
-            </a:r>
-          </a:p>
-        </p:txBody>
-      </p:sp>
-      <p:sp>
-        <p:nvSpPr>
-          <p:cNvPr id="7" name="TextBox 6"/>
-          <p:cNvSpPr txBox="1"/>
-          <p:nvPr/>
-        </p:nvSpPr>
-        <p:spPr>
-          <a:xfrm>
-            <a:off x="457200" y="1508760"/>
-            <a:ext cx="5486400" cy="4800600"/>
+            <a:off x="411480" y="91440"/>
+            <a:ext cx="10972800" cy="274320"/>
           </a:xfrm>
           <a:prstGeom prst="rect">
             <a:avLst/>
@@ -3849,120 +3429,29 @@
           </a:bodyPr>
           <a:lstStyle/>
           <a:p>
-            <a:pPr>
-              <a:spcAft>
-                <a:spcPts val="800"/>
-              </a:spcAft>
-            </a:pPr>
-            <a:r>
-              <a:rPr sz="1300">
-                <a:solidFill>
-                  <a:srgbClr val="1E2F38"/>
+            <a:pPr algn="l"/>
+            <a:r>
+              <a:rPr sz="1100" b="1" i="0">
+                <a:solidFill>
+                  <a:srgbClr val="C45C26"/>
                 </a:solidFill>
                 <a:latin typeface="Calibri"/>
               </a:rPr>
-              <a:t>•  Visibility among Uganda's women-in-tech community</a:t>
-            </a:r>
-          </a:p>
-          <a:p>
-            <a:pPr>
-              <a:spcAft>
-                <a:spcPts val="800"/>
-              </a:spcAft>
-            </a:pPr>
-            <a:r>
-              <a:rPr sz="1300">
-                <a:solidFill>
-                  <a:srgbClr val="1E2F38"/>
-                </a:solidFill>
-                <a:latin typeface="Calibri"/>
-              </a:rPr>
-              <a:t>•  Prototype ideas for FCHIP mobile and alert features</a:t>
-            </a:r>
-          </a:p>
-          <a:p>
-            <a:pPr>
-              <a:spcAft>
-                <a:spcPts val="800"/>
-              </a:spcAft>
-            </a:pPr>
-            <a:r>
-              <a:rPr sz="1300">
-                <a:solidFill>
-                  <a:srgbClr val="1E2F38"/>
-                </a:solidFill>
-                <a:latin typeface="Calibri"/>
-              </a:rPr>
-              <a:t>•  Recruitment pipeline for women technologists</a:t>
-            </a:r>
-          </a:p>
-          <a:p>
-            <a:pPr>
-              <a:spcAft>
-                <a:spcPts val="800"/>
-              </a:spcAft>
-            </a:pPr>
-            <a:r>
-              <a:rPr sz="1300">
-                <a:solidFill>
-                  <a:srgbClr val="1E2F38"/>
-                </a:solidFill>
-                <a:latin typeface="Calibri"/>
-              </a:rPr>
-              <a:t>•  Local proof that deep tech can be built with and for communities</a:t>
-            </a:r>
-          </a:p>
-        </p:txBody>
-      </p:sp>
-      <p:sp>
-        <p:nvSpPr>
-          <p:cNvPr id="8" name="TextBox 7"/>
+              <a:t>HACKATHON</a:t>
+            </a:r>
+          </a:p>
+        </p:txBody>
+      </p:sp>
+      <p:sp>
+        <p:nvSpPr>
+          <p:cNvPr id="5" name="TextBox 4"/>
           <p:cNvSpPr txBox="1"/>
           <p:nvPr/>
         </p:nvSpPr>
         <p:spPr>
           <a:xfrm>
-            <a:off x="6309360" y="1143000"/>
-            <a:ext cx="5486400" cy="320040"/>
-          </a:xfrm>
-          <a:prstGeom prst="rect">
-            <a:avLst/>
-          </a:prstGeom>
-          <a:noFill/>
-        </p:spPr>
-        <p:txBody>
-          <a:bodyPr wrap="square" anchor="t">
-            <a:spAutoFit/>
-          </a:bodyPr>
-          <a:lstStyle/>
-          <a:p>
-            <a:pPr algn="l">
-              <a:spcAft>
-                <a:spcPts val="0"/>
-              </a:spcAft>
-            </a:pPr>
-            <a:r>
-              <a:rPr sz="1600" b="1" i="0">
-                <a:solidFill>
-                  <a:srgbClr val="0D6E6E"/>
-                </a:solidFill>
-                <a:latin typeface="Calibri"/>
-              </a:rPr>
-              <a:t>What they gain</a:t>
-            </a:r>
-          </a:p>
-        </p:txBody>
-      </p:sp>
-      <p:sp>
-        <p:nvSpPr>
-          <p:cNvPr id="9" name="TextBox 8"/>
-          <p:cNvSpPr txBox="1"/>
-          <p:nvPr/>
-        </p:nvSpPr>
-        <p:spPr>
-          <a:xfrm>
-            <a:off x="6309360" y="1508760"/>
-            <a:ext cx="5394960" cy="4800600"/>
+            <a:off x="411480" y="384048"/>
+            <a:ext cx="10972800" cy="457200"/>
           </a:xfrm>
           <a:prstGeom prst="rect">
             <a:avLst/>
@@ -3975,81 +3464,66 @@
           </a:bodyPr>
           <a:lstStyle/>
           <a:p>
-            <a:pPr>
-              <a:spcAft>
-                <a:spcPts val="800"/>
-              </a:spcAft>
-            </a:pPr>
-            <a:r>
-              <a:rPr sz="1300">
-                <a:solidFill>
-                  <a:srgbClr val="1E2F38"/>
+            <a:pPr algn="l"/>
+            <a:r>
+              <a:rPr sz="2400" b="1" i="0">
+                <a:solidFill>
+                  <a:srgbClr val="0A1F2E"/>
                 </a:solidFill>
                 <a:latin typeface="Calibri"/>
               </a:rPr>
-              <a:t>•  A concrete HealthTech / AI challenge grounded in real CHW work</a:t>
-            </a:r>
-          </a:p>
-          <a:p>
-            <a:pPr>
-              <a:spcAft>
-                <a:spcPts val="800"/>
-              </a:spcAft>
-            </a:pPr>
-            <a:r>
-              <a:rPr sz="1300">
+              <a:t>Build on real community health problems</a:t>
+            </a:r>
+          </a:p>
+        </p:txBody>
+      </p:sp>
+      <p:sp>
+        <p:nvSpPr>
+          <p:cNvPr id="6" name="TextBox 5"/>
+          <p:cNvSpPr txBox="1"/>
+          <p:nvPr/>
+        </p:nvSpPr>
+        <p:spPr>
+          <a:xfrm>
+            <a:off x="457200" y="1097280"/>
+            <a:ext cx="10972800" cy="5029200"/>
+          </a:xfrm>
+          <a:prstGeom prst="rect">
+            <a:avLst/>
+          </a:prstGeom>
+          <a:noFill/>
+        </p:spPr>
+        <p:txBody>
+          <a:bodyPr wrap="square">
+            <a:spAutoFit/>
+          </a:bodyPr>
+          <a:lstStyle/>
+          <a:p>
+            <a:pPr algn="l"/>
+            <a:r>
+              <a:rPr sz="1800" b="0" i="0">
                 <a:solidFill>
                   <a:srgbClr val="1E2F38"/>
                 </a:solidFill>
                 <a:latin typeface="Calibri"/>
               </a:rPr>
-              <a:t>•  Mentorship access from a live medical centre and outreach team</a:t>
-            </a:r>
-          </a:p>
-          <a:p>
-            <a:pPr>
-              <a:spcAft>
-                <a:spcPts val="800"/>
-              </a:spcAft>
-            </a:pPr>
-            <a:r>
-              <a:rPr sz="1300">
-                <a:solidFill>
-                  <a:srgbClr val="1E2F38"/>
-                </a:solidFill>
-                <a:latin typeface="Calibri"/>
-              </a:rPr>
-              <a:t>•  Strong Kampala story aligned with GirlCode's six-country mission</a:t>
-            </a:r>
-          </a:p>
-          <a:p>
-            <a:pPr>
-              <a:spcAft>
-                <a:spcPts val="800"/>
-              </a:spcAft>
-            </a:pPr>
-            <a:r>
-              <a:rPr sz="1300">
-                <a:solidFill>
-                  <a:srgbClr val="1E2F38"/>
-                </a:solidFill>
-                <a:latin typeface="Calibri"/>
-              </a:rPr>
-              <a:t>•  Path from hackathon demo to community impact, not shelfware</a:t>
-            </a:r>
-          </a:p>
-        </p:txBody>
-      </p:sp>
-      <p:sp>
-        <p:nvSpPr>
-          <p:cNvPr id="10" name="Rectangle 9"/>
+              <a:t>FairBanks = medical centre + outreach + CHWs + FCHIP intelligence
+30 hours · women builders · Kampala · UICT Nakawa
+We provide problem statements, sample schemas, and mentor hours.</a:t>
+            </a:r>
+          </a:p>
+        </p:txBody>
+      </p:sp>
+      <p:sp>
+        <p:nvSpPr>
+          <p:cNvPr id="7" name="Rectangle 6"/>
           <p:cNvSpPr/>
           <p:nvPr/>
         </p:nvSpPr>
         <p:spPr>
           <a:xfrm>
-            <a:off x="0" y="6565392"/>
-            <a:ext cx="12191695" cy="292608"/>
+            <a:off x="0" y="6583680"/>
+            <a:ext cx="12191695" cy="274320"/>
           </a:xfrm>
           <a:prstGeom prst="rect">
             <a:avLst/>
@@ -4060,7 +3534,6 @@
           <a:ln>
             <a:noFill/>
           </a:ln>
-          <a:effectLst/>
         </p:spPr>
         <p:style>
           <a:lnRef idx="1">
@@ -4086,14 +3559,14 @@
       </p:sp>
       <p:sp>
         <p:nvSpPr>
-          <p:cNvPr id="11" name="TextBox 10"/>
+          <p:cNvPr id="8" name="TextBox 7"/>
           <p:cNvSpPr txBox="1"/>
           <p:nvPr/>
         </p:nvSpPr>
         <p:spPr>
           <a:xfrm>
-            <a:off x="365760" y="6574536"/>
-            <a:ext cx="9144000" cy="274320"/>
+            <a:off x="365760" y="6592824"/>
+            <a:ext cx="9144000" cy="256032"/>
           </a:xfrm>
           <a:prstGeom prst="rect">
             <a:avLst/>
@@ -4101,16 +3574,12 @@
           <a:noFill/>
         </p:spPr>
         <p:txBody>
-          <a:bodyPr wrap="square" anchor="ctr">
+          <a:bodyPr wrap="square">
             <a:spAutoFit/>
           </a:bodyPr>
           <a:lstStyle/>
           <a:p>
-            <a:pPr algn="l">
-              <a:spcAft>
-                <a:spcPts val="0"/>
-              </a:spcAft>
-            </a:pPr>
+            <a:pPr algn="l"/>
             <a:r>
               <a:rPr sz="900" b="0" i="0">
                 <a:solidFill>
@@ -4118,21 +3587,21 @@
                 </a:solidFill>
                 <a:latin typeface="Calibri"/>
               </a:rPr>
-              <a:t>FairBanks FCHIP  |  GirlCode Hackathon 2026 — Kampala  |  Your health, our mission.</a:t>
-            </a:r>
-          </a:p>
-        </p:txBody>
-      </p:sp>
-      <p:sp>
-        <p:nvSpPr>
-          <p:cNvPr id="12" name="TextBox 11"/>
+              <a:t>FairBanks FCHIP | GirlCode Kampala 2026 | Your health, our mission.</a:t>
+            </a:r>
+          </a:p>
+        </p:txBody>
+      </p:sp>
+      <p:sp>
+        <p:nvSpPr>
+          <p:cNvPr id="9" name="TextBox 8"/>
           <p:cNvSpPr txBox="1"/>
           <p:nvPr/>
         </p:nvSpPr>
         <p:spPr>
           <a:xfrm>
-            <a:off x="11094415" y="6574536"/>
-            <a:ext cx="731520" cy="274320"/>
+            <a:off x="11460175" y="6592824"/>
+            <a:ext cx="457200" cy="256032"/>
           </a:xfrm>
           <a:prstGeom prst="rect">
             <a:avLst/>
@@ -4140,16 +3609,12 @@
           <a:noFill/>
         </p:spPr>
         <p:txBody>
-          <a:bodyPr wrap="square" anchor="ctr">
+          <a:bodyPr wrap="square">
             <a:spAutoFit/>
           </a:bodyPr>
           <a:lstStyle/>
           <a:p>
-            <a:pPr algn="r">
-              <a:spcAft>
-                <a:spcPts val="0"/>
-              </a:spcAft>
-            </a:pPr>
+            <a:pPr algn="r"/>
             <a:r>
               <a:rPr sz="900" b="0" i="0">
                 <a:solidFill>
@@ -4189,7 +3654,7 @@
         <p:spPr>
           <a:xfrm>
             <a:off x="0" y="0"/>
-            <a:ext cx="12191695" cy="960120"/>
+            <a:ext cx="12191695" cy="914400"/>
           </a:xfrm>
           <a:prstGeom prst="rect">
             <a:avLst/>
@@ -4200,7 +3665,6 @@
           <a:ln>
             <a:noFill/>
           </a:ln>
-          <a:effectLst/>
         </p:spPr>
         <p:style>
           <a:lnRef idx="1">
@@ -4233,7 +3697,7 @@
         <p:spPr>
           <a:xfrm>
             <a:off x="0" y="0"/>
-            <a:ext cx="164592" cy="960120"/>
+            <a:ext cx="137160" cy="914400"/>
           </a:xfrm>
           <a:prstGeom prst="rect">
             <a:avLst/>
@@ -4244,7 +3708,6 @@
           <a:ln>
             <a:noFill/>
           </a:ln>
-          <a:effectLst/>
         </p:spPr>
         <p:style>
           <a:lnRef idx="1">
@@ -4276,8 +3739,8 @@
         </p:nvSpPr>
         <p:spPr>
           <a:xfrm>
-            <a:off x="457200" y="109728"/>
-            <a:ext cx="10972800" cy="256032"/>
+            <a:off x="411480" y="91440"/>
+            <a:ext cx="10972800" cy="274320"/>
           </a:xfrm>
           <a:prstGeom prst="rect">
             <a:avLst/>
@@ -4285,16 +3748,12 @@
           <a:noFill/>
         </p:spPr>
         <p:txBody>
-          <a:bodyPr wrap="square" anchor="t">
+          <a:bodyPr wrap="square">
             <a:spAutoFit/>
           </a:bodyPr>
           <a:lstStyle/>
           <a:p>
-            <a:pPr algn="l">
-              <a:spcAft>
-                <a:spcPts val="0"/>
-              </a:spcAft>
-            </a:pPr>
+            <a:pPr algn="l"/>
             <a:r>
               <a:rPr sz="1100" b="1" i="0">
                 <a:solidFill>
@@ -4302,7 +3761,7 @@
                 </a:solidFill>
                 <a:latin typeface="Calibri"/>
               </a:rPr>
-              <a:t>THE PROBLEM</a:t>
+              <a:t>PLATFORM</a:t>
             </a:r>
           </a:p>
         </p:txBody>
@@ -4315,8 +3774,8 @@
         </p:nvSpPr>
         <p:spPr>
           <a:xfrm>
-            <a:off x="457200" y="384048"/>
-            <a:ext cx="11247120" cy="475488"/>
+            <a:off x="411480" y="384048"/>
+            <a:ext cx="10972800" cy="457200"/>
           </a:xfrm>
           <a:prstGeom prst="rect">
             <a:avLst/>
@@ -4324,31 +3783,27 @@
           <a:noFill/>
         </p:spPr>
         <p:txBody>
-          <a:bodyPr wrap="square" anchor="t">
+          <a:bodyPr wrap="square">
             <a:spAutoFit/>
           </a:bodyPr>
           <a:lstStyle/>
           <a:p>
-            <a:pPr algn="l">
-              <a:spcAft>
-                <a:spcPts val="0"/>
-              </a:spcAft>
-            </a:pPr>
-            <a:r>
-              <a:rPr sz="2200" b="1" i="0">
+            <a:pPr algn="l"/>
+            <a:r>
+              <a:rPr sz="2400" b="1" i="0">
                 <a:solidFill>
                   <a:srgbClr val="0A1F2E"/>
                 </a:solidFill>
                 <a:latin typeface="Calibri"/>
               </a:rPr>
-              <a:t>Health systems react too late</a:t>
+              <a:t>FCHIP — what you are extending</a:t>
             </a:r>
           </a:p>
         </p:txBody>
       </p:sp>
       <p:pic>
         <p:nvPicPr>
-          <p:cNvPr id="6" name="Picture 5" descr="reactive_clinic_opt.jpg"/>
+          <p:cNvPr id="6" name="Picture 5" descr="data_flow_iso_labeled_opt.jpg"/>
           <p:cNvPicPr>
             <a:picLocks noChangeAspect="1"/>
           </p:cNvPicPr>
@@ -4362,8 +3817,8 @@
         </p:blipFill>
         <p:spPr>
           <a:xfrm>
-            <a:off x="411480" y="2004691"/>
-            <a:ext cx="5303520" cy="3534417"/>
+            <a:off x="365760" y="1418104"/>
+            <a:ext cx="6583680" cy="4387552"/>
           </a:xfrm>
           <a:prstGeom prst="rect">
             <a:avLst/>
@@ -4378,8 +3833,8 @@
         </p:nvSpPr>
         <p:spPr>
           <a:xfrm>
-            <a:off x="6035040" y="1234440"/>
-            <a:ext cx="5669280" cy="5074920"/>
+            <a:off x="7223760" y="1097280"/>
+            <a:ext cx="4572000" cy="5029200"/>
           </a:xfrm>
           <a:prstGeom prst="rect">
             <a:avLst/>
@@ -4392,83 +3847,16 @@
           </a:bodyPr>
           <a:lstStyle/>
           <a:p>
-            <a:pPr>
-              <a:spcAft>
-                <a:spcPts val="800"/>
-              </a:spcAft>
-            </a:pPr>
-            <a:r>
-              <a:rPr sz="1400">
-                <a:solidFill>
-                  <a:srgbClr val="1E2F38"/>
+            <a:pPr algn="l"/>
+            <a:r>
+              <a:rPr sz="1600" b="0" i="0">
+                <a:solidFill>
+                  <a:srgbClr val="3A4A54"/>
                 </a:solidFill>
                 <a:latin typeface="Calibri"/>
               </a:rPr>
-              <a:t>•  Care often starts only after people fall sick</a:t>
-            </a:r>
-          </a:p>
-          <a:p>
-            <a:pPr>
-              <a:spcAft>
-                <a:spcPts val="800"/>
-              </a:spcAft>
-            </a:pPr>
-            <a:r>
-              <a:rPr sz="1400">
-                <a:solidFill>
-                  <a:srgbClr val="1E2F38"/>
-                </a:solidFill>
-                <a:latin typeface="Calibri"/>
-              </a:rPr>
-              <a:t>•  Community health data sits in paper registers and silos</a:t>
-            </a:r>
-          </a:p>
-          <a:p>
-            <a:pPr>
-              <a:spcAft>
-                <a:spcPts val="800"/>
-              </a:spcAft>
-            </a:pPr>
-            <a:r>
-              <a:rPr sz="1400">
-                <a:solidFill>
-                  <a:srgbClr val="1E2F38"/>
-                </a:solidFill>
-                <a:latin typeface="Calibri"/>
-              </a:rPr>
-              <a:t>•  High-risk pregnancies and NCDs are found too late</a:t>
-            </a:r>
-          </a:p>
-          <a:p>
-            <a:pPr>
-              <a:spcAft>
-                <a:spcPts val="800"/>
-              </a:spcAft>
-            </a:pPr>
-            <a:r>
-              <a:rPr sz="1400">
-                <a:solidFill>
-                  <a:srgbClr val="1E2F38"/>
-                </a:solidFill>
-                <a:latin typeface="Calibri"/>
-              </a:rPr>
-              <a:t>•  Medicine stock-outs hit hard during disease surges</a:t>
-            </a:r>
-          </a:p>
-          <a:p>
-            <a:pPr>
-              <a:spcAft>
-                <a:spcPts val="800"/>
-              </a:spcAft>
-            </a:pPr>
-            <a:r>
-              <a:rPr sz="1400">
-                <a:solidFill>
-                  <a:srgbClr val="1E2F38"/>
-                </a:solidFill>
-                <a:latin typeface="Calibri"/>
-              </a:rPr>
-              <a:t>•  Health shocks push poor families deeper into hardship</a:t>
+              <a:t>Offline capture → predictions → alerts
+Outbreak · maternal · NCD · child health · stock-outs</a:t>
             </a:r>
           </a:p>
         </p:txBody>
@@ -4481,8 +3869,8 @@
         </p:nvSpPr>
         <p:spPr>
           <a:xfrm>
-            <a:off x="0" y="6565392"/>
-            <a:ext cx="12191695" cy="292608"/>
+            <a:off x="0" y="6583680"/>
+            <a:ext cx="12191695" cy="274320"/>
           </a:xfrm>
           <a:prstGeom prst="rect">
             <a:avLst/>
@@ -4493,7 +3881,6 @@
           <a:ln>
             <a:noFill/>
           </a:ln>
-          <a:effectLst/>
         </p:spPr>
         <p:style>
           <a:lnRef idx="1">
@@ -4525,8 +3912,8 @@
         </p:nvSpPr>
         <p:spPr>
           <a:xfrm>
-            <a:off x="365760" y="6574536"/>
-            <a:ext cx="9144000" cy="274320"/>
+            <a:off x="365760" y="6592824"/>
+            <a:ext cx="9144000" cy="256032"/>
           </a:xfrm>
           <a:prstGeom prst="rect">
             <a:avLst/>
@@ -4534,16 +3921,12 @@
           <a:noFill/>
         </p:spPr>
         <p:txBody>
-          <a:bodyPr wrap="square" anchor="ctr">
+          <a:bodyPr wrap="square">
             <a:spAutoFit/>
           </a:bodyPr>
           <a:lstStyle/>
           <a:p>
-            <a:pPr algn="l">
-              <a:spcAft>
-                <a:spcPts val="0"/>
-              </a:spcAft>
-            </a:pPr>
+            <a:pPr algn="l"/>
             <a:r>
               <a:rPr sz="900" b="0" i="0">
                 <a:solidFill>
@@ -4551,7 +3934,7 @@
                 </a:solidFill>
                 <a:latin typeface="Calibri"/>
               </a:rPr>
-              <a:t>FairBanks FCHIP  |  GirlCode Hackathon 2026 — Kampala  |  Your health, our mission.</a:t>
+              <a:t>FairBanks FCHIP | GirlCode Kampala 2026 | Your health, our mission.</a:t>
             </a:r>
           </a:p>
         </p:txBody>
@@ -4564,8 +3947,8 @@
         </p:nvSpPr>
         <p:spPr>
           <a:xfrm>
-            <a:off x="11094415" y="6574536"/>
-            <a:ext cx="731520" cy="274320"/>
+            <a:off x="11460175" y="6592824"/>
+            <a:ext cx="457200" cy="256032"/>
           </a:xfrm>
           <a:prstGeom prst="rect">
             <a:avLst/>
@@ -4573,16 +3956,12 @@
           <a:noFill/>
         </p:spPr>
         <p:txBody>
-          <a:bodyPr wrap="square" anchor="ctr">
+          <a:bodyPr wrap="square">
             <a:spAutoFit/>
           </a:bodyPr>
           <a:lstStyle/>
           <a:p>
-            <a:pPr algn="r">
-              <a:spcAft>
-                <a:spcPts val="0"/>
-              </a:spcAft>
-            </a:pPr>
+            <a:pPr algn="r"/>
             <a:r>
               <a:rPr sz="900" b="0" i="0">
                 <a:solidFill>
@@ -4622,7 +4001,7 @@
         <p:spPr>
           <a:xfrm>
             <a:off x="0" y="0"/>
-            <a:ext cx="12191695" cy="960120"/>
+            <a:ext cx="12191695" cy="914400"/>
           </a:xfrm>
           <a:prstGeom prst="rect">
             <a:avLst/>
@@ -4633,7 +4012,6 @@
           <a:ln>
             <a:noFill/>
           </a:ln>
-          <a:effectLst/>
         </p:spPr>
         <p:style>
           <a:lnRef idx="1">
@@ -4666,7 +4044,7 @@
         <p:spPr>
           <a:xfrm>
             <a:off x="0" y="0"/>
-            <a:ext cx="164592" cy="960120"/>
+            <a:ext cx="137160" cy="914400"/>
           </a:xfrm>
           <a:prstGeom prst="rect">
             <a:avLst/>
@@ -4677,7 +4055,6 @@
           <a:ln>
             <a:noFill/>
           </a:ln>
-          <a:effectLst/>
         </p:spPr>
         <p:style>
           <a:lnRef idx="1">
@@ -4709,8 +4086,8 @@
         </p:nvSpPr>
         <p:spPr>
           <a:xfrm>
-            <a:off x="457200" y="109728"/>
-            <a:ext cx="10972800" cy="256032"/>
+            <a:off x="411480" y="91440"/>
+            <a:ext cx="10972800" cy="274320"/>
           </a:xfrm>
           <a:prstGeom prst="rect">
             <a:avLst/>
@@ -4718,16 +4095,12 @@
           <a:noFill/>
         </p:spPr>
         <p:txBody>
-          <a:bodyPr wrap="square" anchor="t">
+          <a:bodyPr wrap="square">
             <a:spAutoFit/>
           </a:bodyPr>
           <a:lstStyle/>
           <a:p>
-            <a:pPr algn="l">
-              <a:spcAft>
-                <a:spcPts val="0"/>
-              </a:spcAft>
-            </a:pPr>
+            <a:pPr algn="l"/>
             <a:r>
               <a:rPr sz="1100" b="1" i="0">
                 <a:solidFill>
@@ -4735,7 +4108,7 @@
                 </a:solidFill>
                 <a:latin typeface="Calibri"/>
               </a:rPr>
-              <a:t>THE SOLUTION</a:t>
+              <a:t>TRACK A</a:t>
             </a:r>
           </a:p>
         </p:txBody>
@@ -4748,8 +4121,8 @@
         </p:nvSpPr>
         <p:spPr>
           <a:xfrm>
-            <a:off x="457200" y="384048"/>
-            <a:ext cx="11247120" cy="475488"/>
+            <a:off x="411480" y="384048"/>
+            <a:ext cx="10972800" cy="457200"/>
           </a:xfrm>
           <a:prstGeom prst="rect">
             <a:avLst/>
@@ -4757,31 +4130,27 @@
           <a:noFill/>
         </p:spPr>
         <p:txBody>
-          <a:bodyPr wrap="square" anchor="t">
+          <a:bodyPr wrap="square">
             <a:spAutoFit/>
           </a:bodyPr>
           <a:lstStyle/>
           <a:p>
-            <a:pPr algn="l">
-              <a:spcAft>
-                <a:spcPts val="0"/>
-              </a:spcAft>
-            </a:pPr>
-            <a:r>
-              <a:rPr sz="2200" b="1" i="0">
+            <a:pPr algn="l"/>
+            <a:r>
+              <a:rPr sz="2400" b="1" i="0">
                 <a:solidFill>
                   <a:srgbClr val="0A1F2E"/>
                 </a:solidFill>
                 <a:latin typeface="Calibri"/>
               </a:rPr>
-              <a:t>FCHIP — community health intelligence</a:t>
+              <a:t>Maternal risk early warning</a:t>
             </a:r>
           </a:p>
         </p:txBody>
       </p:sp>
       <p:pic>
         <p:nvPicPr>
-          <p:cNvPr id="6" name="Picture 5" descr="data_flow_iso_labeled_opt.jpg"/>
+          <p:cNvPr id="6" name="Picture 5" descr="bloom_maternal_health_participant_01_opt.jpg"/>
           <p:cNvPicPr>
             <a:picLocks noChangeAspect="1"/>
           </p:cNvPicPr>
@@ -4795,8 +4164,8 @@
         </p:blipFill>
         <p:spPr>
           <a:xfrm>
-            <a:off x="365760" y="1639062"/>
-            <a:ext cx="6400800" cy="4265676"/>
+            <a:off x="411480" y="1935480"/>
+            <a:ext cx="5029200" cy="3352800"/>
           </a:xfrm>
           <a:prstGeom prst="rect">
             <a:avLst/>
@@ -4811,8 +4180,8 @@
         </p:nvSpPr>
         <p:spPr>
           <a:xfrm>
-            <a:off x="7040880" y="1234440"/>
-            <a:ext cx="4754880" cy="5074920"/>
+            <a:off x="5669280" y="1097280"/>
+            <a:ext cx="5943600" cy="3200400"/>
           </a:xfrm>
           <a:prstGeom prst="rect">
             <a:avLst/>
@@ -4825,81 +4194,64 @@
           </a:bodyPr>
           <a:lstStyle/>
           <a:p>
-            <a:pPr>
-              <a:spcAft>
-                <a:spcPts val="800"/>
-              </a:spcAft>
-            </a:pPr>
-            <a:r>
-              <a:rPr sz="1400">
+            <a:pPr algn="l"/>
+            <a:r>
+              <a:rPr sz="1500" b="0" i="0">
                 <a:solidFill>
                   <a:srgbClr val="1E2F38"/>
                 </a:solidFill>
                 <a:latin typeface="Calibri"/>
               </a:rPr>
-              <a:t>•  CHWs and VHTs capture structured data at household level</a:t>
-            </a:r>
-          </a:p>
-          <a:p>
-            <a:pPr>
-              <a:spcAft>
-                <a:spcPts val="800"/>
-              </a:spcAft>
-            </a:pPr>
-            <a:r>
-              <a:rPr sz="1400">
-                <a:solidFill>
-                  <a:srgbClr val="1E2F38"/>
+              <a:t>High-risk pregnancies are often found late. Can your team turn outreach-style signals (missed ANC, BP patterns, anaemia proxies) into timely CHW alerts?</a:t>
+            </a:r>
+          </a:p>
+        </p:txBody>
+      </p:sp>
+      <p:sp>
+        <p:nvSpPr>
+          <p:cNvPr id="8" name="TextBox 7"/>
+          <p:cNvSpPr txBox="1"/>
+          <p:nvPr/>
+        </p:nvSpPr>
+        <p:spPr>
+          <a:xfrm>
+            <a:off x="5669280" y="4389120"/>
+            <a:ext cx="5943600" cy="1371600"/>
+          </a:xfrm>
+          <a:prstGeom prst="rect">
+            <a:avLst/>
+          </a:prstGeom>
+          <a:noFill/>
+        </p:spPr>
+        <p:txBody>
+          <a:bodyPr wrap="square">
+            <a:spAutoFit/>
+          </a:bodyPr>
+          <a:lstStyle/>
+          <a:p>
+            <a:pPr algn="l"/>
+            <a:r>
+              <a:rPr sz="1300" b="0" i="1">
+                <a:solidFill>
+                  <a:srgbClr val="C45C26"/>
                 </a:solidFill>
                 <a:latin typeface="Calibri"/>
               </a:rPr>
-              <a:t>•  FCHIP applies AI, ML, and GIS to predict risk early</a:t>
-            </a:r>
-          </a:p>
-          <a:p>
-            <a:pPr>
-              <a:spcAft>
-                <a:spcPts val="800"/>
-              </a:spcAft>
-            </a:pPr>
-            <a:r>
-              <a:rPr sz="1400">
-                <a:solidFill>
-                  <a:srgbClr val="1E2F38"/>
-                </a:solidFill>
-                <a:latin typeface="Calibri"/>
-              </a:rPr>
-              <a:t>•  Alerts reach clinics, districts, and partners in time to act</a:t>
-            </a:r>
-          </a:p>
-          <a:p>
-            <a:pPr>
-              <a:spcAft>
-                <a:spcPts val="800"/>
-              </a:spcAft>
-            </a:pPr>
-            <a:r>
-              <a:rPr sz="1400">
-                <a:solidFill>
-                  <a:srgbClr val="1E2F38"/>
-                </a:solidFill>
-                <a:latin typeface="Calibri"/>
-              </a:rPr>
-              <a:t>•  Built on a live medical centre and community programmes</a:t>
-            </a:r>
-          </a:p>
-        </p:txBody>
-      </p:sp>
-      <p:sp>
-        <p:nvSpPr>
-          <p:cNvPr id="8" name="Rectangle 7"/>
+              <a:t>Stretch: Explainable scores · offline-first · no stigma</a:t>
+            </a:r>
+          </a:p>
+        </p:txBody>
+      </p:sp>
+      <p:sp>
+        <p:nvSpPr>
+          <p:cNvPr id="9" name="Rectangle 8"/>
           <p:cNvSpPr/>
           <p:nvPr/>
         </p:nvSpPr>
         <p:spPr>
           <a:xfrm>
-            <a:off x="0" y="6565392"/>
-            <a:ext cx="12191695" cy="292608"/>
+            <a:off x="0" y="6583680"/>
+            <a:ext cx="12191695" cy="274320"/>
           </a:xfrm>
           <a:prstGeom prst="rect">
             <a:avLst/>
@@ -4910,7 +4262,6 @@
           <a:ln>
             <a:noFill/>
           </a:ln>
-          <a:effectLst/>
         </p:spPr>
         <p:style>
           <a:lnRef idx="1">
@@ -4936,14 +4287,14 @@
       </p:sp>
       <p:sp>
         <p:nvSpPr>
-          <p:cNvPr id="9" name="TextBox 8"/>
+          <p:cNvPr id="10" name="TextBox 9"/>
           <p:cNvSpPr txBox="1"/>
           <p:nvPr/>
         </p:nvSpPr>
         <p:spPr>
           <a:xfrm>
-            <a:off x="365760" y="6574536"/>
-            <a:ext cx="9144000" cy="274320"/>
+            <a:off x="365760" y="6592824"/>
+            <a:ext cx="9144000" cy="256032"/>
           </a:xfrm>
           <a:prstGeom prst="rect">
             <a:avLst/>
@@ -4951,16 +4302,12 @@
           <a:noFill/>
         </p:spPr>
         <p:txBody>
-          <a:bodyPr wrap="square" anchor="ctr">
+          <a:bodyPr wrap="square">
             <a:spAutoFit/>
           </a:bodyPr>
           <a:lstStyle/>
           <a:p>
-            <a:pPr algn="l">
-              <a:spcAft>
-                <a:spcPts val="0"/>
-              </a:spcAft>
-            </a:pPr>
+            <a:pPr algn="l"/>
             <a:r>
               <a:rPr sz="900" b="0" i="0">
                 <a:solidFill>
@@ -4968,21 +4315,21 @@
                 </a:solidFill>
                 <a:latin typeface="Calibri"/>
               </a:rPr>
-              <a:t>FairBanks FCHIP  |  GirlCode Hackathon 2026 — Kampala  |  Your health, our mission.</a:t>
-            </a:r>
-          </a:p>
-        </p:txBody>
-      </p:sp>
-      <p:sp>
-        <p:nvSpPr>
-          <p:cNvPr id="10" name="TextBox 9"/>
+              <a:t>FairBanks FCHIP | GirlCode Kampala 2026 | Your health, our mission.</a:t>
+            </a:r>
+          </a:p>
+        </p:txBody>
+      </p:sp>
+      <p:sp>
+        <p:nvSpPr>
+          <p:cNvPr id="11" name="TextBox 10"/>
           <p:cNvSpPr txBox="1"/>
           <p:nvPr/>
         </p:nvSpPr>
         <p:spPr>
           <a:xfrm>
-            <a:off x="11094415" y="6574536"/>
-            <a:ext cx="731520" cy="274320"/>
+            <a:off x="11460175" y="6592824"/>
+            <a:ext cx="457200" cy="256032"/>
           </a:xfrm>
           <a:prstGeom prst="rect">
             <a:avLst/>
@@ -4990,16 +4337,12 @@
           <a:noFill/>
         </p:spPr>
         <p:txBody>
-          <a:bodyPr wrap="square" anchor="ctr">
+          <a:bodyPr wrap="square">
             <a:spAutoFit/>
           </a:bodyPr>
           <a:lstStyle/>
           <a:p>
-            <a:pPr algn="r">
-              <a:spcAft>
-                <a:spcPts val="0"/>
-              </a:spcAft>
-            </a:pPr>
+            <a:pPr algn="r"/>
             <a:r>
               <a:rPr sz="900" b="0" i="0">
                 <a:solidFill>
@@ -5039,7 +4382,7 @@
         <p:spPr>
           <a:xfrm>
             <a:off x="0" y="0"/>
-            <a:ext cx="12191695" cy="960120"/>
+            <a:ext cx="12191695" cy="914400"/>
           </a:xfrm>
           <a:prstGeom prst="rect">
             <a:avLst/>
@@ -5050,7 +4393,6 @@
           <a:ln>
             <a:noFill/>
           </a:ln>
-          <a:effectLst/>
         </p:spPr>
         <p:style>
           <a:lnRef idx="1">
@@ -5083,7 +4425,7 @@
         <p:spPr>
           <a:xfrm>
             <a:off x="0" y="0"/>
-            <a:ext cx="164592" cy="960120"/>
+            <a:ext cx="137160" cy="914400"/>
           </a:xfrm>
           <a:prstGeom prst="rect">
             <a:avLst/>
@@ -5094,7 +4436,6 @@
           <a:ln>
             <a:noFill/>
           </a:ln>
-          <a:effectLst/>
         </p:spPr>
         <p:style>
           <a:lnRef idx="1">
@@ -5126,8 +4467,8 @@
         </p:nvSpPr>
         <p:spPr>
           <a:xfrm>
-            <a:off x="457200" y="109728"/>
-            <a:ext cx="10972800" cy="256032"/>
+            <a:off x="411480" y="91440"/>
+            <a:ext cx="10972800" cy="274320"/>
           </a:xfrm>
           <a:prstGeom prst="rect">
             <a:avLst/>
@@ -5135,16 +4476,12 @@
           <a:noFill/>
         </p:spPr>
         <p:txBody>
-          <a:bodyPr wrap="square" anchor="t">
+          <a:bodyPr wrap="square">
             <a:spAutoFit/>
           </a:bodyPr>
           <a:lstStyle/>
           <a:p>
-            <a:pPr algn="l">
-              <a:spcAft>
-                <a:spcPts val="0"/>
-              </a:spcAft>
-            </a:pPr>
+            <a:pPr algn="l"/>
             <a:r>
               <a:rPr sz="1100" b="1" i="0">
                 <a:solidFill>
@@ -5152,7 +4489,7 @@
                 </a:solidFill>
                 <a:latin typeface="Calibri"/>
               </a:rPr>
-              <a:t>PROGRAMME FIT</a:t>
+              <a:t>TRACK B</a:t>
             </a:r>
           </a:p>
         </p:txBody>
@@ -5165,8 +4502,8 @@
         </p:nvSpPr>
         <p:spPr>
           <a:xfrm>
-            <a:off x="457200" y="384048"/>
-            <a:ext cx="11247120" cy="475488"/>
+            <a:off x="411480" y="384048"/>
+            <a:ext cx="10972800" cy="457200"/>
           </a:xfrm>
           <a:prstGeom prst="rect">
             <a:avLst/>
@@ -5174,74 +4511,48 @@
           <a:noFill/>
         </p:spPr>
         <p:txBody>
-          <a:bodyPr wrap="square" anchor="t">
+          <a:bodyPr wrap="square">
             <a:spAutoFit/>
           </a:bodyPr>
           <a:lstStyle/>
           <a:p>
-            <a:pPr algn="l">
-              <a:spcAft>
-                <a:spcPts val="0"/>
-              </a:spcAft>
-            </a:pPr>
-            <a:r>
-              <a:rPr sz="2200" b="1" i="0">
+            <a:pPr algn="l"/>
+            <a:r>
+              <a:rPr sz="2400" b="1" i="0">
                 <a:solidFill>
                   <a:srgbClr val="0A1F2E"/>
                 </a:solidFill>
                 <a:latin typeface="Calibri"/>
               </a:rPr>
-              <a:t>Why this call matches FCHIP</a:t>
-            </a:r>
-          </a:p>
-        </p:txBody>
-      </p:sp>
-      <p:sp>
-        <p:nvSpPr>
-          <p:cNvPr id="6" name="Rectangle 5"/>
-          <p:cNvSpPr/>
-          <p:nvPr/>
-        </p:nvSpPr>
-        <p:spPr>
-          <a:xfrm>
-            <a:off x="411480" y="1188720"/>
-            <a:ext cx="11338560" cy="1223010"/>
-          </a:xfrm>
-          <a:prstGeom prst="rect">
-            <a:avLst/>
-          </a:prstGeom>
-          <a:solidFill>
-            <a:srgbClr val="FFFFFF"/>
-          </a:solidFill>
-          <a:ln w="9525">
-            <a:solidFill>
-              <a:srgbClr val="D0DCDC"/>
-            </a:solidFill>
-          </a:ln>
-          <a:effectLst/>
-        </p:spPr>
-        <p:style>
-          <a:lnRef idx="1">
-            <a:schemeClr val="accent1"/>
-          </a:lnRef>
-          <a:fillRef idx="3">
-            <a:schemeClr val="accent1"/>
-          </a:fillRef>
-          <a:effectRef idx="2">
-            <a:schemeClr val="accent1"/>
-          </a:effectRef>
-          <a:fontRef idx="minor">
-            <a:schemeClr val="lt1"/>
-          </a:fontRef>
-        </p:style>
-        <p:txBody>
-          <a:bodyPr rtlCol="0" anchor="ctr"/>
-          <a:lstStyle/>
-          <a:p>
-            <a:pPr algn="ctr"/>
-          </a:p>
-        </p:txBody>
-      </p:sp>
+              <a:t>Adolescent SRH companion</a:t>
+            </a:r>
+          </a:p>
+        </p:txBody>
+      </p:sp>
+      <p:pic>
+        <p:nvPicPr>
+          <p:cNvPr id="6" name="Picture 5" descr="outreach_mobile_phone_demo_01_opt.jpg"/>
+          <p:cNvPicPr>
+            <a:picLocks noChangeAspect="1"/>
+          </p:cNvPicPr>
+          <p:nvPr/>
+        </p:nvPicPr>
+        <p:blipFill>
+          <a:blip r:embed="rId2"/>
+          <a:stretch>
+            <a:fillRect/>
+          </a:stretch>
+        </p:blipFill>
+        <p:spPr>
+          <a:xfrm>
+            <a:off x="411480" y="1935480"/>
+            <a:ext cx="5029200" cy="3352800"/>
+          </a:xfrm>
+          <a:prstGeom prst="rect">
+            <a:avLst/>
+          </a:prstGeom>
+        </p:spPr>
+      </p:pic>
       <p:sp>
         <p:nvSpPr>
           <p:cNvPr id="7" name="TextBox 6"/>
@@ -5250,8 +4561,8 @@
         </p:nvSpPr>
         <p:spPr>
           <a:xfrm>
-            <a:off x="594360" y="1252728"/>
-            <a:ext cx="2926080" cy="1085850"/>
+            <a:off x="5669280" y="1097280"/>
+            <a:ext cx="5943600" cy="3200400"/>
           </a:xfrm>
           <a:prstGeom prst="rect">
             <a:avLst/>
@@ -5259,24 +4570,20 @@
           <a:noFill/>
         </p:spPr>
         <p:txBody>
-          <a:bodyPr wrap="square" anchor="ctr">
+          <a:bodyPr wrap="square">
             <a:spAutoFit/>
           </a:bodyPr>
           <a:lstStyle/>
           <a:p>
-            <a:pPr algn="l">
-              <a:spcAft>
-                <a:spcPts val="0"/>
-              </a:spcAft>
-            </a:pPr>
-            <a:r>
-              <a:rPr sz="1300" b="1" i="0">
-                <a:solidFill>
-                  <a:srgbClr val="0D6E6E"/>
+            <a:pPr algn="l"/>
+            <a:r>
+              <a:rPr sz="1500" b="0" i="0">
+                <a:solidFill>
+                  <a:srgbClr val="1E2F38"/>
                 </a:solidFill>
                 <a:latin typeface="Calibri"/>
               </a:rPr>
-              <a:t>Women innovators in AI</a:t>
+              <a:t>Adolescents need private, trusted SRH information and referral paths. Build a lightweight companion that works with school and community outreach — not against parents and CHWs.</a:t>
             </a:r>
           </a:p>
         </p:txBody>
@@ -5289,8 +4596,8 @@
         </p:nvSpPr>
         <p:spPr>
           <a:xfrm>
-            <a:off x="3657600" y="1252728"/>
-            <a:ext cx="7772400" cy="1085850"/>
+            <a:off x="5669280" y="4389120"/>
+            <a:ext cx="5943600" cy="1371600"/>
           </a:xfrm>
           <a:prstGeom prst="rect">
             <a:avLst/>
@@ -5298,24 +4605,20 @@
           <a:noFill/>
         </p:spPr>
         <p:txBody>
-          <a:bodyPr wrap="square" anchor="ctr">
+          <a:bodyPr wrap="square">
             <a:spAutoFit/>
           </a:bodyPr>
           <a:lstStyle/>
           <a:p>
-            <a:pPr algn="l">
-              <a:spcAft>
-                <a:spcPts val="0"/>
-              </a:spcAft>
-            </a:pPr>
-            <a:r>
-              <a:rPr sz="1200" b="0" i="0">
-                <a:solidFill>
-                  <a:srgbClr val="3A4A54"/>
+            <a:pPr algn="l"/>
+            <a:r>
+              <a:rPr sz="1300" b="0" i="1">
+                <a:solidFill>
+                  <a:srgbClr val="C45C26"/>
                 </a:solidFill>
                 <a:latin typeface="Calibri"/>
               </a:rPr>
-              <a:t>Team and challenge designed for women builders</a:t>
+              <a:t>Stretch: Local languages · consent · safe escalation to FairBanks outreach</a:t>
             </a:r>
           </a:p>
         </p:txBody>
@@ -5328,380 +4631,8 @@
         </p:nvSpPr>
         <p:spPr>
           <a:xfrm>
-            <a:off x="411480" y="2503170"/>
-            <a:ext cx="11338560" cy="1223010"/>
-          </a:xfrm>
-          <a:prstGeom prst="rect">
-            <a:avLst/>
-          </a:prstGeom>
-          <a:solidFill>
-            <a:srgbClr val="FFFFFF"/>
-          </a:solidFill>
-          <a:ln w="9525">
-            <a:solidFill>
-              <a:srgbClr val="D0DCDC"/>
-            </a:solidFill>
-          </a:ln>
-          <a:effectLst/>
-        </p:spPr>
-        <p:style>
-          <a:lnRef idx="1">
-            <a:schemeClr val="accent1"/>
-          </a:lnRef>
-          <a:fillRef idx="3">
-            <a:schemeClr val="accent1"/>
-          </a:fillRef>
-          <a:effectRef idx="2">
-            <a:schemeClr val="accent1"/>
-          </a:effectRef>
-          <a:fontRef idx="minor">
-            <a:schemeClr val="lt1"/>
-          </a:fontRef>
-        </p:style>
-        <p:txBody>
-          <a:bodyPr rtlCol="0" anchor="ctr"/>
-          <a:lstStyle/>
-          <a:p>
-            <a:pPr algn="ctr"/>
-          </a:p>
-        </p:txBody>
-      </p:sp>
-      <p:sp>
-        <p:nvSpPr>
-          <p:cNvPr id="10" name="TextBox 9"/>
-          <p:cNvSpPr txBox="1"/>
-          <p:nvPr/>
-        </p:nvSpPr>
-        <p:spPr>
-          <a:xfrm>
-            <a:off x="594360" y="2567178"/>
-            <a:ext cx="2926080" cy="1085850"/>
-          </a:xfrm>
-          <a:prstGeom prst="rect">
-            <a:avLst/>
-          </a:prstGeom>
-          <a:noFill/>
-        </p:spPr>
-        <p:txBody>
-          <a:bodyPr wrap="square" anchor="ctr">
-            <a:spAutoFit/>
-          </a:bodyPr>
-          <a:lstStyle/>
-          <a:p>
-            <a:pPr algn="l">
-              <a:spcAft>
-                <a:spcPts val="0"/>
-              </a:spcAft>
-            </a:pPr>
-            <a:r>
-              <a:rPr sz="1300" b="1" i="0">
-                <a:solidFill>
-                  <a:srgbClr val="0D6E6E"/>
-                </a:solidFill>
-                <a:latin typeface="Calibri"/>
-              </a:rPr>
-              <a:t>Kampala event 5–6 Sep 2026</a:t>
-            </a:r>
-          </a:p>
-        </p:txBody>
-      </p:sp>
-      <p:sp>
-        <p:nvSpPr>
-          <p:cNvPr id="11" name="TextBox 10"/>
-          <p:cNvSpPr txBox="1"/>
-          <p:nvPr/>
-        </p:nvSpPr>
-        <p:spPr>
-          <a:xfrm>
-            <a:off x="3657600" y="2567178"/>
-            <a:ext cx="7772400" cy="1085850"/>
-          </a:xfrm>
-          <a:prstGeom prst="rect">
-            <a:avLst/>
-          </a:prstGeom>
-          <a:noFill/>
-        </p:spPr>
-        <p:txBody>
-          <a:bodyPr wrap="square" anchor="ctr">
-            <a:spAutoFit/>
-          </a:bodyPr>
-          <a:lstStyle/>
-          <a:p>
-            <a:pPr algn="l">
-              <a:spcAft>
-                <a:spcPts val="0"/>
-              </a:spcAft>
-            </a:pPr>
-            <a:r>
-              <a:rPr sz="1200" b="0" i="0">
-                <a:solidFill>
-                  <a:srgbClr val="3A4A54"/>
-                </a:solidFill>
-                <a:latin typeface="Calibri"/>
-              </a:rPr>
-              <a:t>Local presence at UICT Nakawa</a:t>
-            </a:r>
-          </a:p>
-        </p:txBody>
-      </p:sp>
-      <p:sp>
-        <p:nvSpPr>
-          <p:cNvPr id="12" name="Rectangle 11"/>
-          <p:cNvSpPr/>
-          <p:nvPr/>
-        </p:nvSpPr>
-        <p:spPr>
-          <a:xfrm>
-            <a:off x="411480" y="3817620"/>
-            <a:ext cx="11338560" cy="1223010"/>
-          </a:xfrm>
-          <a:prstGeom prst="rect">
-            <a:avLst/>
-          </a:prstGeom>
-          <a:solidFill>
-            <a:srgbClr val="FFFFFF"/>
-          </a:solidFill>
-          <a:ln w="9525">
-            <a:solidFill>
-              <a:srgbClr val="D0DCDC"/>
-            </a:solidFill>
-          </a:ln>
-          <a:effectLst/>
-        </p:spPr>
-        <p:style>
-          <a:lnRef idx="1">
-            <a:schemeClr val="accent1"/>
-          </a:lnRef>
-          <a:fillRef idx="3">
-            <a:schemeClr val="accent1"/>
-          </a:fillRef>
-          <a:effectRef idx="2">
-            <a:schemeClr val="accent1"/>
-          </a:effectRef>
-          <a:fontRef idx="minor">
-            <a:schemeClr val="lt1"/>
-          </a:fontRef>
-        </p:style>
-        <p:txBody>
-          <a:bodyPr rtlCol="0" anchor="ctr"/>
-          <a:lstStyle/>
-          <a:p>
-            <a:pPr algn="ctr"/>
-          </a:p>
-        </p:txBody>
-      </p:sp>
-      <p:sp>
-        <p:nvSpPr>
-          <p:cNvPr id="13" name="TextBox 12"/>
-          <p:cNvSpPr txBox="1"/>
-          <p:nvPr/>
-        </p:nvSpPr>
-        <p:spPr>
-          <a:xfrm>
-            <a:off x="594360" y="3881628"/>
-            <a:ext cx="2926080" cy="1085850"/>
-          </a:xfrm>
-          <a:prstGeom prst="rect">
-            <a:avLst/>
-          </a:prstGeom>
-          <a:noFill/>
-        </p:spPr>
-        <p:txBody>
-          <a:bodyPr wrap="square" anchor="ctr">
-            <a:spAutoFit/>
-          </a:bodyPr>
-          <a:lstStyle/>
-          <a:p>
-            <a:pPr algn="l">
-              <a:spcAft>
-                <a:spcPts val="0"/>
-              </a:spcAft>
-            </a:pPr>
-            <a:r>
-              <a:rPr sz="1300" b="1" i="0">
-                <a:solidFill>
-                  <a:srgbClr val="0D6E6E"/>
-                </a:solidFill>
-                <a:latin typeface="Calibri"/>
-              </a:rPr>
-              <a:t>Africa-wide GirlCode mission</a:t>
-            </a:r>
-          </a:p>
-        </p:txBody>
-      </p:sp>
-      <p:sp>
-        <p:nvSpPr>
-          <p:cNvPr id="14" name="TextBox 13"/>
-          <p:cNvSpPr txBox="1"/>
-          <p:nvPr/>
-        </p:nvSpPr>
-        <p:spPr>
-          <a:xfrm>
-            <a:off x="3657600" y="3881628"/>
-            <a:ext cx="7772400" cy="1085850"/>
-          </a:xfrm>
-          <a:prstGeom prst="rect">
-            <a:avLst/>
-          </a:prstGeom>
-          <a:noFill/>
-        </p:spPr>
-        <p:txBody>
-          <a:bodyPr wrap="square" anchor="ctr">
-            <a:spAutoFit/>
-          </a:bodyPr>
-          <a:lstStyle/>
-          <a:p>
-            <a:pPr algn="l">
-              <a:spcAft>
-                <a:spcPts val="0"/>
-              </a:spcAft>
-            </a:pPr>
-            <a:r>
-              <a:rPr sz="1200" b="0" i="0">
-                <a:solidFill>
-                  <a:srgbClr val="3A4A54"/>
-                </a:solidFill>
-                <a:latin typeface="Calibri"/>
-              </a:rPr>
-              <a:t>Uganda chapter contributes a HealthTech flagship challenge</a:t>
-            </a:r>
-          </a:p>
-        </p:txBody>
-      </p:sp>
-      <p:sp>
-        <p:nvSpPr>
-          <p:cNvPr id="15" name="Rectangle 14"/>
-          <p:cNvSpPr/>
-          <p:nvPr/>
-        </p:nvSpPr>
-        <p:spPr>
-          <a:xfrm>
-            <a:off x="411480" y="5132070"/>
-            <a:ext cx="11338560" cy="1223010"/>
-          </a:xfrm>
-          <a:prstGeom prst="rect">
-            <a:avLst/>
-          </a:prstGeom>
-          <a:solidFill>
-            <a:srgbClr val="FFFFFF"/>
-          </a:solidFill>
-          <a:ln w="9525">
-            <a:solidFill>
-              <a:srgbClr val="D0DCDC"/>
-            </a:solidFill>
-          </a:ln>
-          <a:effectLst/>
-        </p:spPr>
-        <p:style>
-          <a:lnRef idx="1">
-            <a:schemeClr val="accent1"/>
-          </a:lnRef>
-          <a:fillRef idx="3">
-            <a:schemeClr val="accent1"/>
-          </a:fillRef>
-          <a:effectRef idx="2">
-            <a:schemeClr val="accent1"/>
-          </a:effectRef>
-          <a:fontRef idx="minor">
-            <a:schemeClr val="lt1"/>
-          </a:fontRef>
-        </p:style>
-        <p:txBody>
-          <a:bodyPr rtlCol="0" anchor="ctr"/>
-          <a:lstStyle/>
-          <a:p>
-            <a:pPr algn="ctr"/>
-          </a:p>
-        </p:txBody>
-      </p:sp>
-      <p:sp>
-        <p:nvSpPr>
-          <p:cNvPr id="16" name="TextBox 15"/>
-          <p:cNvSpPr txBox="1"/>
-          <p:nvPr/>
-        </p:nvSpPr>
-        <p:spPr>
-          <a:xfrm>
-            <a:off x="594360" y="5196078"/>
-            <a:ext cx="2926080" cy="1085850"/>
-          </a:xfrm>
-          <a:prstGeom prst="rect">
-            <a:avLst/>
-          </a:prstGeom>
-          <a:noFill/>
-        </p:spPr>
-        <p:txBody>
-          <a:bodyPr wrap="square" anchor="ctr">
-            <a:spAutoFit/>
-          </a:bodyPr>
-          <a:lstStyle/>
-          <a:p>
-            <a:pPr algn="l">
-              <a:spcAft>
-                <a:spcPts val="0"/>
-              </a:spcAft>
-            </a:pPr>
-            <a:r>
-              <a:rPr sz="1300" b="1" i="0">
-                <a:solidFill>
-                  <a:srgbClr val="0D6E6E"/>
-                </a:solidFill>
-                <a:latin typeface="Calibri"/>
-              </a:rPr>
-              <a:t>Talent &amp; visibility</a:t>
-            </a:r>
-          </a:p>
-        </p:txBody>
-      </p:sp>
-      <p:sp>
-        <p:nvSpPr>
-          <p:cNvPr id="17" name="TextBox 16"/>
-          <p:cNvSpPr txBox="1"/>
-          <p:nvPr/>
-        </p:nvSpPr>
-        <p:spPr>
-          <a:xfrm>
-            <a:off x="3657600" y="5196078"/>
-            <a:ext cx="7772400" cy="1085850"/>
-          </a:xfrm>
-          <a:prstGeom prst="rect">
-            <a:avLst/>
-          </a:prstGeom>
-          <a:noFill/>
-        </p:spPr>
-        <p:txBody>
-          <a:bodyPr wrap="square" anchor="ctr">
-            <a:spAutoFit/>
-          </a:bodyPr>
-          <a:lstStyle/>
-          <a:p>
-            <a:pPr algn="l">
-              <a:spcAft>
-                <a:spcPts val="0"/>
-              </a:spcAft>
-            </a:pPr>
-            <a:r>
-              <a:rPr sz="1200" b="0" i="0">
-                <a:solidFill>
-                  <a:srgbClr val="3A4A54"/>
-                </a:solidFill>
-                <a:latin typeface="Calibri"/>
-              </a:rPr>
-              <a:t>FairBanks offers mentorship and follow-up pathways</a:t>
-            </a:r>
-          </a:p>
-        </p:txBody>
-      </p:sp>
-      <p:sp>
-        <p:nvSpPr>
-          <p:cNvPr id="18" name="Rectangle 17"/>
-          <p:cNvSpPr/>
-          <p:nvPr/>
-        </p:nvSpPr>
-        <p:spPr>
-          <a:xfrm>
-            <a:off x="0" y="6565392"/>
-            <a:ext cx="12191695" cy="292608"/>
+            <a:off x="0" y="6583680"/>
+            <a:ext cx="12191695" cy="274320"/>
           </a:xfrm>
           <a:prstGeom prst="rect">
             <a:avLst/>
@@ -5712,7 +4643,6 @@
           <a:ln>
             <a:noFill/>
           </a:ln>
-          <a:effectLst/>
         </p:spPr>
         <p:style>
           <a:lnRef idx="1">
@@ -5738,14 +4668,14 @@
       </p:sp>
       <p:sp>
         <p:nvSpPr>
-          <p:cNvPr id="19" name="TextBox 18"/>
+          <p:cNvPr id="10" name="TextBox 9"/>
           <p:cNvSpPr txBox="1"/>
           <p:nvPr/>
         </p:nvSpPr>
         <p:spPr>
           <a:xfrm>
-            <a:off x="365760" y="6574536"/>
-            <a:ext cx="9144000" cy="274320"/>
+            <a:off x="365760" y="6592824"/>
+            <a:ext cx="9144000" cy="256032"/>
           </a:xfrm>
           <a:prstGeom prst="rect">
             <a:avLst/>
@@ -5753,16 +4683,12 @@
           <a:noFill/>
         </p:spPr>
         <p:txBody>
-          <a:bodyPr wrap="square" anchor="ctr">
+          <a:bodyPr wrap="square">
             <a:spAutoFit/>
           </a:bodyPr>
           <a:lstStyle/>
           <a:p>
-            <a:pPr algn="l">
-              <a:spcAft>
-                <a:spcPts val="0"/>
-              </a:spcAft>
-            </a:pPr>
+            <a:pPr algn="l"/>
             <a:r>
               <a:rPr sz="900" b="0" i="0">
                 <a:solidFill>
@@ -5770,21 +4696,21 @@
                 </a:solidFill>
                 <a:latin typeface="Calibri"/>
               </a:rPr>
-              <a:t>FairBanks FCHIP  |  GirlCode Hackathon 2026 — Kampala  |  Your health, our mission.</a:t>
-            </a:r>
-          </a:p>
-        </p:txBody>
-      </p:sp>
-      <p:sp>
-        <p:nvSpPr>
-          <p:cNvPr id="20" name="TextBox 19"/>
+              <a:t>FairBanks FCHIP | GirlCode Kampala 2026 | Your health, our mission.</a:t>
+            </a:r>
+          </a:p>
+        </p:txBody>
+      </p:sp>
+      <p:sp>
+        <p:nvSpPr>
+          <p:cNvPr id="11" name="TextBox 10"/>
           <p:cNvSpPr txBox="1"/>
           <p:nvPr/>
         </p:nvSpPr>
         <p:spPr>
           <a:xfrm>
-            <a:off x="11094415" y="6574536"/>
-            <a:ext cx="731520" cy="274320"/>
+            <a:off x="11460175" y="6592824"/>
+            <a:ext cx="457200" cy="256032"/>
           </a:xfrm>
           <a:prstGeom prst="rect">
             <a:avLst/>
@@ -5792,16 +4718,12 @@
           <a:noFill/>
         </p:spPr>
         <p:txBody>
-          <a:bodyPr wrap="square" anchor="ctr">
+          <a:bodyPr wrap="square">
             <a:spAutoFit/>
           </a:bodyPr>
           <a:lstStyle/>
           <a:p>
-            <a:pPr algn="r">
-              <a:spcAft>
-                <a:spcPts val="0"/>
-              </a:spcAft>
-            </a:pPr>
+            <a:pPr algn="r"/>
             <a:r>
               <a:rPr sz="900" b="0" i="0">
                 <a:solidFill>
@@ -5841,7 +4763,7 @@
         <p:spPr>
           <a:xfrm>
             <a:off x="0" y="0"/>
-            <a:ext cx="12191695" cy="960120"/>
+            <a:ext cx="12191695" cy="914400"/>
           </a:xfrm>
           <a:prstGeom prst="rect">
             <a:avLst/>
@@ -5852,7 +4774,6 @@
           <a:ln>
             <a:noFill/>
           </a:ln>
-          <a:effectLst/>
         </p:spPr>
         <p:style>
           <a:lnRef idx="1">
@@ -5885,7 +4806,7 @@
         <p:spPr>
           <a:xfrm>
             <a:off x="0" y="0"/>
-            <a:ext cx="164592" cy="960120"/>
+            <a:ext cx="137160" cy="914400"/>
           </a:xfrm>
           <a:prstGeom prst="rect">
             <a:avLst/>
@@ -5896,7 +4817,6 @@
           <a:ln>
             <a:noFill/>
           </a:ln>
-          <a:effectLst/>
         </p:spPr>
         <p:style>
           <a:lnRef idx="1">
@@ -5928,8 +4848,8 @@
         </p:nvSpPr>
         <p:spPr>
           <a:xfrm>
-            <a:off x="457200" y="109728"/>
-            <a:ext cx="10972800" cy="256032"/>
+            <a:off x="411480" y="91440"/>
+            <a:ext cx="10972800" cy="274320"/>
           </a:xfrm>
           <a:prstGeom prst="rect">
             <a:avLst/>
@@ -5937,16 +4857,12 @@
           <a:noFill/>
         </p:spPr>
         <p:txBody>
-          <a:bodyPr wrap="square" anchor="t">
+          <a:bodyPr wrap="square">
             <a:spAutoFit/>
           </a:bodyPr>
           <a:lstStyle/>
           <a:p>
-            <a:pPr algn="l">
-              <a:spcAft>
-                <a:spcPts val="0"/>
-              </a:spcAft>
-            </a:pPr>
+            <a:pPr algn="l"/>
             <a:r>
               <a:rPr sz="1100" b="1" i="0">
                 <a:solidFill>
@@ -5954,7 +4870,7 @@
                 </a:solidFill>
                 <a:latin typeface="Calibri"/>
               </a:rPr>
-              <a:t>WHY FAIRBANKS</a:t>
+              <a:t>TRACK C</a:t>
             </a:r>
           </a:p>
         </p:txBody>
@@ -5967,8 +4883,8 @@
         </p:nvSpPr>
         <p:spPr>
           <a:xfrm>
-            <a:off x="457200" y="384048"/>
-            <a:ext cx="11247120" cy="475488"/>
+            <a:off x="411480" y="384048"/>
+            <a:ext cx="10972800" cy="457200"/>
           </a:xfrm>
           <a:prstGeom prst="rect">
             <a:avLst/>
@@ -5976,31 +4892,27 @@
           <a:noFill/>
         </p:spPr>
         <p:txBody>
-          <a:bodyPr wrap="square" anchor="t">
+          <a:bodyPr wrap="square">
             <a:spAutoFit/>
           </a:bodyPr>
           <a:lstStyle/>
           <a:p>
-            <a:pPr algn="l">
-              <a:spcAft>
-                <a:spcPts val="0"/>
-              </a:spcAft>
-            </a:pPr>
-            <a:r>
-              <a:rPr sz="2200" b="1" i="0">
+            <a:pPr algn="l"/>
+            <a:r>
+              <a:rPr sz="2400" b="1" i="0">
                 <a:solidFill>
                   <a:srgbClr val="0A1F2E"/>
                 </a:solidFill>
                 <a:latin typeface="Calibri"/>
               </a:rPr>
-              <a:t>A live community health ecosystem</a:t>
+              <a:t>Outbreak early signal</a:t>
             </a:r>
           </a:p>
         </p:txBody>
       </p:sp>
       <p:pic>
         <p:nvPicPr>
-          <p:cNvPr id="6" name="Picture 5" descr="outreach_facilitator_canopy_01_opt.jpg"/>
+          <p:cNvPr id="6" name="Picture 5" descr="gis_hotspots_opt.jpg"/>
           <p:cNvPicPr>
             <a:picLocks noChangeAspect="1"/>
           </p:cNvPicPr>
@@ -6014,8 +4926,8 @@
         </p:blipFill>
         <p:spPr>
           <a:xfrm>
-            <a:off x="411480" y="1943753"/>
-            <a:ext cx="5486400" cy="3656293"/>
+            <a:off x="411480" y="1936079"/>
+            <a:ext cx="5029200" cy="3351602"/>
           </a:xfrm>
           <a:prstGeom prst="rect">
             <a:avLst/>
@@ -6030,8 +4942,8 @@
         </p:nvSpPr>
         <p:spPr>
           <a:xfrm>
-            <a:off x="6217920" y="1234440"/>
-            <a:ext cx="5486400" cy="5074920"/>
+            <a:off x="5669280" y="1097280"/>
+            <a:ext cx="5943600" cy="3200400"/>
           </a:xfrm>
           <a:prstGeom prst="rect">
             <a:avLst/>
@@ -6044,113 +4956,64 @@
           </a:bodyPr>
           <a:lstStyle/>
           <a:p>
-            <a:pPr>
-              <a:spcAft>
-                <a:spcPts val="800"/>
-              </a:spcAft>
-            </a:pPr>
-            <a:r>
-              <a:rPr sz="1400">
+            <a:pPr algn="l"/>
+            <a:r>
+              <a:rPr sz="1500" b="0" i="0">
                 <a:solidFill>
                   <a:srgbClr val="1E2F38"/>
                 </a:solidFill>
                 <a:latin typeface="Calibri"/>
               </a:rPr>
-              <a:t>•  Functioning FairBanks Medical Centre with clinic, pharmacy, and diagnostics</a:t>
-            </a:r>
-          </a:p>
-          <a:p>
-            <a:pPr>
-              <a:spcAft>
-                <a:spcPts val="800"/>
-              </a:spcAft>
-            </a:pPr>
-            <a:r>
-              <a:rPr sz="1400">
-                <a:solidFill>
-                  <a:srgbClr val="1E2F38"/>
+              <a:t>When fever reports rise across neighbouring villages, clinics react too late. Can you cluster community reports and flag a possible surge before the pharmacy runs dry?</a:t>
+            </a:r>
+          </a:p>
+        </p:txBody>
+      </p:sp>
+      <p:sp>
+        <p:nvSpPr>
+          <p:cNvPr id="8" name="TextBox 7"/>
+          <p:cNvSpPr txBox="1"/>
+          <p:nvPr/>
+        </p:nvSpPr>
+        <p:spPr>
+          <a:xfrm>
+            <a:off x="5669280" y="4389120"/>
+            <a:ext cx="5943600" cy="1371600"/>
+          </a:xfrm>
+          <a:prstGeom prst="rect">
+            <a:avLst/>
+          </a:prstGeom>
+          <a:noFill/>
+        </p:spPr>
+        <p:txBody>
+          <a:bodyPr wrap="square">
+            <a:spAutoFit/>
+          </a:bodyPr>
+          <a:lstStyle/>
+          <a:p>
+            <a:pPr algn="l"/>
+            <a:r>
+              <a:rPr sz="1300" b="0" i="1">
+                <a:solidFill>
+                  <a:srgbClr val="C45C26"/>
                 </a:solidFill>
                 <a:latin typeface="Calibri"/>
               </a:rPr>
-              <a:t>•  Active Community Reach outreach in Bukoto, Kyebando, Kisaasi, Kamwokya, Kikaaya</a:t>
-            </a:r>
-          </a:p>
-          <a:p>
-            <a:pPr>
-              <a:spcAft>
-                <a:spcPts val="800"/>
-              </a:spcAft>
-            </a:pPr>
-            <a:r>
-              <a:rPr sz="1400">
-                <a:solidFill>
-                  <a:srgbClr val="1E2F38"/>
-                </a:solidFill>
-                <a:latin typeface="Calibri"/>
-              </a:rPr>
-              <a:t>•  Trusted CHW and VHT relationships for household visits and referrals</a:t>
-            </a:r>
-          </a:p>
-          <a:p>
-            <a:pPr>
-              <a:spcAft>
-                <a:spcPts val="800"/>
-              </a:spcAft>
-            </a:pPr>
-            <a:r>
-              <a:rPr sz="1400">
-                <a:solidFill>
-                  <a:srgbClr val="1E2F38"/>
-                </a:solidFill>
-                <a:latin typeface="Calibri"/>
-              </a:rPr>
-              <a:t>•  Live programmes: maternal &amp; child health, Gericare, chronic-disease screening</a:t>
-            </a:r>
-          </a:p>
-          <a:p>
-            <a:pPr>
-              <a:spcAft>
-                <a:spcPts val="800"/>
-              </a:spcAft>
-            </a:pPr>
-            <a:r>
-              <a:rPr sz="1400">
-                <a:solidFill>
-                  <a:srgbClr val="1E2F38"/>
-                </a:solidFill>
-                <a:latin typeface="Calibri"/>
-              </a:rPr>
-              <a:t>•  Digital health records and outreach data ready to feed FCHIP</a:t>
-            </a:r>
-          </a:p>
-          <a:p>
-            <a:pPr>
-              <a:spcAft>
-                <a:spcPts val="800"/>
-              </a:spcAft>
-            </a:pPr>
-            <a:r>
-              <a:rPr sz="1400">
-                <a:solidFill>
-                  <a:srgbClr val="1E2F38"/>
-                </a:solidFill>
-                <a:latin typeface="Calibri"/>
-              </a:rPr>
-              <a:t>•  Research and partnership mindset for ethical, evidence-based scale</a:t>
-            </a:r>
-          </a:p>
-        </p:txBody>
-      </p:sp>
-      <p:sp>
-        <p:nvSpPr>
-          <p:cNvPr id="8" name="Rectangle 7"/>
+              <a:t>Stretch: GIS view · simple rules + optional ML · stock-out prevention</a:t>
+            </a:r>
+          </a:p>
+        </p:txBody>
+      </p:sp>
+      <p:sp>
+        <p:nvSpPr>
+          <p:cNvPr id="9" name="Rectangle 8"/>
           <p:cNvSpPr/>
           <p:nvPr/>
         </p:nvSpPr>
         <p:spPr>
           <a:xfrm>
-            <a:off x="0" y="6565392"/>
-            <a:ext cx="12191695" cy="292608"/>
+            <a:off x="0" y="6583680"/>
+            <a:ext cx="12191695" cy="274320"/>
           </a:xfrm>
           <a:prstGeom prst="rect">
             <a:avLst/>
@@ -6161,7 +5024,6 @@
           <a:ln>
             <a:noFill/>
           </a:ln>
-          <a:effectLst/>
         </p:spPr>
         <p:style>
           <a:lnRef idx="1">
@@ -6187,14 +5049,14 @@
       </p:sp>
       <p:sp>
         <p:nvSpPr>
-          <p:cNvPr id="9" name="TextBox 8"/>
+          <p:cNvPr id="10" name="TextBox 9"/>
           <p:cNvSpPr txBox="1"/>
           <p:nvPr/>
         </p:nvSpPr>
         <p:spPr>
           <a:xfrm>
-            <a:off x="365760" y="6574536"/>
-            <a:ext cx="9144000" cy="274320"/>
+            <a:off x="365760" y="6592824"/>
+            <a:ext cx="9144000" cy="256032"/>
           </a:xfrm>
           <a:prstGeom prst="rect">
             <a:avLst/>
@@ -6202,16 +5064,12 @@
           <a:noFill/>
         </p:spPr>
         <p:txBody>
-          <a:bodyPr wrap="square" anchor="ctr">
+          <a:bodyPr wrap="square">
             <a:spAutoFit/>
           </a:bodyPr>
           <a:lstStyle/>
           <a:p>
-            <a:pPr algn="l">
-              <a:spcAft>
-                <a:spcPts val="0"/>
-              </a:spcAft>
-            </a:pPr>
+            <a:pPr algn="l"/>
             <a:r>
               <a:rPr sz="900" b="0" i="0">
                 <a:solidFill>
@@ -6219,21 +5077,21 @@
                 </a:solidFill>
                 <a:latin typeface="Calibri"/>
               </a:rPr>
-              <a:t>FairBanks FCHIP  |  GirlCode Hackathon 2026 — Kampala  |  Your health, our mission.</a:t>
-            </a:r>
-          </a:p>
-        </p:txBody>
-      </p:sp>
-      <p:sp>
-        <p:nvSpPr>
-          <p:cNvPr id="10" name="TextBox 9"/>
+              <a:t>FairBanks FCHIP | GirlCode Kampala 2026 | Your health, our mission.</a:t>
+            </a:r>
+          </a:p>
+        </p:txBody>
+      </p:sp>
+      <p:sp>
+        <p:nvSpPr>
+          <p:cNvPr id="11" name="TextBox 10"/>
           <p:cNvSpPr txBox="1"/>
           <p:nvPr/>
         </p:nvSpPr>
         <p:spPr>
           <a:xfrm>
-            <a:off x="11094415" y="6574536"/>
-            <a:ext cx="731520" cy="274320"/>
+            <a:off x="11460175" y="6592824"/>
+            <a:ext cx="457200" cy="256032"/>
           </a:xfrm>
           <a:prstGeom prst="rect">
             <a:avLst/>
@@ -6241,16 +5099,12 @@
           <a:noFill/>
         </p:spPr>
         <p:txBody>
-          <a:bodyPr wrap="square" anchor="ctr">
+          <a:bodyPr wrap="square">
             <a:spAutoFit/>
           </a:bodyPr>
           <a:lstStyle/>
           <a:p>
-            <a:pPr algn="r">
-              <a:spcAft>
-                <a:spcPts val="0"/>
-              </a:spcAft>
-            </a:pPr>
+            <a:pPr algn="r"/>
             <a:r>
               <a:rPr sz="900" b="0" i="0">
                 <a:solidFill>
@@ -6290,7 +5144,7 @@
         <p:spPr>
           <a:xfrm>
             <a:off x="0" y="0"/>
-            <a:ext cx="12191695" cy="960120"/>
+            <a:ext cx="12191695" cy="914400"/>
           </a:xfrm>
           <a:prstGeom prst="rect">
             <a:avLst/>
@@ -6301,7 +5155,6 @@
           <a:ln>
             <a:noFill/>
           </a:ln>
-          <a:effectLst/>
         </p:spPr>
         <p:style>
           <a:lnRef idx="1">
@@ -6334,7 +5187,7 @@
         <p:spPr>
           <a:xfrm>
             <a:off x="0" y="0"/>
-            <a:ext cx="164592" cy="960120"/>
+            <a:ext cx="137160" cy="914400"/>
           </a:xfrm>
           <a:prstGeom prst="rect">
             <a:avLst/>
@@ -6345,7 +5198,6 @@
           <a:ln>
             <a:noFill/>
           </a:ln>
-          <a:effectLst/>
         </p:spPr>
         <p:style>
           <a:lnRef idx="1">
@@ -6377,86 +5229,8 @@
         </p:nvSpPr>
         <p:spPr>
           <a:xfrm>
-            <a:off x="457200" y="109728"/>
-            <a:ext cx="10972800" cy="256032"/>
-          </a:xfrm>
-          <a:prstGeom prst="rect">
-            <a:avLst/>
-          </a:prstGeom>
-          <a:noFill/>
-        </p:spPr>
-        <p:txBody>
-          <a:bodyPr wrap="square" anchor="t">
-            <a:spAutoFit/>
-          </a:bodyPr>
-          <a:lstStyle/>
-          <a:p>
-            <a:pPr algn="l">
-              <a:spcAft>
-                <a:spcPts val="0"/>
-              </a:spcAft>
-            </a:pPr>
-            <a:r>
-              <a:rPr sz="1100" b="1" i="0">
-                <a:solidFill>
-                  <a:srgbClr val="C45C26"/>
-                </a:solidFill>
-                <a:latin typeface="Calibri"/>
-              </a:rPr>
-              <a:t>THE PLAN</a:t>
-            </a:r>
-          </a:p>
-        </p:txBody>
-      </p:sp>
-      <p:sp>
-        <p:nvSpPr>
-          <p:cNvPr id="5" name="TextBox 4"/>
-          <p:cNvSpPr txBox="1"/>
-          <p:nvPr/>
-        </p:nvSpPr>
-        <p:spPr>
-          <a:xfrm>
-            <a:off x="457200" y="384048"/>
-            <a:ext cx="11247120" cy="475488"/>
-          </a:xfrm>
-          <a:prstGeom prst="rect">
-            <a:avLst/>
-          </a:prstGeom>
-          <a:noFill/>
-        </p:spPr>
-        <p:txBody>
-          <a:bodyPr wrap="square" anchor="t">
-            <a:spAutoFit/>
-          </a:bodyPr>
-          <a:lstStyle/>
-          <a:p>
-            <a:pPr algn="l">
-              <a:spcAft>
-                <a:spcPts val="0"/>
-              </a:spcAft>
-            </a:pPr>
-            <a:r>
-              <a:rPr sz="2200" b="1" i="0">
-                <a:solidFill>
-                  <a:srgbClr val="0A1F2E"/>
-                </a:solidFill>
-                <a:latin typeface="Calibri"/>
-              </a:rPr>
-              <a:t>Kampala hackathon plan</a:t>
-            </a:r>
-          </a:p>
-        </p:txBody>
-      </p:sp>
-      <p:sp>
-        <p:nvSpPr>
-          <p:cNvPr id="6" name="TextBox 5"/>
-          <p:cNvSpPr txBox="1"/>
-          <p:nvPr/>
-        </p:nvSpPr>
-        <p:spPr>
-          <a:xfrm>
-            <a:off x="502920" y="1234440"/>
-            <a:ext cx="5760720" cy="5074920"/>
+            <a:off x="411480" y="91440"/>
+            <a:ext cx="10972800" cy="274320"/>
           </a:xfrm>
           <a:prstGeom prst="rect">
             <a:avLst/>
@@ -6469,105 +5243,384 @@
           </a:bodyPr>
           <a:lstStyle/>
           <a:p>
-            <a:pPr>
-              <a:spcAft>
-                <a:spcPts val="800"/>
-              </a:spcAft>
-            </a:pPr>
-            <a:r>
-              <a:rPr sz="1500">
-                <a:solidFill>
-                  <a:srgbClr val="1E2F38"/>
+            <a:pPr algn="l"/>
+            <a:r>
+              <a:rPr sz="1100" b="1" i="0">
+                <a:solidFill>
+                  <a:srgbClr val="C45C26"/>
                 </a:solidFill>
                 <a:latin typeface="Calibri"/>
               </a:rPr>
-              <a:t>•  Register Kampala team before the event weekend</a:t>
-            </a:r>
-          </a:p>
-          <a:p>
-            <a:pPr>
-              <a:spcAft>
-                <a:spcPts val="800"/>
-              </a:spcAft>
-            </a:pPr>
-            <a:r>
-              <a:rPr sz="1500">
-                <a:solidFill>
-                  <a:srgbClr val="1E2F38"/>
+              <a:t>MENTORSHIP</a:t>
+            </a:r>
+          </a:p>
+        </p:txBody>
+      </p:sp>
+      <p:sp>
+        <p:nvSpPr>
+          <p:cNvPr id="5" name="TextBox 4"/>
+          <p:cNvSpPr txBox="1"/>
+          <p:nvPr/>
+        </p:nvSpPr>
+        <p:spPr>
+          <a:xfrm>
+            <a:off x="411480" y="384048"/>
+            <a:ext cx="10972800" cy="457200"/>
+          </a:xfrm>
+          <a:prstGeom prst="rect">
+            <a:avLst/>
+          </a:prstGeom>
+          <a:noFill/>
+        </p:spPr>
+        <p:txBody>
+          <a:bodyPr wrap="square">
+            <a:spAutoFit/>
+          </a:bodyPr>
+          <a:lstStyle/>
+          <a:p>
+            <a:pPr algn="l"/>
+            <a:r>
+              <a:rPr sz="2400" b="1" i="0">
+                <a:solidFill>
+                  <a:srgbClr val="0A1F2E"/>
                 </a:solidFill>
                 <a:latin typeface="Calibri"/>
               </a:rPr>
-              <a:t>•  Publish a one-page FCHIP challenge brief for participants</a:t>
-            </a:r>
-          </a:p>
-          <a:p>
-            <a:pPr>
-              <a:spcAft>
-                <a:spcPts val="800"/>
-              </a:spcAft>
-            </a:pPr>
-            <a:r>
-              <a:rPr sz="1500">
+              <a:t>FairBanks office hours during the sprint</a:t>
+            </a:r>
+          </a:p>
+        </p:txBody>
+      </p:sp>
+      <p:sp>
+        <p:nvSpPr>
+          <p:cNvPr id="6" name="Rectangle 5"/>
+          <p:cNvSpPr/>
+          <p:nvPr/>
+        </p:nvSpPr>
+        <p:spPr>
+          <a:xfrm>
+            <a:off x="457200" y="1143000"/>
+            <a:ext cx="11155680" cy="914400"/>
+          </a:xfrm>
+          <a:prstGeom prst="rect">
+            <a:avLst/>
+          </a:prstGeom>
+          <a:solidFill>
+            <a:srgbClr val="FFFFFF"/>
+          </a:solidFill>
+          <a:ln>
+            <a:solidFill>
+              <a:srgbClr val="D0DCDC"/>
+            </a:solidFill>
+          </a:ln>
+        </p:spPr>
+        <p:style>
+          <a:lnRef idx="1">
+            <a:schemeClr val="accent1"/>
+          </a:lnRef>
+          <a:fillRef idx="3">
+            <a:schemeClr val="accent1"/>
+          </a:fillRef>
+          <a:effectRef idx="2">
+            <a:schemeClr val="accent1"/>
+          </a:effectRef>
+          <a:fontRef idx="minor">
+            <a:schemeClr val="lt1"/>
+          </a:fontRef>
+        </p:style>
+        <p:txBody>
+          <a:bodyPr rtlCol="0" anchor="ctr"/>
+          <a:lstStyle/>
+          <a:p>
+            <a:pPr algn="ctr"/>
+          </a:p>
+        </p:txBody>
+      </p:sp>
+      <p:sp>
+        <p:nvSpPr>
+          <p:cNvPr id="7" name="TextBox 6"/>
+          <p:cNvSpPr txBox="1"/>
+          <p:nvPr/>
+        </p:nvSpPr>
+        <p:spPr>
+          <a:xfrm>
+            <a:off x="685800" y="1325880"/>
+            <a:ext cx="10515600" cy="548640"/>
+          </a:xfrm>
+          <a:prstGeom prst="rect">
+            <a:avLst/>
+          </a:prstGeom>
+          <a:noFill/>
+        </p:spPr>
+        <p:txBody>
+          <a:bodyPr wrap="square">
+            <a:spAutoFit/>
+          </a:bodyPr>
+          <a:lstStyle/>
+          <a:p>
+            <a:pPr algn="l"/>
+            <a:r>
+              <a:rPr sz="1500" b="0" i="0">
                 <a:solidFill>
                   <a:srgbClr val="1E2F38"/>
                 </a:solidFill>
                 <a:latin typeface="Calibri"/>
               </a:rPr>
-              <a:t>•  Provide on-site / virtual mentorship from FairBanks clinical and product leads</a:t>
-            </a:r>
-          </a:p>
-          <a:p>
-            <a:pPr>
-              <a:spcAft>
-                <a:spcPts val="800"/>
-              </a:spcAft>
-            </a:pPr>
-            <a:r>
-              <a:rPr sz="1500">
+              <a:t>FairBanks clinicians and outreach leads on realistic workflows</a:t>
+            </a:r>
+          </a:p>
+        </p:txBody>
+      </p:sp>
+      <p:sp>
+        <p:nvSpPr>
+          <p:cNvPr id="8" name="Rectangle 7"/>
+          <p:cNvSpPr/>
+          <p:nvPr/>
+        </p:nvSpPr>
+        <p:spPr>
+          <a:xfrm>
+            <a:off x="457200" y="2194560"/>
+            <a:ext cx="11155680" cy="914400"/>
+          </a:xfrm>
+          <a:prstGeom prst="rect">
+            <a:avLst/>
+          </a:prstGeom>
+          <a:solidFill>
+            <a:srgbClr val="FFFFFF"/>
+          </a:solidFill>
+          <a:ln>
+            <a:solidFill>
+              <a:srgbClr val="D0DCDC"/>
+            </a:solidFill>
+          </a:ln>
+        </p:spPr>
+        <p:style>
+          <a:lnRef idx="1">
+            <a:schemeClr val="accent1"/>
+          </a:lnRef>
+          <a:fillRef idx="3">
+            <a:schemeClr val="accent1"/>
+          </a:fillRef>
+          <a:effectRef idx="2">
+            <a:schemeClr val="accent1"/>
+          </a:effectRef>
+          <a:fontRef idx="minor">
+            <a:schemeClr val="lt1"/>
+          </a:fontRef>
+        </p:style>
+        <p:txBody>
+          <a:bodyPr rtlCol="0" anchor="ctr"/>
+          <a:lstStyle/>
+          <a:p>
+            <a:pPr algn="ctr"/>
+          </a:p>
+        </p:txBody>
+      </p:sp>
+      <p:sp>
+        <p:nvSpPr>
+          <p:cNvPr id="9" name="TextBox 8"/>
+          <p:cNvSpPr txBox="1"/>
+          <p:nvPr/>
+        </p:nvSpPr>
+        <p:spPr>
+          <a:xfrm>
+            <a:off x="685800" y="2377440"/>
+            <a:ext cx="10515600" cy="548640"/>
+          </a:xfrm>
+          <a:prstGeom prst="rect">
+            <a:avLst/>
+          </a:prstGeom>
+          <a:noFill/>
+        </p:spPr>
+        <p:txBody>
+          <a:bodyPr wrap="square">
+            <a:spAutoFit/>
+          </a:bodyPr>
+          <a:lstStyle/>
+          <a:p>
+            <a:pPr algn="l"/>
+            <a:r>
+              <a:rPr sz="1500" b="0" i="0">
                 <a:solidFill>
                   <a:srgbClr val="1E2F38"/>
                 </a:solidFill>
                 <a:latin typeface="Calibri"/>
               </a:rPr>
-              <a:t>•  Shortlist prototypes for post-hack follow-up and possible internship</a:t>
-            </a:r>
-          </a:p>
-        </p:txBody>
-      </p:sp>
-      <p:pic>
-        <p:nvPicPr>
-          <p:cNvPr id="7" name="Picture 6" descr="indoor_training_staff_presenting_01_opt.jpg"/>
-          <p:cNvPicPr>
-            <a:picLocks noChangeAspect="1"/>
-          </p:cNvPicPr>
-          <p:nvPr/>
-        </p:nvPicPr>
-        <p:blipFill>
-          <a:blip r:embed="rId2"/>
-          <a:stretch>
-            <a:fillRect/>
-          </a:stretch>
-        </p:blipFill>
-        <p:spPr>
-          <a:xfrm>
-            <a:off x="6492240" y="2035160"/>
-            <a:ext cx="5212080" cy="3473479"/>
-          </a:xfrm>
-          <a:prstGeom prst="rect">
-            <a:avLst/>
-          </a:prstGeom>
-        </p:spPr>
-      </p:pic>
-      <p:sp>
-        <p:nvSpPr>
-          <p:cNvPr id="8" name="Rectangle 7"/>
+              <a:t>Sample (anonymised) data schemas from CHW capture — not raw patient records</a:t>
+            </a:r>
+          </a:p>
+        </p:txBody>
+      </p:sp>
+      <p:sp>
+        <p:nvSpPr>
+          <p:cNvPr id="10" name="Rectangle 9"/>
           <p:cNvSpPr/>
           <p:nvPr/>
         </p:nvSpPr>
         <p:spPr>
           <a:xfrm>
-            <a:off x="0" y="6565392"/>
-            <a:ext cx="12191695" cy="292608"/>
+            <a:off x="457200" y="3246120"/>
+            <a:ext cx="11155680" cy="914400"/>
+          </a:xfrm>
+          <a:prstGeom prst="rect">
+            <a:avLst/>
+          </a:prstGeom>
+          <a:solidFill>
+            <a:srgbClr val="FFFFFF"/>
+          </a:solidFill>
+          <a:ln>
+            <a:solidFill>
+              <a:srgbClr val="D0DCDC"/>
+            </a:solidFill>
+          </a:ln>
+        </p:spPr>
+        <p:style>
+          <a:lnRef idx="1">
+            <a:schemeClr val="accent1"/>
+          </a:lnRef>
+          <a:fillRef idx="3">
+            <a:schemeClr val="accent1"/>
+          </a:fillRef>
+          <a:effectRef idx="2">
+            <a:schemeClr val="accent1"/>
+          </a:effectRef>
+          <a:fontRef idx="minor">
+            <a:schemeClr val="lt1"/>
+          </a:fontRef>
+        </p:style>
+        <p:txBody>
+          <a:bodyPr rtlCol="0" anchor="ctr"/>
+          <a:lstStyle/>
+          <a:p>
+            <a:pPr algn="ctr"/>
+          </a:p>
+        </p:txBody>
+      </p:sp>
+      <p:sp>
+        <p:nvSpPr>
+          <p:cNvPr id="11" name="TextBox 10"/>
+          <p:cNvSpPr txBox="1"/>
+          <p:nvPr/>
+        </p:nvSpPr>
+        <p:spPr>
+          <a:xfrm>
+            <a:off x="685800" y="3429000"/>
+            <a:ext cx="10515600" cy="548640"/>
+          </a:xfrm>
+          <a:prstGeom prst="rect">
+            <a:avLst/>
+          </a:prstGeom>
+          <a:noFill/>
+        </p:spPr>
+        <p:txBody>
+          <a:bodyPr wrap="square">
+            <a:spAutoFit/>
+          </a:bodyPr>
+          <a:lstStyle/>
+          <a:p>
+            <a:pPr algn="l"/>
+            <a:r>
+              <a:rPr sz="1500" b="0" i="0">
+                <a:solidFill>
+                  <a:srgbClr val="1E2F38"/>
+                </a:solidFill>
+                <a:latin typeface="Calibri"/>
+              </a:rPr>
+              <a:t>Office hours during the hackathon on UX for low-literacy and offline settings</a:t>
+            </a:r>
+          </a:p>
+        </p:txBody>
+      </p:sp>
+      <p:sp>
+        <p:nvSpPr>
+          <p:cNvPr id="12" name="Rectangle 11"/>
+          <p:cNvSpPr/>
+          <p:nvPr/>
+        </p:nvSpPr>
+        <p:spPr>
+          <a:xfrm>
+            <a:off x="457200" y="4297680"/>
+            <a:ext cx="11155680" cy="914400"/>
+          </a:xfrm>
+          <a:prstGeom prst="rect">
+            <a:avLst/>
+          </a:prstGeom>
+          <a:solidFill>
+            <a:srgbClr val="FFFFFF"/>
+          </a:solidFill>
+          <a:ln>
+            <a:solidFill>
+              <a:srgbClr val="D0DCDC"/>
+            </a:solidFill>
+          </a:ln>
+        </p:spPr>
+        <p:style>
+          <a:lnRef idx="1">
+            <a:schemeClr val="accent1"/>
+          </a:lnRef>
+          <a:fillRef idx="3">
+            <a:schemeClr val="accent1"/>
+          </a:fillRef>
+          <a:effectRef idx="2">
+            <a:schemeClr val="accent1"/>
+          </a:effectRef>
+          <a:fontRef idx="minor">
+            <a:schemeClr val="lt1"/>
+          </a:fontRef>
+        </p:style>
+        <p:txBody>
+          <a:bodyPr rtlCol="0" anchor="ctr"/>
+          <a:lstStyle/>
+          <a:p>
+            <a:pPr algn="ctr"/>
+          </a:p>
+        </p:txBody>
+      </p:sp>
+      <p:sp>
+        <p:nvSpPr>
+          <p:cNvPr id="13" name="TextBox 12"/>
+          <p:cNvSpPr txBox="1"/>
+          <p:nvPr/>
+        </p:nvSpPr>
+        <p:spPr>
+          <a:xfrm>
+            <a:off x="685800" y="4480560"/>
+            <a:ext cx="10515600" cy="548640"/>
+          </a:xfrm>
+          <a:prstGeom prst="rect">
+            <a:avLst/>
+          </a:prstGeom>
+          <a:noFill/>
+        </p:spPr>
+        <p:txBody>
+          <a:bodyPr wrap="square">
+            <a:spAutoFit/>
+          </a:bodyPr>
+          <a:lstStyle/>
+          <a:p>
+            <a:pPr algn="l"/>
+            <a:r>
+              <a:rPr sz="1500" b="0" i="0">
+                <a:solidFill>
+                  <a:srgbClr val="1E2F38"/>
+                </a:solidFill>
+                <a:latin typeface="Calibri"/>
+              </a:rPr>
+              <a:t>Path to continue building with FairBanks if your MVP wins locally or regionally</a:t>
+            </a:r>
+          </a:p>
+        </p:txBody>
+      </p:sp>
+      <p:sp>
+        <p:nvSpPr>
+          <p:cNvPr id="14" name="Rectangle 13"/>
+          <p:cNvSpPr/>
+          <p:nvPr/>
+        </p:nvSpPr>
+        <p:spPr>
+          <a:xfrm>
+            <a:off x="0" y="6583680"/>
+            <a:ext cx="12191695" cy="274320"/>
           </a:xfrm>
           <a:prstGeom prst="rect">
             <a:avLst/>
@@ -6578,7 +5631,6 @@
           <a:ln>
             <a:noFill/>
           </a:ln>
-          <a:effectLst/>
         </p:spPr>
         <p:style>
           <a:lnRef idx="1">
@@ -6604,14 +5656,14 @@
       </p:sp>
       <p:sp>
         <p:nvSpPr>
-          <p:cNvPr id="9" name="TextBox 8"/>
+          <p:cNvPr id="15" name="TextBox 14"/>
           <p:cNvSpPr txBox="1"/>
           <p:nvPr/>
         </p:nvSpPr>
         <p:spPr>
           <a:xfrm>
-            <a:off x="365760" y="6574536"/>
-            <a:ext cx="9144000" cy="274320"/>
+            <a:off x="365760" y="6592824"/>
+            <a:ext cx="9144000" cy="256032"/>
           </a:xfrm>
           <a:prstGeom prst="rect">
             <a:avLst/>
@@ -6619,16 +5671,12 @@
           <a:noFill/>
         </p:spPr>
         <p:txBody>
-          <a:bodyPr wrap="square" anchor="ctr">
+          <a:bodyPr wrap="square">
             <a:spAutoFit/>
           </a:bodyPr>
           <a:lstStyle/>
           <a:p>
-            <a:pPr algn="l">
-              <a:spcAft>
-                <a:spcPts val="0"/>
-              </a:spcAft>
-            </a:pPr>
+            <a:pPr algn="l"/>
             <a:r>
               <a:rPr sz="900" b="0" i="0">
                 <a:solidFill>
@@ -6636,21 +5684,21 @@
                 </a:solidFill>
                 <a:latin typeface="Calibri"/>
               </a:rPr>
-              <a:t>FairBanks FCHIP  |  GirlCode Hackathon 2026 — Kampala  |  Your health, our mission.</a:t>
-            </a:r>
-          </a:p>
-        </p:txBody>
-      </p:sp>
-      <p:sp>
-        <p:nvSpPr>
-          <p:cNvPr id="10" name="TextBox 9"/>
+              <a:t>FairBanks FCHIP | GirlCode Kampala 2026 | Your health, our mission.</a:t>
+            </a:r>
+          </a:p>
+        </p:txBody>
+      </p:sp>
+      <p:sp>
+        <p:nvSpPr>
+          <p:cNvPr id="16" name="TextBox 15"/>
           <p:cNvSpPr txBox="1"/>
           <p:nvPr/>
         </p:nvSpPr>
         <p:spPr>
           <a:xfrm>
-            <a:off x="11094415" y="6574536"/>
-            <a:ext cx="731520" cy="274320"/>
+            <a:off x="11460175" y="6592824"/>
+            <a:ext cx="457200" cy="256032"/>
           </a:xfrm>
           <a:prstGeom prst="rect">
             <a:avLst/>
@@ -6658,16 +5706,12 @@
           <a:noFill/>
         </p:spPr>
         <p:txBody>
-          <a:bodyPr wrap="square" anchor="ctr">
+          <a:bodyPr wrap="square">
             <a:spAutoFit/>
           </a:bodyPr>
           <a:lstStyle/>
           <a:p>
-            <a:pPr algn="r">
-              <a:spcAft>
-                <a:spcPts val="0"/>
-              </a:spcAft>
-            </a:pPr>
+            <a:pPr algn="r"/>
             <a:r>
               <a:rPr sz="900" b="0" i="0">
                 <a:solidFill>
@@ -6707,7 +5751,7 @@
         <p:spPr>
           <a:xfrm>
             <a:off x="0" y="0"/>
-            <a:ext cx="12191695" cy="960120"/>
+            <a:ext cx="12191695" cy="914400"/>
           </a:xfrm>
           <a:prstGeom prst="rect">
             <a:avLst/>
@@ -6718,7 +5762,6 @@
           <a:ln>
             <a:noFill/>
           </a:ln>
-          <a:effectLst/>
         </p:spPr>
         <p:style>
           <a:lnRef idx="1">
@@ -6751,7 +5794,7 @@
         <p:spPr>
           <a:xfrm>
             <a:off x="0" y="0"/>
-            <a:ext cx="164592" cy="960120"/>
+            <a:ext cx="137160" cy="914400"/>
           </a:xfrm>
           <a:prstGeom prst="rect">
             <a:avLst/>
@@ -6762,7 +5805,6 @@
           <a:ln>
             <a:noFill/>
           </a:ln>
-          <a:effectLst/>
         </p:spPr>
         <p:style>
           <a:lnRef idx="1">
@@ -6794,8 +5836,8 @@
         </p:nvSpPr>
         <p:spPr>
           <a:xfrm>
-            <a:off x="457200" y="109728"/>
-            <a:ext cx="10972800" cy="256032"/>
+            <a:off x="411480" y="91440"/>
+            <a:ext cx="10972800" cy="274320"/>
           </a:xfrm>
           <a:prstGeom prst="rect">
             <a:avLst/>
@@ -6803,16 +5845,12 @@
           <a:noFill/>
         </p:spPr>
         <p:txBody>
-          <a:bodyPr wrap="square" anchor="t">
+          <a:bodyPr wrap="square">
             <a:spAutoFit/>
           </a:bodyPr>
           <a:lstStyle/>
           <a:p>
-            <a:pPr algn="l">
-              <a:spcAft>
-                <a:spcPts val="0"/>
-              </a:spcAft>
-            </a:pPr>
+            <a:pPr algn="l"/>
             <a:r>
               <a:rPr sz="1100" b="1" i="0">
                 <a:solidFill>
@@ -6820,7 +5858,7 @@
                 </a:solidFill>
                 <a:latin typeface="Calibri"/>
               </a:rPr>
-              <a:t>DEEP TECHNOLOGY</a:t>
+              <a:t>OUTCOMES</a:t>
             </a:r>
           </a:p>
         </p:txBody>
@@ -6833,8 +5871,8 @@
         </p:nvSpPr>
         <p:spPr>
           <a:xfrm>
-            <a:off x="457200" y="384048"/>
-            <a:ext cx="11247120" cy="475488"/>
+            <a:off x="411480" y="384048"/>
+            <a:ext cx="10972800" cy="457200"/>
           </a:xfrm>
           <a:prstGeom prst="rect">
             <a:avLst/>
@@ -6842,31 +5880,27 @@
           <a:noFill/>
         </p:spPr>
         <p:txBody>
-          <a:bodyPr wrap="square" anchor="t">
+          <a:bodyPr wrap="square">
             <a:spAutoFit/>
           </a:bodyPr>
           <a:lstStyle/>
           <a:p>
-            <a:pPr algn="l">
-              <a:spcAft>
-                <a:spcPts val="0"/>
-              </a:spcAft>
-            </a:pPr>
-            <a:r>
-              <a:rPr sz="2200" b="1" i="0">
+            <a:pPr algn="l"/>
+            <a:r>
+              <a:rPr sz="2400" b="1" i="0">
                 <a:solidFill>
                   <a:srgbClr val="0A1F2E"/>
                 </a:solidFill>
                 <a:latin typeface="Calibri"/>
               </a:rPr>
-              <a:t>Intelligence rooted in African community care</a:t>
+              <a:t>Why teams should pick a FairBanks track</a:t>
             </a:r>
           </a:p>
         </p:txBody>
       </p:sp>
       <p:pic>
         <p:nvPicPr>
-          <p:cNvPr id="6" name="Picture 5" descr="deep_tech_collage_opt.jpg"/>
+          <p:cNvPr id="6" name="Picture 5" descr="dashboard_demo_opt.jpg"/>
           <p:cNvPicPr>
             <a:picLocks noChangeAspect="1"/>
           </p:cNvPicPr>
@@ -6880,8 +5914,8 @@
         </p:blipFill>
         <p:spPr>
           <a:xfrm>
-            <a:off x="411480" y="2065630"/>
-            <a:ext cx="5120640" cy="3412540"/>
+            <a:off x="411480" y="1935480"/>
+            <a:ext cx="5029200" cy="3352800"/>
           </a:xfrm>
           <a:prstGeom prst="rect">
             <a:avLst/>
@@ -6890,60 +5924,14 @@
       </p:pic>
       <p:sp>
         <p:nvSpPr>
-          <p:cNvPr id="7" name="Rectangle 6"/>
-          <p:cNvSpPr/>
-          <p:nvPr/>
-        </p:nvSpPr>
-        <p:spPr>
-          <a:xfrm>
-            <a:off x="5852160" y="1197864"/>
-            <a:ext cx="5852160" cy="766572"/>
-          </a:xfrm>
-          <a:prstGeom prst="rect">
-            <a:avLst/>
-          </a:prstGeom>
-          <a:solidFill>
-            <a:srgbClr val="FFFFFF"/>
-          </a:solidFill>
-          <a:ln w="9525">
-            <a:solidFill>
-              <a:srgbClr val="D0DCDC"/>
-            </a:solidFill>
-          </a:ln>
-          <a:effectLst/>
-        </p:spPr>
-        <p:style>
-          <a:lnRef idx="1">
-            <a:schemeClr val="accent1"/>
-          </a:lnRef>
-          <a:fillRef idx="3">
-            <a:schemeClr val="accent1"/>
-          </a:fillRef>
-          <a:effectRef idx="2">
-            <a:schemeClr val="accent1"/>
-          </a:effectRef>
-          <a:fontRef idx="minor">
-            <a:schemeClr val="lt1"/>
-          </a:fontRef>
-        </p:style>
-        <p:txBody>
-          <a:bodyPr rtlCol="0" anchor="ctr"/>
-          <a:lstStyle/>
-          <a:p>
-            <a:pPr algn="ctr"/>
-          </a:p>
-        </p:txBody>
-      </p:sp>
-      <p:sp>
-        <p:nvSpPr>
-          <p:cNvPr id="8" name="TextBox 7"/>
+          <p:cNvPr id="7" name="TextBox 6"/>
           <p:cNvSpPr txBox="1"/>
           <p:nvPr/>
         </p:nvSpPr>
         <p:spPr>
           <a:xfrm>
-            <a:off x="6035040" y="1252728"/>
-            <a:ext cx="5486400" cy="274320"/>
+            <a:off x="5669280" y="1097280"/>
+            <a:ext cx="5943600" cy="5029200"/>
           </a:xfrm>
           <a:prstGeom prst="rect">
             <a:avLst/>
@@ -6951,697 +5939,37 @@
           <a:noFill/>
         </p:spPr>
         <p:txBody>
-          <a:bodyPr wrap="square" anchor="t">
+          <a:bodyPr wrap="square">
             <a:spAutoFit/>
           </a:bodyPr>
           <a:lstStyle/>
           <a:p>
-            <a:pPr algn="l">
-              <a:spcAft>
-                <a:spcPts val="0"/>
-              </a:spcAft>
-            </a:pPr>
-            <a:r>
-              <a:rPr sz="1400" b="1" i="0">
-                <a:solidFill>
-                  <a:srgbClr val="0D6E6E"/>
+            <a:pPr algn="l"/>
+            <a:r>
+              <a:rPr sz="1600" b="0" i="0">
+                <a:solidFill>
+                  <a:srgbClr val="1E2F38"/>
                 </a:solidFill>
                 <a:latin typeface="Calibri"/>
               </a:rPr>
-              <a:t>Artificial Intelligence</a:t>
-            </a:r>
-          </a:p>
-        </p:txBody>
-      </p:sp>
-      <p:sp>
-        <p:nvSpPr>
-          <p:cNvPr id="9" name="TextBox 8"/>
-          <p:cNvSpPr txBox="1"/>
-          <p:nvPr/>
-        </p:nvSpPr>
-        <p:spPr>
-          <a:xfrm>
-            <a:off x="6035040" y="1527048"/>
-            <a:ext cx="5486400" cy="365760"/>
-          </a:xfrm>
-          <a:prstGeom prst="rect">
-            <a:avLst/>
-          </a:prstGeom>
-          <a:noFill/>
-        </p:spPr>
-        <p:txBody>
-          <a:bodyPr wrap="square" anchor="t">
-            <a:spAutoFit/>
-          </a:bodyPr>
-          <a:lstStyle/>
-          <a:p>
-            <a:pPr algn="l">
-              <a:spcAft>
-                <a:spcPts val="0"/>
-              </a:spcAft>
-            </a:pPr>
-            <a:r>
-              <a:rPr sz="1200" b="0" i="0">
-                <a:solidFill>
-                  <a:srgbClr val="3A4A54"/>
-                </a:solidFill>
-                <a:latin typeface="Calibri"/>
-              </a:rPr>
-              <a:t>Outbreak early warning; maternal and NCD risk scoring</a:t>
-            </a:r>
-          </a:p>
-        </p:txBody>
-      </p:sp>
-      <p:sp>
-        <p:nvSpPr>
-          <p:cNvPr id="10" name="Rectangle 9"/>
+              <a:t>• Real community health problem statements grounded in Kampala outreach
+• Mentorship from an operating medical centre — not a fictional case study
+• Portfolio project with social impact narrative for jobs and investors
+• Visibility with FairBanks partners in maternal, adolescent, and NCD work</a:t>
+            </a:r>
+          </a:p>
+        </p:txBody>
+      </p:sp>
+      <p:sp>
+        <p:nvSpPr>
+          <p:cNvPr id="8" name="Rectangle 7"/>
           <p:cNvSpPr/>
           <p:nvPr/>
         </p:nvSpPr>
         <p:spPr>
           <a:xfrm>
-            <a:off x="5852160" y="2074164"/>
-            <a:ext cx="5852160" cy="766572"/>
-          </a:xfrm>
-          <a:prstGeom prst="rect">
-            <a:avLst/>
-          </a:prstGeom>
-          <a:solidFill>
-            <a:srgbClr val="FFFFFF"/>
-          </a:solidFill>
-          <a:ln w="9525">
-            <a:solidFill>
-              <a:srgbClr val="D0DCDC"/>
-            </a:solidFill>
-          </a:ln>
-          <a:effectLst/>
-        </p:spPr>
-        <p:style>
-          <a:lnRef idx="1">
-            <a:schemeClr val="accent1"/>
-          </a:lnRef>
-          <a:fillRef idx="3">
-            <a:schemeClr val="accent1"/>
-          </a:fillRef>
-          <a:effectRef idx="2">
-            <a:schemeClr val="accent1"/>
-          </a:effectRef>
-          <a:fontRef idx="minor">
-            <a:schemeClr val="lt1"/>
-          </a:fontRef>
-        </p:style>
-        <p:txBody>
-          <a:bodyPr rtlCol="0" anchor="ctr"/>
-          <a:lstStyle/>
-          <a:p>
-            <a:pPr algn="ctr"/>
-          </a:p>
-        </p:txBody>
-      </p:sp>
-      <p:sp>
-        <p:nvSpPr>
-          <p:cNvPr id="11" name="TextBox 10"/>
-          <p:cNvSpPr txBox="1"/>
-          <p:nvPr/>
-        </p:nvSpPr>
-        <p:spPr>
-          <a:xfrm>
-            <a:off x="6035040" y="2129028"/>
-            <a:ext cx="5486400" cy="274320"/>
-          </a:xfrm>
-          <a:prstGeom prst="rect">
-            <a:avLst/>
-          </a:prstGeom>
-          <a:noFill/>
-        </p:spPr>
-        <p:txBody>
-          <a:bodyPr wrap="square" anchor="t">
-            <a:spAutoFit/>
-          </a:bodyPr>
-          <a:lstStyle/>
-          <a:p>
-            <a:pPr algn="l">
-              <a:spcAft>
-                <a:spcPts val="0"/>
-              </a:spcAft>
-            </a:pPr>
-            <a:r>
-              <a:rPr sz="1400" b="1" i="0">
-                <a:solidFill>
-                  <a:srgbClr val="0D6E6E"/>
-                </a:solidFill>
-                <a:latin typeface="Calibri"/>
-              </a:rPr>
-              <a:t>Machine Learning</a:t>
-            </a:r>
-          </a:p>
-        </p:txBody>
-      </p:sp>
-      <p:sp>
-        <p:nvSpPr>
-          <p:cNvPr id="12" name="TextBox 11"/>
-          <p:cNvSpPr txBox="1"/>
-          <p:nvPr/>
-        </p:nvSpPr>
-        <p:spPr>
-          <a:xfrm>
-            <a:off x="6035040" y="2403348"/>
-            <a:ext cx="5486400" cy="365760"/>
-          </a:xfrm>
-          <a:prstGeom prst="rect">
-            <a:avLst/>
-          </a:prstGeom>
-          <a:noFill/>
-        </p:spPr>
-        <p:txBody>
-          <a:bodyPr wrap="square" anchor="t">
-            <a:spAutoFit/>
-          </a:bodyPr>
-          <a:lstStyle/>
-          <a:p>
-            <a:pPr algn="l">
-              <a:spcAft>
-                <a:spcPts val="0"/>
-              </a:spcAft>
-            </a:pPr>
-            <a:r>
-              <a:rPr sz="1200" b="0" i="0">
-                <a:solidFill>
-                  <a:srgbClr val="3A4A54"/>
-                </a:solidFill>
-                <a:latin typeface="Calibri"/>
-              </a:rPr>
-              <a:t>Learn from community patterns, seasons, and outreach outcomes</a:t>
-            </a:r>
-          </a:p>
-        </p:txBody>
-      </p:sp>
-      <p:sp>
-        <p:nvSpPr>
-          <p:cNvPr id="13" name="Rectangle 12"/>
-          <p:cNvSpPr/>
-          <p:nvPr/>
-        </p:nvSpPr>
-        <p:spPr>
-          <a:xfrm>
-            <a:off x="5852160" y="2950464"/>
-            <a:ext cx="5852160" cy="766572"/>
-          </a:xfrm>
-          <a:prstGeom prst="rect">
-            <a:avLst/>
-          </a:prstGeom>
-          <a:solidFill>
-            <a:srgbClr val="FFFFFF"/>
-          </a:solidFill>
-          <a:ln w="9525">
-            <a:solidFill>
-              <a:srgbClr val="D0DCDC"/>
-            </a:solidFill>
-          </a:ln>
-          <a:effectLst/>
-        </p:spPr>
-        <p:style>
-          <a:lnRef idx="1">
-            <a:schemeClr val="accent1"/>
-          </a:lnRef>
-          <a:fillRef idx="3">
-            <a:schemeClr val="accent1"/>
-          </a:fillRef>
-          <a:effectRef idx="2">
-            <a:schemeClr val="accent1"/>
-          </a:effectRef>
-          <a:fontRef idx="minor">
-            <a:schemeClr val="lt1"/>
-          </a:fontRef>
-        </p:style>
-        <p:txBody>
-          <a:bodyPr rtlCol="0" anchor="ctr"/>
-          <a:lstStyle/>
-          <a:p>
-            <a:pPr algn="ctr"/>
-          </a:p>
-        </p:txBody>
-      </p:sp>
-      <p:sp>
-        <p:nvSpPr>
-          <p:cNvPr id="14" name="TextBox 13"/>
-          <p:cNvSpPr txBox="1"/>
-          <p:nvPr/>
-        </p:nvSpPr>
-        <p:spPr>
-          <a:xfrm>
-            <a:off x="6035040" y="3005328"/>
-            <a:ext cx="5486400" cy="274320"/>
-          </a:xfrm>
-          <a:prstGeom prst="rect">
-            <a:avLst/>
-          </a:prstGeom>
-          <a:noFill/>
-        </p:spPr>
-        <p:txBody>
-          <a:bodyPr wrap="square" anchor="t">
-            <a:spAutoFit/>
-          </a:bodyPr>
-          <a:lstStyle/>
-          <a:p>
-            <a:pPr algn="l">
-              <a:spcAft>
-                <a:spcPts val="0"/>
-              </a:spcAft>
-            </a:pPr>
-            <a:r>
-              <a:rPr sz="1400" b="1" i="0">
-                <a:solidFill>
-                  <a:srgbClr val="0D6E6E"/>
-                </a:solidFill>
-                <a:latin typeface="Calibri"/>
-              </a:rPr>
-              <a:t>GIS Mapping</a:t>
-            </a:r>
-          </a:p>
-        </p:txBody>
-      </p:sp>
-      <p:sp>
-        <p:nvSpPr>
-          <p:cNvPr id="15" name="TextBox 14"/>
-          <p:cNvSpPr txBox="1"/>
-          <p:nvPr/>
-        </p:nvSpPr>
-        <p:spPr>
-          <a:xfrm>
-            <a:off x="6035040" y="3279648"/>
-            <a:ext cx="5486400" cy="365760"/>
-          </a:xfrm>
-          <a:prstGeom prst="rect">
-            <a:avLst/>
-          </a:prstGeom>
-          <a:noFill/>
-        </p:spPr>
-        <p:txBody>
-          <a:bodyPr wrap="square" anchor="t">
-            <a:spAutoFit/>
-          </a:bodyPr>
-          <a:lstStyle/>
-          <a:p>
-            <a:pPr algn="l">
-              <a:spcAft>
-                <a:spcPts val="0"/>
-              </a:spcAft>
-            </a:pPr>
-            <a:r>
-              <a:rPr sz="1200" b="0" i="0">
-                <a:solidFill>
-                  <a:srgbClr val="3A4A54"/>
-                </a:solidFill>
-                <a:latin typeface="Calibri"/>
-              </a:rPr>
-              <a:t>Disease distribution, hotspots, and resource gaps</a:t>
-            </a:r>
-          </a:p>
-        </p:txBody>
-      </p:sp>
-      <p:sp>
-        <p:nvSpPr>
-          <p:cNvPr id="16" name="Rectangle 15"/>
-          <p:cNvSpPr/>
-          <p:nvPr/>
-        </p:nvSpPr>
-        <p:spPr>
-          <a:xfrm>
-            <a:off x="5852160" y="3826764"/>
-            <a:ext cx="5852160" cy="766572"/>
-          </a:xfrm>
-          <a:prstGeom prst="rect">
-            <a:avLst/>
-          </a:prstGeom>
-          <a:solidFill>
-            <a:srgbClr val="FFFFFF"/>
-          </a:solidFill>
-          <a:ln w="9525">
-            <a:solidFill>
-              <a:srgbClr val="D0DCDC"/>
-            </a:solidFill>
-          </a:ln>
-          <a:effectLst/>
-        </p:spPr>
-        <p:style>
-          <a:lnRef idx="1">
-            <a:schemeClr val="accent1"/>
-          </a:lnRef>
-          <a:fillRef idx="3">
-            <a:schemeClr val="accent1"/>
-          </a:fillRef>
-          <a:effectRef idx="2">
-            <a:schemeClr val="accent1"/>
-          </a:effectRef>
-          <a:fontRef idx="minor">
-            <a:schemeClr val="lt1"/>
-          </a:fontRef>
-        </p:style>
-        <p:txBody>
-          <a:bodyPr rtlCol="0" anchor="ctr"/>
-          <a:lstStyle/>
-          <a:p>
-            <a:pPr algn="ctr"/>
-          </a:p>
-        </p:txBody>
-      </p:sp>
-      <p:sp>
-        <p:nvSpPr>
-          <p:cNvPr id="17" name="TextBox 16"/>
-          <p:cNvSpPr txBox="1"/>
-          <p:nvPr/>
-        </p:nvSpPr>
-        <p:spPr>
-          <a:xfrm>
-            <a:off x="6035040" y="3881628"/>
-            <a:ext cx="5486400" cy="274320"/>
-          </a:xfrm>
-          <a:prstGeom prst="rect">
-            <a:avLst/>
-          </a:prstGeom>
-          <a:noFill/>
-        </p:spPr>
-        <p:txBody>
-          <a:bodyPr wrap="square" anchor="t">
-            <a:spAutoFit/>
-          </a:bodyPr>
-          <a:lstStyle/>
-          <a:p>
-            <a:pPr algn="l">
-              <a:spcAft>
-                <a:spcPts val="0"/>
-              </a:spcAft>
-            </a:pPr>
-            <a:r>
-              <a:rPr sz="1400" b="1" i="0">
-                <a:solidFill>
-                  <a:srgbClr val="0D6E6E"/>
-                </a:solidFill>
-                <a:latin typeface="Calibri"/>
-              </a:rPr>
-              <a:t>Mobile Data Collection</a:t>
-            </a:r>
-          </a:p>
-        </p:txBody>
-      </p:sp>
-      <p:sp>
-        <p:nvSpPr>
-          <p:cNvPr id="18" name="TextBox 17"/>
-          <p:cNvSpPr txBox="1"/>
-          <p:nvPr/>
-        </p:nvSpPr>
-        <p:spPr>
-          <a:xfrm>
-            <a:off x="6035040" y="4155948"/>
-            <a:ext cx="5486400" cy="365760"/>
-          </a:xfrm>
-          <a:prstGeom prst="rect">
-            <a:avLst/>
-          </a:prstGeom>
-          <a:noFill/>
-        </p:spPr>
-        <p:txBody>
-          <a:bodyPr wrap="square" anchor="t">
-            <a:spAutoFit/>
-          </a:bodyPr>
-          <a:lstStyle/>
-          <a:p>
-            <a:pPr algn="l">
-              <a:spcAft>
-                <a:spcPts val="0"/>
-              </a:spcAft>
-            </a:pPr>
-            <a:r>
-              <a:rPr sz="1200" b="0" i="0">
-                <a:solidFill>
-                  <a:srgbClr val="3A4A54"/>
-                </a:solidFill>
-                <a:latin typeface="Calibri"/>
-              </a:rPr>
-              <a:t>Offline-capable CHW/VHT capture at household level</a:t>
-            </a:r>
-          </a:p>
-        </p:txBody>
-      </p:sp>
-      <p:sp>
-        <p:nvSpPr>
-          <p:cNvPr id="19" name="Rectangle 18"/>
-          <p:cNvSpPr/>
-          <p:nvPr/>
-        </p:nvSpPr>
-        <p:spPr>
-          <a:xfrm>
-            <a:off x="5852160" y="4703064"/>
-            <a:ext cx="5852160" cy="766572"/>
-          </a:xfrm>
-          <a:prstGeom prst="rect">
-            <a:avLst/>
-          </a:prstGeom>
-          <a:solidFill>
-            <a:srgbClr val="FFFFFF"/>
-          </a:solidFill>
-          <a:ln w="9525">
-            <a:solidFill>
-              <a:srgbClr val="D0DCDC"/>
-            </a:solidFill>
-          </a:ln>
-          <a:effectLst/>
-        </p:spPr>
-        <p:style>
-          <a:lnRef idx="1">
-            <a:schemeClr val="accent1"/>
-          </a:lnRef>
-          <a:fillRef idx="3">
-            <a:schemeClr val="accent1"/>
-          </a:fillRef>
-          <a:effectRef idx="2">
-            <a:schemeClr val="accent1"/>
-          </a:effectRef>
-          <a:fontRef idx="minor">
-            <a:schemeClr val="lt1"/>
-          </a:fontRef>
-        </p:style>
-        <p:txBody>
-          <a:bodyPr rtlCol="0" anchor="ctr"/>
-          <a:lstStyle/>
-          <a:p>
-            <a:pPr algn="ctr"/>
-          </a:p>
-        </p:txBody>
-      </p:sp>
-      <p:sp>
-        <p:nvSpPr>
-          <p:cNvPr id="20" name="TextBox 19"/>
-          <p:cNvSpPr txBox="1"/>
-          <p:nvPr/>
-        </p:nvSpPr>
-        <p:spPr>
-          <a:xfrm>
-            <a:off x="6035040" y="4757928"/>
-            <a:ext cx="5486400" cy="274320"/>
-          </a:xfrm>
-          <a:prstGeom prst="rect">
-            <a:avLst/>
-          </a:prstGeom>
-          <a:noFill/>
-        </p:spPr>
-        <p:txBody>
-          <a:bodyPr wrap="square" anchor="t">
-            <a:spAutoFit/>
-          </a:bodyPr>
-          <a:lstStyle/>
-          <a:p>
-            <a:pPr algn="l">
-              <a:spcAft>
-                <a:spcPts val="0"/>
-              </a:spcAft>
-            </a:pPr>
-            <a:r>
-              <a:rPr sz="1400" b="1" i="0">
-                <a:solidFill>
-                  <a:srgbClr val="0D6E6E"/>
-                </a:solidFill>
-                <a:latin typeface="Calibri"/>
-              </a:rPr>
-              <a:t>Cloud Computing</a:t>
-            </a:r>
-          </a:p>
-        </p:txBody>
-      </p:sp>
-      <p:sp>
-        <p:nvSpPr>
-          <p:cNvPr id="21" name="TextBox 20"/>
-          <p:cNvSpPr txBox="1"/>
-          <p:nvPr/>
-        </p:nvSpPr>
-        <p:spPr>
-          <a:xfrm>
-            <a:off x="6035040" y="5032248"/>
-            <a:ext cx="5486400" cy="365760"/>
-          </a:xfrm>
-          <a:prstGeom prst="rect">
-            <a:avLst/>
-          </a:prstGeom>
-          <a:noFill/>
-        </p:spPr>
-        <p:txBody>
-          <a:bodyPr wrap="square" anchor="t">
-            <a:spAutoFit/>
-          </a:bodyPr>
-          <a:lstStyle/>
-          <a:p>
-            <a:pPr algn="l">
-              <a:spcAft>
-                <a:spcPts val="0"/>
-              </a:spcAft>
-            </a:pPr>
-            <a:r>
-              <a:rPr sz="1200" b="0" i="0">
-                <a:solidFill>
-                  <a:srgbClr val="3A4A54"/>
-                </a:solidFill>
-                <a:latin typeface="Calibri"/>
-              </a:rPr>
-              <a:t>Secure sync across facilities and partners</a:t>
-            </a:r>
-          </a:p>
-        </p:txBody>
-      </p:sp>
-      <p:sp>
-        <p:nvSpPr>
-          <p:cNvPr id="22" name="Rectangle 21"/>
-          <p:cNvSpPr/>
-          <p:nvPr/>
-        </p:nvSpPr>
-        <p:spPr>
-          <a:xfrm>
-            <a:off x="5852160" y="5579364"/>
-            <a:ext cx="5852160" cy="766572"/>
-          </a:xfrm>
-          <a:prstGeom prst="rect">
-            <a:avLst/>
-          </a:prstGeom>
-          <a:solidFill>
-            <a:srgbClr val="FFFFFF"/>
-          </a:solidFill>
-          <a:ln w="9525">
-            <a:solidFill>
-              <a:srgbClr val="D0DCDC"/>
-            </a:solidFill>
-          </a:ln>
-          <a:effectLst/>
-        </p:spPr>
-        <p:style>
-          <a:lnRef idx="1">
-            <a:schemeClr val="accent1"/>
-          </a:lnRef>
-          <a:fillRef idx="3">
-            <a:schemeClr val="accent1"/>
-          </a:fillRef>
-          <a:effectRef idx="2">
-            <a:schemeClr val="accent1"/>
-          </a:effectRef>
-          <a:fontRef idx="minor">
-            <a:schemeClr val="lt1"/>
-          </a:fontRef>
-        </p:style>
-        <p:txBody>
-          <a:bodyPr rtlCol="0" anchor="ctr"/>
-          <a:lstStyle/>
-          <a:p>
-            <a:pPr algn="ctr"/>
-          </a:p>
-        </p:txBody>
-      </p:sp>
-      <p:sp>
-        <p:nvSpPr>
-          <p:cNvPr id="23" name="TextBox 22"/>
-          <p:cNvSpPr txBox="1"/>
-          <p:nvPr/>
-        </p:nvSpPr>
-        <p:spPr>
-          <a:xfrm>
-            <a:off x="6035040" y="5634228"/>
-            <a:ext cx="5486400" cy="274320"/>
-          </a:xfrm>
-          <a:prstGeom prst="rect">
-            <a:avLst/>
-          </a:prstGeom>
-          <a:noFill/>
-        </p:spPr>
-        <p:txBody>
-          <a:bodyPr wrap="square" anchor="t">
-            <a:spAutoFit/>
-          </a:bodyPr>
-          <a:lstStyle/>
-          <a:p>
-            <a:pPr algn="l">
-              <a:spcAft>
-                <a:spcPts val="0"/>
-              </a:spcAft>
-            </a:pPr>
-            <a:r>
-              <a:rPr sz="1400" b="1" i="0">
-                <a:solidFill>
-                  <a:srgbClr val="0D6E6E"/>
-                </a:solidFill>
-                <a:latin typeface="Calibri"/>
-              </a:rPr>
-              <a:t>Analytics Dashboards</a:t>
-            </a:r>
-          </a:p>
-        </p:txBody>
-      </p:sp>
-      <p:sp>
-        <p:nvSpPr>
-          <p:cNvPr id="24" name="TextBox 23"/>
-          <p:cNvSpPr txBox="1"/>
-          <p:nvPr/>
-        </p:nvSpPr>
-        <p:spPr>
-          <a:xfrm>
-            <a:off x="6035040" y="5908548"/>
-            <a:ext cx="5486400" cy="365760"/>
-          </a:xfrm>
-          <a:prstGeom prst="rect">
-            <a:avLst/>
-          </a:prstGeom>
-          <a:noFill/>
-        </p:spPr>
-        <p:txBody>
-          <a:bodyPr wrap="square" anchor="t">
-            <a:spAutoFit/>
-          </a:bodyPr>
-          <a:lstStyle/>
-          <a:p>
-            <a:pPr algn="l">
-              <a:spcAft>
-                <a:spcPts val="0"/>
-              </a:spcAft>
-            </a:pPr>
-            <a:r>
-              <a:rPr sz="1200" b="0" i="0">
-                <a:solidFill>
-                  <a:srgbClr val="3A4A54"/>
-                </a:solidFill>
-                <a:latin typeface="Calibri"/>
-              </a:rPr>
-              <a:t>Real-time views for clinics, districts, and NGOs</a:t>
-            </a:r>
-          </a:p>
-        </p:txBody>
-      </p:sp>
-      <p:sp>
-        <p:nvSpPr>
-          <p:cNvPr id="25" name="Rectangle 24"/>
-          <p:cNvSpPr/>
-          <p:nvPr/>
-        </p:nvSpPr>
-        <p:spPr>
-          <a:xfrm>
-            <a:off x="0" y="6565392"/>
-            <a:ext cx="12191695" cy="292608"/>
+            <a:off x="0" y="6583680"/>
+            <a:ext cx="12191695" cy="274320"/>
           </a:xfrm>
           <a:prstGeom prst="rect">
             <a:avLst/>
@@ -7652,7 +5980,6 @@
           <a:ln>
             <a:noFill/>
           </a:ln>
-          <a:effectLst/>
         </p:spPr>
         <p:style>
           <a:lnRef idx="1">
@@ -7678,14 +6005,14 @@
       </p:sp>
       <p:sp>
         <p:nvSpPr>
-          <p:cNvPr id="26" name="TextBox 25"/>
+          <p:cNvPr id="9" name="TextBox 8"/>
           <p:cNvSpPr txBox="1"/>
           <p:nvPr/>
         </p:nvSpPr>
         <p:spPr>
           <a:xfrm>
-            <a:off x="365760" y="6574536"/>
-            <a:ext cx="9144000" cy="274320"/>
+            <a:off x="365760" y="6592824"/>
+            <a:ext cx="9144000" cy="256032"/>
           </a:xfrm>
           <a:prstGeom prst="rect">
             <a:avLst/>
@@ -7693,16 +6020,12 @@
           <a:noFill/>
         </p:spPr>
         <p:txBody>
-          <a:bodyPr wrap="square" anchor="ctr">
+          <a:bodyPr wrap="square">
             <a:spAutoFit/>
           </a:bodyPr>
           <a:lstStyle/>
           <a:p>
-            <a:pPr algn="l">
-              <a:spcAft>
-                <a:spcPts val="0"/>
-              </a:spcAft>
-            </a:pPr>
+            <a:pPr algn="l"/>
             <a:r>
               <a:rPr sz="900" b="0" i="0">
                 <a:solidFill>
@@ -7710,21 +6033,21 @@
                 </a:solidFill>
                 <a:latin typeface="Calibri"/>
               </a:rPr>
-              <a:t>FairBanks FCHIP  |  GirlCode Hackathon 2026 — Kampala  |  Your health, our mission.</a:t>
-            </a:r>
-          </a:p>
-        </p:txBody>
-      </p:sp>
-      <p:sp>
-        <p:nvSpPr>
-          <p:cNvPr id="27" name="TextBox 26"/>
+              <a:t>FairBanks FCHIP | GirlCode Kampala 2026 | Your health, our mission.</a:t>
+            </a:r>
+          </a:p>
+        </p:txBody>
+      </p:sp>
+      <p:sp>
+        <p:nvSpPr>
+          <p:cNvPr id="10" name="TextBox 9"/>
           <p:cNvSpPr txBox="1"/>
           <p:nvPr/>
         </p:nvSpPr>
         <p:spPr>
           <a:xfrm>
-            <a:off x="11094415" y="6574536"/>
-            <a:ext cx="731520" cy="274320"/>
+            <a:off x="11460175" y="6592824"/>
+            <a:ext cx="457200" cy="256032"/>
           </a:xfrm>
           <a:prstGeom prst="rect">
             <a:avLst/>
@@ -7732,16 +6055,12 @@
           <a:noFill/>
         </p:spPr>
         <p:txBody>
-          <a:bodyPr wrap="square" anchor="ctr">
+          <a:bodyPr wrap="square">
             <a:spAutoFit/>
           </a:bodyPr>
           <a:lstStyle/>
           <a:p>
-            <a:pPr algn="r">
-              <a:spcAft>
-                <a:spcPts val="0"/>
-              </a:spcAft>
-            </a:pPr>
+            <a:pPr algn="r"/>
             <a:r>
               <a:rPr sz="900" b="0" i="0">
                 <a:solidFill>
@@ -7772,294 +6091,9 @@
         <p:nvPr/>
       </p:nvGrpSpPr>
       <p:grpSpPr/>
-      <p:sp>
-        <p:nvSpPr>
-          <p:cNvPr id="2" name="Rectangle 1"/>
-          <p:cNvSpPr/>
-          <p:nvPr/>
-        </p:nvSpPr>
-        <p:spPr>
-          <a:xfrm>
-            <a:off x="0" y="0"/>
-            <a:ext cx="12191695" cy="960120"/>
-          </a:xfrm>
-          <a:prstGeom prst="rect">
-            <a:avLst/>
-          </a:prstGeom>
-          <a:solidFill>
-            <a:srgbClr val="F7F5F0"/>
-          </a:solidFill>
-          <a:ln>
-            <a:noFill/>
-          </a:ln>
-          <a:effectLst/>
-        </p:spPr>
-        <p:style>
-          <a:lnRef idx="1">
-            <a:schemeClr val="accent1"/>
-          </a:lnRef>
-          <a:fillRef idx="3">
-            <a:schemeClr val="accent1"/>
-          </a:fillRef>
-          <a:effectRef idx="2">
-            <a:schemeClr val="accent1"/>
-          </a:effectRef>
-          <a:fontRef idx="minor">
-            <a:schemeClr val="lt1"/>
-          </a:fontRef>
-        </p:style>
-        <p:txBody>
-          <a:bodyPr rtlCol="0" anchor="ctr"/>
-          <a:lstStyle/>
-          <a:p>
-            <a:pPr algn="ctr"/>
-          </a:p>
-        </p:txBody>
-      </p:sp>
-      <p:sp>
-        <p:nvSpPr>
-          <p:cNvPr id="3" name="Rectangle 2"/>
-          <p:cNvSpPr/>
-          <p:nvPr/>
-        </p:nvSpPr>
-        <p:spPr>
-          <a:xfrm>
-            <a:off x="0" y="0"/>
-            <a:ext cx="164592" cy="960120"/>
-          </a:xfrm>
-          <a:prstGeom prst="rect">
-            <a:avLst/>
-          </a:prstGeom>
-          <a:solidFill>
-            <a:srgbClr val="0D6E6E"/>
-          </a:solidFill>
-          <a:ln>
-            <a:noFill/>
-          </a:ln>
-          <a:effectLst/>
-        </p:spPr>
-        <p:style>
-          <a:lnRef idx="1">
-            <a:schemeClr val="accent1"/>
-          </a:lnRef>
-          <a:fillRef idx="3">
-            <a:schemeClr val="accent1"/>
-          </a:fillRef>
-          <a:effectRef idx="2">
-            <a:schemeClr val="accent1"/>
-          </a:effectRef>
-          <a:fontRef idx="minor">
-            <a:schemeClr val="lt1"/>
-          </a:fontRef>
-        </p:style>
-        <p:txBody>
-          <a:bodyPr rtlCol="0" anchor="ctr"/>
-          <a:lstStyle/>
-          <a:p>
-            <a:pPr algn="ctr"/>
-          </a:p>
-        </p:txBody>
-      </p:sp>
-      <p:sp>
-        <p:nvSpPr>
-          <p:cNvPr id="4" name="TextBox 3"/>
-          <p:cNvSpPr txBox="1"/>
-          <p:nvPr/>
-        </p:nvSpPr>
-        <p:spPr>
-          <a:xfrm>
-            <a:off x="457200" y="109728"/>
-            <a:ext cx="10972800" cy="256032"/>
-          </a:xfrm>
-          <a:prstGeom prst="rect">
-            <a:avLst/>
-          </a:prstGeom>
-          <a:noFill/>
-        </p:spPr>
-        <p:txBody>
-          <a:bodyPr wrap="square" anchor="t">
-            <a:spAutoFit/>
-          </a:bodyPr>
-          <a:lstStyle/>
-          <a:p>
-            <a:pPr algn="l">
-              <a:spcAft>
-                <a:spcPts val="0"/>
-              </a:spcAft>
-            </a:pPr>
-            <a:r>
-              <a:rPr sz="1100" b="1" i="0">
-                <a:solidFill>
-                  <a:srgbClr val="C45C26"/>
-                </a:solidFill>
-                <a:latin typeface="Calibri"/>
-              </a:rPr>
-              <a:t>OUR MODEL</a:t>
-            </a:r>
-          </a:p>
-        </p:txBody>
-      </p:sp>
-      <p:sp>
-        <p:nvSpPr>
-          <p:cNvPr id="5" name="TextBox 4"/>
-          <p:cNvSpPr txBox="1"/>
-          <p:nvPr/>
-        </p:nvSpPr>
-        <p:spPr>
-          <a:xfrm>
-            <a:off x="457200" y="384048"/>
-            <a:ext cx="11247120" cy="475488"/>
-          </a:xfrm>
-          <a:prstGeom prst="rect">
-            <a:avLst/>
-          </a:prstGeom>
-          <a:noFill/>
-        </p:spPr>
-        <p:txBody>
-          <a:bodyPr wrap="square" anchor="t">
-            <a:spAutoFit/>
-          </a:bodyPr>
-          <a:lstStyle/>
-          <a:p>
-            <a:pPr algn="l">
-              <a:spcAft>
-                <a:spcPts val="0"/>
-              </a:spcAft>
-            </a:pPr>
-            <a:r>
-              <a:rPr sz="2200" b="1" i="0">
-                <a:solidFill>
-                  <a:srgbClr val="0A1F2E"/>
-                </a:solidFill>
-                <a:latin typeface="Calibri"/>
-              </a:rPr>
-              <a:t>Communities first — intelligence that serves care</a:t>
-            </a:r>
-          </a:p>
-        </p:txBody>
-      </p:sp>
-      <p:sp>
-        <p:nvSpPr>
-          <p:cNvPr id="6" name="TextBox 5"/>
-          <p:cNvSpPr txBox="1"/>
-          <p:nvPr/>
-        </p:nvSpPr>
-        <p:spPr>
-          <a:xfrm>
-            <a:off x="502920" y="1234440"/>
-            <a:ext cx="5760720" cy="5074920"/>
-          </a:xfrm>
-          <a:prstGeom prst="rect">
-            <a:avLst/>
-          </a:prstGeom>
-          <a:noFill/>
-        </p:spPr>
-        <p:txBody>
-          <a:bodyPr wrap="square">
-            <a:spAutoFit/>
-          </a:bodyPr>
-          <a:lstStyle/>
-          <a:p>
-            <a:pPr>
-              <a:spcAft>
-                <a:spcPts val="800"/>
-              </a:spcAft>
-            </a:pPr>
-            <a:r>
-              <a:rPr sz="1400">
-                <a:solidFill>
-                  <a:srgbClr val="1E2F38"/>
-                </a:solidFill>
-                <a:latin typeface="Calibri"/>
-              </a:rPr>
-              <a:t>•  Community members identify needs and own solutions</a:t>
-            </a:r>
-          </a:p>
-          <a:p>
-            <a:pPr>
-              <a:spcAft>
-                <a:spcPts val="800"/>
-              </a:spcAft>
-            </a:pPr>
-            <a:r>
-              <a:rPr sz="1400">
-                <a:solidFill>
-                  <a:srgbClr val="1E2F38"/>
-                </a:solidFill>
-                <a:latin typeface="Calibri"/>
-              </a:rPr>
-              <a:t>•  CHWs / VHTs bridge homes to clinics</a:t>
-            </a:r>
-          </a:p>
-          <a:p>
-            <a:pPr>
-              <a:spcAft>
-                <a:spcPts val="800"/>
-              </a:spcAft>
-            </a:pPr>
-            <a:r>
-              <a:rPr sz="1400">
-                <a:solidFill>
-                  <a:srgbClr val="1E2F38"/>
-                </a:solidFill>
-                <a:latin typeface="Calibri"/>
-              </a:rPr>
-              <a:t>•  FairBanks Community Reach programmes deliver outreach</a:t>
-            </a:r>
-          </a:p>
-          <a:p>
-            <a:pPr>
-              <a:spcAft>
-                <a:spcPts val="800"/>
-              </a:spcAft>
-            </a:pPr>
-            <a:r>
-              <a:rPr sz="1400">
-                <a:solidFill>
-                  <a:srgbClr val="1E2F38"/>
-                </a:solidFill>
-                <a:latin typeface="Calibri"/>
-              </a:rPr>
-              <a:t>•  FairBanks Medical Centre provides clinical care</a:t>
-            </a:r>
-          </a:p>
-          <a:p>
-            <a:pPr>
-              <a:spcAft>
-                <a:spcPts val="800"/>
-              </a:spcAft>
-            </a:pPr>
-            <a:r>
-              <a:rPr sz="1400">
-                <a:solidFill>
-                  <a:srgbClr val="1E2F38"/>
-                </a:solidFill>
-                <a:latin typeface="Calibri"/>
-              </a:rPr>
-              <a:t>•  Research, partnerships, and skills strengthen the system</a:t>
-            </a:r>
-          </a:p>
-          <a:p>
-            <a:pPr>
-              <a:spcAft>
-                <a:spcPts val="800"/>
-              </a:spcAft>
-            </a:pPr>
-            <a:r>
-              <a:rPr sz="1400">
-                <a:solidFill>
-                  <a:srgbClr val="1E2F38"/>
-                </a:solidFill>
-                <a:latin typeface="Calibri"/>
-              </a:rPr>
-              <a:t>•  Livelihoods and empowerment make health gains last</a:t>
-            </a:r>
-          </a:p>
-        </p:txBody>
-      </p:sp>
       <p:pic>
         <p:nvPicPr>
-          <p:cNvPr id="7" name="Picture 6" descr="gis_hotspots_opt.jpg"/>
+          <p:cNvPr id="2" name="Picture 1" descr="outreach_facilitator_group_01_opt.jpg"/>
           <p:cNvPicPr>
             <a:picLocks noChangeAspect="1"/>
           </p:cNvPicPr>
@@ -8073,8 +6107,8 @@
         </p:blipFill>
         <p:spPr>
           <a:xfrm>
-            <a:off x="6492240" y="2035160"/>
-            <a:ext cx="5212080" cy="3473479"/>
+            <a:off x="0" y="0"/>
+            <a:ext cx="12191695" cy="6858000"/>
           </a:xfrm>
           <a:prstGeom prst="rect">
             <a:avLst/>
@@ -8083,14 +6117,14 @@
       </p:pic>
       <p:sp>
         <p:nvSpPr>
-          <p:cNvPr id="8" name="Rectangle 7"/>
+          <p:cNvPr id="3" name="Rectangle 2"/>
           <p:cNvSpPr/>
           <p:nvPr/>
         </p:nvSpPr>
         <p:spPr>
           <a:xfrm>
-            <a:off x="0" y="6565392"/>
-            <a:ext cx="12191695" cy="292608"/>
+            <a:off x="0" y="4572000"/>
+            <a:ext cx="12191695" cy="2286000"/>
           </a:xfrm>
           <a:prstGeom prst="rect">
             <a:avLst/>
@@ -8101,7 +6135,6 @@
           <a:ln>
             <a:noFill/>
           </a:ln>
-          <a:effectLst/>
         </p:spPr>
         <p:style>
           <a:lnRef idx="1">
@@ -8127,14 +6160,14 @@
       </p:sp>
       <p:sp>
         <p:nvSpPr>
-          <p:cNvPr id="9" name="TextBox 8"/>
+          <p:cNvPr id="4" name="TextBox 3"/>
           <p:cNvSpPr txBox="1"/>
           <p:nvPr/>
         </p:nvSpPr>
         <p:spPr>
           <a:xfrm>
-            <a:off x="365760" y="6574536"/>
-            <a:ext cx="9144000" cy="274320"/>
+            <a:off x="548640" y="4937760"/>
+            <a:ext cx="10972800" cy="502920"/>
           </a:xfrm>
           <a:prstGeom prst="rect">
             <a:avLst/>
@@ -8142,38 +6175,34 @@
           <a:noFill/>
         </p:spPr>
         <p:txBody>
-          <a:bodyPr wrap="square" anchor="ctr">
+          <a:bodyPr wrap="square">
             <a:spAutoFit/>
           </a:bodyPr>
           <a:lstStyle/>
           <a:p>
-            <a:pPr algn="l">
-              <a:spcAft>
-                <a:spcPts val="0"/>
-              </a:spcAft>
-            </a:pPr>
-            <a:r>
-              <a:rPr sz="900" b="0" i="0">
+            <a:pPr algn="l"/>
+            <a:r>
+              <a:rPr sz="2400" b="1" i="0">
                 <a:solidFill>
                   <a:srgbClr val="FFFFFF"/>
                 </a:solidFill>
                 <a:latin typeface="Calibri"/>
               </a:rPr>
-              <a:t>FairBanks FCHIP  |  GirlCode Hackathon 2026 — Kampala  |  Your health, our mission.</a:t>
-            </a:r>
-          </a:p>
-        </p:txBody>
-      </p:sp>
-      <p:sp>
-        <p:nvSpPr>
-          <p:cNvPr id="10" name="TextBox 9"/>
+              <a:t>See you at UICT Nakawa — 5–6 September 2026.</a:t>
+            </a:r>
+          </a:p>
+        </p:txBody>
+      </p:sp>
+      <p:sp>
+        <p:nvSpPr>
+          <p:cNvPr id="5" name="TextBox 4"/>
           <p:cNvSpPr txBox="1"/>
           <p:nvPr/>
         </p:nvSpPr>
         <p:spPr>
           <a:xfrm>
-            <a:off x="11094415" y="6574536"/>
-            <a:ext cx="731520" cy="274320"/>
+            <a:off x="548640" y="5760720"/>
+            <a:ext cx="10972800" cy="320040"/>
           </a:xfrm>
           <a:prstGeom prst="rect">
             <a:avLst/>
@@ -8181,24 +6210,20 @@
           <a:noFill/>
         </p:spPr>
         <p:txBody>
-          <a:bodyPr wrap="square" anchor="ctr">
+          <a:bodyPr wrap="square">
             <a:spAutoFit/>
           </a:bodyPr>
           <a:lstStyle/>
           <a:p>
-            <a:pPr algn="r">
-              <a:spcAft>
-                <a:spcPts val="0"/>
-              </a:spcAft>
-            </a:pPr>
-            <a:r>
-              <a:rPr sz="900" b="0" i="0">
+            <a:pPr algn="l"/>
+            <a:r>
+              <a:rPr sz="1400" b="1" i="0">
                 <a:solidFill>
                   <a:srgbClr val="FFFFFF"/>
                 </a:solidFill>
                 <a:latin typeface="Calibri"/>
               </a:rPr>
-              <a:t>9</a:t>
+              <a:t>Your health, our mission.</a:t>
             </a:r>
           </a:p>
         </p:txBody>

--- a/applications/girlcode/documents/girlcode_ppt.pptx
+++ b/applications/girlcode/documents/girlcode_ppt.pptx
@@ -3207,7 +3207,7 @@
         <p:spPr>
           <a:xfrm>
             <a:off x="548640" y="4434840"/>
-            <a:ext cx="10972800" cy="548640"/>
+            <a:ext cx="10972800" cy="457200"/>
           </a:xfrm>
           <a:prstGeom prst="rect">
             <a:avLst/>
@@ -3222,7 +3222,7 @@
           <a:p>
             <a:pPr algn="l"/>
             <a:r>
-              <a:rPr sz="2600" b="1" i="0">
+              <a:rPr sz="2400" b="1" i="0">
                 <a:solidFill>
                   <a:srgbClr val="FFFFFF"/>
                 </a:solidFill>
@@ -3241,8 +3241,8 @@
         </p:nvSpPr>
         <p:spPr>
           <a:xfrm>
-            <a:off x="548640" y="5257800"/>
-            <a:ext cx="10972800" cy="320040"/>
+            <a:off x="548640" y="4937760"/>
+            <a:ext cx="10972800" cy="274320"/>
           </a:xfrm>
           <a:prstGeom prst="rect">
             <a:avLst/>
@@ -3257,7 +3257,42 @@
           <a:p>
             <a:pPr algn="l"/>
             <a:r>
-              <a:rPr sz="1400" b="0" i="0">
+              <a:rPr sz="1300" b="1" i="1">
+                <a:solidFill>
+                  <a:srgbClr val="F2C79B"/>
+                </a:solidFill>
+                <a:latin typeface="Calibri"/>
+              </a:rPr>
+              <a:t>FairBanks Community Health Intelligence Platform (FCHIP)</a:t>
+            </a:r>
+          </a:p>
+        </p:txBody>
+      </p:sp>
+      <p:sp>
+        <p:nvSpPr>
+          <p:cNvPr id="7" name="TextBox 6"/>
+          <p:cNvSpPr txBox="1"/>
+          <p:nvPr/>
+        </p:nvSpPr>
+        <p:spPr>
+          <a:xfrm>
+            <a:off x="548640" y="5303520"/>
+            <a:ext cx="10972800" cy="274320"/>
+          </a:xfrm>
+          <a:prstGeom prst="rect">
+            <a:avLst/>
+          </a:prstGeom>
+          <a:noFill/>
+        </p:spPr>
+        <p:txBody>
+          <a:bodyPr wrap="square">
+            <a:spAutoFit/>
+          </a:bodyPr>
+          <a:lstStyle/>
+          <a:p>
+            <a:pPr algn="l"/>
+            <a:r>
+              <a:rPr sz="1200" b="0" i="0">
                 <a:solidFill>
                   <a:srgbClr val="D0E8E8"/>
                 </a:solidFill>
@@ -3270,7 +3305,7 @@
       </p:sp>
       <p:sp>
         <p:nvSpPr>
-          <p:cNvPr id="7" name="TextBox 6"/>
+          <p:cNvPr id="8" name="TextBox 7"/>
           <p:cNvSpPr txBox="1"/>
           <p:nvPr/>
         </p:nvSpPr>

--- a/applications/girlcode/documents/girlcode_ppt.pptx
+++ b/applications/girlcode/documents/girlcode_ppt.pptx
@@ -3185,7 +3185,17 @@
           </a:bodyPr>
           <a:lstStyle/>
           <a:p>
-            <a:pPr algn="l"/>
+            <a:pPr algn="l">
+              <a:lnSpc>
+                <a:spcPct val="115000"/>
+              </a:lnSpc>
+              <a:spcBef>
+                <a:spcPts val="0"/>
+              </a:spcBef>
+              <a:spcAft>
+                <a:spcPts val="200"/>
+              </a:spcAft>
+            </a:pPr>
             <a:r>
               <a:rPr sz="1300" b="1" i="0">
                 <a:solidFill>
@@ -3220,7 +3230,17 @@
           </a:bodyPr>
           <a:lstStyle/>
           <a:p>
-            <a:pPr algn="l"/>
+            <a:pPr algn="l">
+              <a:lnSpc>
+                <a:spcPct val="115000"/>
+              </a:lnSpc>
+              <a:spcBef>
+                <a:spcPts val="0"/>
+              </a:spcBef>
+              <a:spcAft>
+                <a:spcPts val="200"/>
+              </a:spcAft>
+            </a:pPr>
             <a:r>
               <a:rPr sz="2400" b="1" i="0">
                 <a:solidFill>
@@ -3255,7 +3275,17 @@
           </a:bodyPr>
           <a:lstStyle/>
           <a:p>
-            <a:pPr algn="l"/>
+            <a:pPr algn="l">
+              <a:lnSpc>
+                <a:spcPct val="115000"/>
+              </a:lnSpc>
+              <a:spcBef>
+                <a:spcPts val="0"/>
+              </a:spcBef>
+              <a:spcAft>
+                <a:spcPts val="200"/>
+              </a:spcAft>
+            </a:pPr>
             <a:r>
               <a:rPr sz="1300" b="1" i="1">
                 <a:solidFill>
@@ -3290,7 +3320,17 @@
           </a:bodyPr>
           <a:lstStyle/>
           <a:p>
-            <a:pPr algn="l"/>
+            <a:pPr algn="l">
+              <a:lnSpc>
+                <a:spcPct val="115000"/>
+              </a:lnSpc>
+              <a:spcBef>
+                <a:spcPts val="0"/>
+              </a:spcBef>
+              <a:spcAft>
+                <a:spcPts val="200"/>
+              </a:spcAft>
+            </a:pPr>
             <a:r>
               <a:rPr sz="1200" b="0" i="0">
                 <a:solidFill>
@@ -3325,7 +3365,17 @@
           </a:bodyPr>
           <a:lstStyle/>
           <a:p>
-            <a:pPr algn="l"/>
+            <a:pPr algn="l">
+              <a:lnSpc>
+                <a:spcPct val="115000"/>
+              </a:lnSpc>
+              <a:spcBef>
+                <a:spcPts val="0"/>
+              </a:spcBef>
+              <a:spcAft>
+                <a:spcPts val="200"/>
+              </a:spcAft>
+            </a:pPr>
             <a:r>
               <a:rPr sz="1400" b="1" i="0">
                 <a:solidFill>
@@ -3464,7 +3514,17 @@
           </a:bodyPr>
           <a:lstStyle/>
           <a:p>
-            <a:pPr algn="l"/>
+            <a:pPr algn="l">
+              <a:lnSpc>
+                <a:spcPct val="115000"/>
+              </a:lnSpc>
+              <a:spcBef>
+                <a:spcPts val="0"/>
+              </a:spcBef>
+              <a:spcAft>
+                <a:spcPts val="200"/>
+              </a:spcAft>
+            </a:pPr>
             <a:r>
               <a:rPr sz="1100" b="1" i="0">
                 <a:solidFill>
@@ -3499,7 +3559,17 @@
           </a:bodyPr>
           <a:lstStyle/>
           <a:p>
-            <a:pPr algn="l"/>
+            <a:pPr algn="l">
+              <a:lnSpc>
+                <a:spcPct val="115000"/>
+              </a:lnSpc>
+              <a:spcBef>
+                <a:spcPts val="0"/>
+              </a:spcBef>
+              <a:spcAft>
+                <a:spcPts val="200"/>
+              </a:spcAft>
+            </a:pPr>
             <a:r>
               <a:rPr sz="2400" b="1" i="0">
                 <a:solidFill>
@@ -3534,17 +3604,69 @@
           </a:bodyPr>
           <a:lstStyle/>
           <a:p>
-            <a:pPr algn="l"/>
-            <a:r>
-              <a:rPr sz="1800" b="0" i="0">
+            <a:pPr algn="l">
+              <a:lnSpc>
+                <a:spcPct val="128000"/>
+              </a:lnSpc>
+              <a:spcBef>
+                <a:spcPts val="0"/>
+              </a:spcBef>
+              <a:spcAft>
+                <a:spcPts val="1400"/>
+              </a:spcAft>
+            </a:pPr>
+            <a:r>
+              <a:rPr sz="2600" b="0" i="0">
                 <a:solidFill>
                   <a:srgbClr val="1E2F38"/>
                 </a:solidFill>
                 <a:latin typeface="Calibri"/>
               </a:rPr>
-              <a:t>FairBanks = medical centre + outreach + CHWs + FCHIP intelligence
-30 hours · women builders · Kampala · UICT Nakawa
-We provide problem statements, sample schemas, and mentor hours.</a:t>
+              <a:t>FairBanks = medical centre + outreach + CHWs + FCHIP intelligence</a:t>
+            </a:r>
+          </a:p>
+          <a:p>
+            <a:pPr algn="l">
+              <a:lnSpc>
+                <a:spcPct val="128000"/>
+              </a:lnSpc>
+              <a:spcBef>
+                <a:spcPts val="0"/>
+              </a:spcBef>
+              <a:spcAft>
+                <a:spcPts val="1400"/>
+              </a:spcAft>
+            </a:pPr>
+            <a:r>
+              <a:rPr sz="2600" b="0" i="0">
+                <a:solidFill>
+                  <a:srgbClr val="1E2F38"/>
+                </a:solidFill>
+                <a:latin typeface="Calibri"/>
+              </a:rPr>
+              <a:t>30 hours · women builders · Kampala · UICT Nakawa</a:t>
+            </a:r>
+          </a:p>
+          <a:p>
+            <a:pPr algn="l">
+              <a:lnSpc>
+                <a:spcPct val="128000"/>
+              </a:lnSpc>
+              <a:spcBef>
+                <a:spcPts val="0"/>
+              </a:spcBef>
+              <a:spcAft>
+                <a:spcPts val="200"/>
+              </a:spcAft>
+            </a:pPr>
+            <a:r>
+              <a:rPr sz="2600" b="0" i="0">
+                <a:solidFill>
+                  <a:srgbClr val="1E2F38"/>
+                </a:solidFill>
+                <a:latin typeface="Calibri"/>
+              </a:rPr>
+              <a:t>We provide problem statements, sample schemas, and mentor hours.</a:t>
             </a:r>
           </a:p>
         </p:txBody>
@@ -3614,7 +3736,17 @@
           </a:bodyPr>
           <a:lstStyle/>
           <a:p>
-            <a:pPr algn="l"/>
+            <a:pPr algn="l">
+              <a:lnSpc>
+                <a:spcPct val="115000"/>
+              </a:lnSpc>
+              <a:spcBef>
+                <a:spcPts val="0"/>
+              </a:spcBef>
+              <a:spcAft>
+                <a:spcPts val="200"/>
+              </a:spcAft>
+            </a:pPr>
             <a:r>
               <a:rPr sz="900" b="0" i="0">
                 <a:solidFill>
@@ -3649,7 +3781,17 @@
           </a:bodyPr>
           <a:lstStyle/>
           <a:p>
-            <a:pPr algn="r"/>
+            <a:pPr algn="r">
+              <a:lnSpc>
+                <a:spcPct val="115000"/>
+              </a:lnSpc>
+              <a:spcBef>
+                <a:spcPts val="0"/>
+              </a:spcBef>
+              <a:spcAft>
+                <a:spcPts val="200"/>
+              </a:spcAft>
+            </a:pPr>
             <a:r>
               <a:rPr sz="900" b="0" i="0">
                 <a:solidFill>
@@ -3788,7 +3930,17 @@
           </a:bodyPr>
           <a:lstStyle/>
           <a:p>
-            <a:pPr algn="l"/>
+            <a:pPr algn="l">
+              <a:lnSpc>
+                <a:spcPct val="115000"/>
+              </a:lnSpc>
+              <a:spcBef>
+                <a:spcPts val="0"/>
+              </a:spcBef>
+              <a:spcAft>
+                <a:spcPts val="200"/>
+              </a:spcAft>
+            </a:pPr>
             <a:r>
               <a:rPr sz="1100" b="1" i="0">
                 <a:solidFill>
@@ -3823,7 +3975,17 @@
           </a:bodyPr>
           <a:lstStyle/>
           <a:p>
-            <a:pPr algn="l"/>
+            <a:pPr algn="l">
+              <a:lnSpc>
+                <a:spcPct val="115000"/>
+              </a:lnSpc>
+              <a:spcBef>
+                <a:spcPts val="0"/>
+              </a:spcBef>
+              <a:spcAft>
+                <a:spcPts val="200"/>
+              </a:spcAft>
+            </a:pPr>
             <a:r>
               <a:rPr sz="2400" b="1" i="0">
                 <a:solidFill>
@@ -3882,16 +4044,47 @@
           </a:bodyPr>
           <a:lstStyle/>
           <a:p>
-            <a:pPr algn="l"/>
-            <a:r>
-              <a:rPr sz="1600" b="0" i="0">
+            <a:pPr algn="l">
+              <a:lnSpc>
+                <a:spcPct val="128000"/>
+              </a:lnSpc>
+              <a:spcBef>
+                <a:spcPts val="0"/>
+              </a:spcBef>
+              <a:spcAft>
+                <a:spcPts val="1400"/>
+              </a:spcAft>
+            </a:pPr>
+            <a:r>
+              <a:rPr sz="2600" b="0" i="0">
                 <a:solidFill>
                   <a:srgbClr val="3A4A54"/>
                 </a:solidFill>
                 <a:latin typeface="Calibri"/>
               </a:rPr>
-              <a:t>Offline capture → predictions → alerts
-Outbreak · maternal · NCD · child health · stock-outs</a:t>
+              <a:t>Offline capture → predictions → alerts</a:t>
+            </a:r>
+          </a:p>
+          <a:p>
+            <a:pPr algn="l">
+              <a:lnSpc>
+                <a:spcPct val="128000"/>
+              </a:lnSpc>
+              <a:spcBef>
+                <a:spcPts val="0"/>
+              </a:spcBef>
+              <a:spcAft>
+                <a:spcPts val="200"/>
+              </a:spcAft>
+            </a:pPr>
+            <a:r>
+              <a:rPr sz="2600" b="0" i="0">
+                <a:solidFill>
+                  <a:srgbClr val="3A4A54"/>
+                </a:solidFill>
+                <a:latin typeface="Calibri"/>
+              </a:rPr>
+              <a:t>Outbreak · maternal · NCD · child health · stock-outs</a:t>
             </a:r>
           </a:p>
         </p:txBody>
@@ -3961,7 +4154,17 @@
           </a:bodyPr>
           <a:lstStyle/>
           <a:p>
-            <a:pPr algn="l"/>
+            <a:pPr algn="l">
+              <a:lnSpc>
+                <a:spcPct val="115000"/>
+              </a:lnSpc>
+              <a:spcBef>
+                <a:spcPts val="0"/>
+              </a:spcBef>
+              <a:spcAft>
+                <a:spcPts val="200"/>
+              </a:spcAft>
+            </a:pPr>
             <a:r>
               <a:rPr sz="900" b="0" i="0">
                 <a:solidFill>
@@ -3996,7 +4199,17 @@
           </a:bodyPr>
           <a:lstStyle/>
           <a:p>
-            <a:pPr algn="r"/>
+            <a:pPr algn="r">
+              <a:lnSpc>
+                <a:spcPct val="115000"/>
+              </a:lnSpc>
+              <a:spcBef>
+                <a:spcPts val="0"/>
+              </a:spcBef>
+              <a:spcAft>
+                <a:spcPts val="200"/>
+              </a:spcAft>
+            </a:pPr>
             <a:r>
               <a:rPr sz="900" b="0" i="0">
                 <a:solidFill>
@@ -4135,7 +4348,17 @@
           </a:bodyPr>
           <a:lstStyle/>
           <a:p>
-            <a:pPr algn="l"/>
+            <a:pPr algn="l">
+              <a:lnSpc>
+                <a:spcPct val="115000"/>
+              </a:lnSpc>
+              <a:spcBef>
+                <a:spcPts val="0"/>
+              </a:spcBef>
+              <a:spcAft>
+                <a:spcPts val="200"/>
+              </a:spcAft>
+            </a:pPr>
             <a:r>
               <a:rPr sz="1100" b="1" i="0">
                 <a:solidFill>
@@ -4170,7 +4393,17 @@
           </a:bodyPr>
           <a:lstStyle/>
           <a:p>
-            <a:pPr algn="l"/>
+            <a:pPr algn="l">
+              <a:lnSpc>
+                <a:spcPct val="115000"/>
+              </a:lnSpc>
+              <a:spcBef>
+                <a:spcPts val="0"/>
+              </a:spcBef>
+              <a:spcAft>
+                <a:spcPts val="200"/>
+              </a:spcAft>
+            </a:pPr>
             <a:r>
               <a:rPr sz="2400" b="1" i="0">
                 <a:solidFill>
@@ -4229,9 +4462,19 @@
           </a:bodyPr>
           <a:lstStyle/>
           <a:p>
-            <a:pPr algn="l"/>
-            <a:r>
-              <a:rPr sz="1500" b="0" i="0">
+            <a:pPr algn="l">
+              <a:lnSpc>
+                <a:spcPct val="115000"/>
+              </a:lnSpc>
+              <a:spcBef>
+                <a:spcPts val="0"/>
+              </a:spcBef>
+              <a:spcAft>
+                <a:spcPts val="200"/>
+              </a:spcAft>
+            </a:pPr>
+            <a:r>
+              <a:rPr sz="1900" b="0" i="0">
                 <a:solidFill>
                   <a:srgbClr val="1E2F38"/>
                 </a:solidFill>
@@ -4264,7 +4507,17 @@
           </a:bodyPr>
           <a:lstStyle/>
           <a:p>
-            <a:pPr algn="l"/>
+            <a:pPr algn="l">
+              <a:lnSpc>
+                <a:spcPct val="115000"/>
+              </a:lnSpc>
+              <a:spcBef>
+                <a:spcPts val="0"/>
+              </a:spcBef>
+              <a:spcAft>
+                <a:spcPts val="200"/>
+              </a:spcAft>
+            </a:pPr>
             <a:r>
               <a:rPr sz="1300" b="0" i="1">
                 <a:solidFill>
@@ -4342,7 +4595,17 @@
           </a:bodyPr>
           <a:lstStyle/>
           <a:p>
-            <a:pPr algn="l"/>
+            <a:pPr algn="l">
+              <a:lnSpc>
+                <a:spcPct val="115000"/>
+              </a:lnSpc>
+              <a:spcBef>
+                <a:spcPts val="0"/>
+              </a:spcBef>
+              <a:spcAft>
+                <a:spcPts val="200"/>
+              </a:spcAft>
+            </a:pPr>
             <a:r>
               <a:rPr sz="900" b="0" i="0">
                 <a:solidFill>
@@ -4377,7 +4640,17 @@
           </a:bodyPr>
           <a:lstStyle/>
           <a:p>
-            <a:pPr algn="r"/>
+            <a:pPr algn="r">
+              <a:lnSpc>
+                <a:spcPct val="115000"/>
+              </a:lnSpc>
+              <a:spcBef>
+                <a:spcPts val="0"/>
+              </a:spcBef>
+              <a:spcAft>
+                <a:spcPts val="200"/>
+              </a:spcAft>
+            </a:pPr>
             <a:r>
               <a:rPr sz="900" b="0" i="0">
                 <a:solidFill>
@@ -4516,7 +4789,17 @@
           </a:bodyPr>
           <a:lstStyle/>
           <a:p>
-            <a:pPr algn="l"/>
+            <a:pPr algn="l">
+              <a:lnSpc>
+                <a:spcPct val="115000"/>
+              </a:lnSpc>
+              <a:spcBef>
+                <a:spcPts val="0"/>
+              </a:spcBef>
+              <a:spcAft>
+                <a:spcPts val="200"/>
+              </a:spcAft>
+            </a:pPr>
             <a:r>
               <a:rPr sz="1100" b="1" i="0">
                 <a:solidFill>
@@ -4551,7 +4834,17 @@
           </a:bodyPr>
           <a:lstStyle/>
           <a:p>
-            <a:pPr algn="l"/>
+            <a:pPr algn="l">
+              <a:lnSpc>
+                <a:spcPct val="115000"/>
+              </a:lnSpc>
+              <a:spcBef>
+                <a:spcPts val="0"/>
+              </a:spcBef>
+              <a:spcAft>
+                <a:spcPts val="200"/>
+              </a:spcAft>
+            </a:pPr>
             <a:r>
               <a:rPr sz="2400" b="1" i="0">
                 <a:solidFill>
@@ -4610,9 +4903,19 @@
           </a:bodyPr>
           <a:lstStyle/>
           <a:p>
-            <a:pPr algn="l"/>
-            <a:r>
-              <a:rPr sz="1500" b="0" i="0">
+            <a:pPr algn="l">
+              <a:lnSpc>
+                <a:spcPct val="115000"/>
+              </a:lnSpc>
+              <a:spcBef>
+                <a:spcPts val="0"/>
+              </a:spcBef>
+              <a:spcAft>
+                <a:spcPts val="200"/>
+              </a:spcAft>
+            </a:pPr>
+            <a:r>
+              <a:rPr sz="1900" b="0" i="0">
                 <a:solidFill>
                   <a:srgbClr val="1E2F38"/>
                 </a:solidFill>
@@ -4645,7 +4948,17 @@
           </a:bodyPr>
           <a:lstStyle/>
           <a:p>
-            <a:pPr algn="l"/>
+            <a:pPr algn="l">
+              <a:lnSpc>
+                <a:spcPct val="115000"/>
+              </a:lnSpc>
+              <a:spcBef>
+                <a:spcPts val="0"/>
+              </a:spcBef>
+              <a:spcAft>
+                <a:spcPts val="200"/>
+              </a:spcAft>
+            </a:pPr>
             <a:r>
               <a:rPr sz="1300" b="0" i="1">
                 <a:solidFill>
@@ -4723,7 +5036,17 @@
           </a:bodyPr>
           <a:lstStyle/>
           <a:p>
-            <a:pPr algn="l"/>
+            <a:pPr algn="l">
+              <a:lnSpc>
+                <a:spcPct val="115000"/>
+              </a:lnSpc>
+              <a:spcBef>
+                <a:spcPts val="0"/>
+              </a:spcBef>
+              <a:spcAft>
+                <a:spcPts val="200"/>
+              </a:spcAft>
+            </a:pPr>
             <a:r>
               <a:rPr sz="900" b="0" i="0">
                 <a:solidFill>
@@ -4758,7 +5081,17 @@
           </a:bodyPr>
           <a:lstStyle/>
           <a:p>
-            <a:pPr algn="r"/>
+            <a:pPr algn="r">
+              <a:lnSpc>
+                <a:spcPct val="115000"/>
+              </a:lnSpc>
+              <a:spcBef>
+                <a:spcPts val="0"/>
+              </a:spcBef>
+              <a:spcAft>
+                <a:spcPts val="200"/>
+              </a:spcAft>
+            </a:pPr>
             <a:r>
               <a:rPr sz="900" b="0" i="0">
                 <a:solidFill>
@@ -4897,7 +5230,17 @@
           </a:bodyPr>
           <a:lstStyle/>
           <a:p>
-            <a:pPr algn="l"/>
+            <a:pPr algn="l">
+              <a:lnSpc>
+                <a:spcPct val="115000"/>
+              </a:lnSpc>
+              <a:spcBef>
+                <a:spcPts val="0"/>
+              </a:spcBef>
+              <a:spcAft>
+                <a:spcPts val="200"/>
+              </a:spcAft>
+            </a:pPr>
             <a:r>
               <a:rPr sz="1100" b="1" i="0">
                 <a:solidFill>
@@ -4932,7 +5275,17 @@
           </a:bodyPr>
           <a:lstStyle/>
           <a:p>
-            <a:pPr algn="l"/>
+            <a:pPr algn="l">
+              <a:lnSpc>
+                <a:spcPct val="115000"/>
+              </a:lnSpc>
+              <a:spcBef>
+                <a:spcPts val="0"/>
+              </a:spcBef>
+              <a:spcAft>
+                <a:spcPts val="200"/>
+              </a:spcAft>
+            </a:pPr>
             <a:r>
               <a:rPr sz="2400" b="1" i="0">
                 <a:solidFill>
@@ -4991,9 +5344,19 @@
           </a:bodyPr>
           <a:lstStyle/>
           <a:p>
-            <a:pPr algn="l"/>
-            <a:r>
-              <a:rPr sz="1500" b="0" i="0">
+            <a:pPr algn="l">
+              <a:lnSpc>
+                <a:spcPct val="115000"/>
+              </a:lnSpc>
+              <a:spcBef>
+                <a:spcPts val="0"/>
+              </a:spcBef>
+              <a:spcAft>
+                <a:spcPts val="200"/>
+              </a:spcAft>
+            </a:pPr>
+            <a:r>
+              <a:rPr sz="1900" b="0" i="0">
                 <a:solidFill>
                   <a:srgbClr val="1E2F38"/>
                 </a:solidFill>
@@ -5026,7 +5389,17 @@
           </a:bodyPr>
           <a:lstStyle/>
           <a:p>
-            <a:pPr algn="l"/>
+            <a:pPr algn="l">
+              <a:lnSpc>
+                <a:spcPct val="115000"/>
+              </a:lnSpc>
+              <a:spcBef>
+                <a:spcPts val="0"/>
+              </a:spcBef>
+              <a:spcAft>
+                <a:spcPts val="200"/>
+              </a:spcAft>
+            </a:pPr>
             <a:r>
               <a:rPr sz="1300" b="0" i="1">
                 <a:solidFill>
@@ -5104,7 +5477,17 @@
           </a:bodyPr>
           <a:lstStyle/>
           <a:p>
-            <a:pPr algn="l"/>
+            <a:pPr algn="l">
+              <a:lnSpc>
+                <a:spcPct val="115000"/>
+              </a:lnSpc>
+              <a:spcBef>
+                <a:spcPts val="0"/>
+              </a:spcBef>
+              <a:spcAft>
+                <a:spcPts val="200"/>
+              </a:spcAft>
+            </a:pPr>
             <a:r>
               <a:rPr sz="900" b="0" i="0">
                 <a:solidFill>
@@ -5139,7 +5522,17 @@
           </a:bodyPr>
           <a:lstStyle/>
           <a:p>
-            <a:pPr algn="r"/>
+            <a:pPr algn="r">
+              <a:lnSpc>
+                <a:spcPct val="115000"/>
+              </a:lnSpc>
+              <a:spcBef>
+                <a:spcPts val="0"/>
+              </a:spcBef>
+              <a:spcAft>
+                <a:spcPts val="200"/>
+              </a:spcAft>
+            </a:pPr>
             <a:r>
               <a:rPr sz="900" b="0" i="0">
                 <a:solidFill>
@@ -5278,7 +5671,17 @@
           </a:bodyPr>
           <a:lstStyle/>
           <a:p>
-            <a:pPr algn="l"/>
+            <a:pPr algn="l">
+              <a:lnSpc>
+                <a:spcPct val="115000"/>
+              </a:lnSpc>
+              <a:spcBef>
+                <a:spcPts val="0"/>
+              </a:spcBef>
+              <a:spcAft>
+                <a:spcPts val="200"/>
+              </a:spcAft>
+            </a:pPr>
             <a:r>
               <a:rPr sz="1100" b="1" i="0">
                 <a:solidFill>
@@ -5313,7 +5716,17 @@
           </a:bodyPr>
           <a:lstStyle/>
           <a:p>
-            <a:pPr algn="l"/>
+            <a:pPr algn="l">
+              <a:lnSpc>
+                <a:spcPct val="115000"/>
+              </a:lnSpc>
+              <a:spcBef>
+                <a:spcPts val="0"/>
+              </a:spcBef>
+              <a:spcAft>
+                <a:spcPts val="200"/>
+              </a:spcAft>
+            </a:pPr>
             <a:r>
               <a:rPr sz="2400" b="1" i="0">
                 <a:solidFill>
@@ -5393,9 +5806,19 @@
           </a:bodyPr>
           <a:lstStyle/>
           <a:p>
-            <a:pPr algn="l"/>
-            <a:r>
-              <a:rPr sz="1500" b="0" i="0">
+            <a:pPr algn="l">
+              <a:lnSpc>
+                <a:spcPct val="115000"/>
+              </a:lnSpc>
+              <a:spcBef>
+                <a:spcPts val="0"/>
+              </a:spcBef>
+              <a:spcAft>
+                <a:spcPts val="200"/>
+              </a:spcAft>
+            </a:pPr>
+            <a:r>
+              <a:rPr sz="1900" b="0" i="0">
                 <a:solidFill>
                   <a:srgbClr val="1E2F38"/>
                 </a:solidFill>
@@ -5473,9 +5896,19 @@
           </a:bodyPr>
           <a:lstStyle/>
           <a:p>
-            <a:pPr algn="l"/>
-            <a:r>
-              <a:rPr sz="1500" b="0" i="0">
+            <a:pPr algn="l">
+              <a:lnSpc>
+                <a:spcPct val="115000"/>
+              </a:lnSpc>
+              <a:spcBef>
+                <a:spcPts val="0"/>
+              </a:spcBef>
+              <a:spcAft>
+                <a:spcPts val="200"/>
+              </a:spcAft>
+            </a:pPr>
+            <a:r>
+              <a:rPr sz="1900" b="0" i="0">
                 <a:solidFill>
                   <a:srgbClr val="1E2F38"/>
                 </a:solidFill>
@@ -5553,9 +5986,19 @@
           </a:bodyPr>
           <a:lstStyle/>
           <a:p>
-            <a:pPr algn="l"/>
-            <a:r>
-              <a:rPr sz="1500" b="0" i="0">
+            <a:pPr algn="l">
+              <a:lnSpc>
+                <a:spcPct val="115000"/>
+              </a:lnSpc>
+              <a:spcBef>
+                <a:spcPts val="0"/>
+              </a:spcBef>
+              <a:spcAft>
+                <a:spcPts val="200"/>
+              </a:spcAft>
+            </a:pPr>
+            <a:r>
+              <a:rPr sz="1900" b="0" i="0">
                 <a:solidFill>
                   <a:srgbClr val="1E2F38"/>
                 </a:solidFill>
@@ -5633,9 +6076,19 @@
           </a:bodyPr>
           <a:lstStyle/>
           <a:p>
-            <a:pPr algn="l"/>
-            <a:r>
-              <a:rPr sz="1500" b="0" i="0">
+            <a:pPr algn="l">
+              <a:lnSpc>
+                <a:spcPct val="115000"/>
+              </a:lnSpc>
+              <a:spcBef>
+                <a:spcPts val="0"/>
+              </a:spcBef>
+              <a:spcAft>
+                <a:spcPts val="200"/>
+              </a:spcAft>
+            </a:pPr>
+            <a:r>
+              <a:rPr sz="1900" b="0" i="0">
                 <a:solidFill>
                   <a:srgbClr val="1E2F38"/>
                 </a:solidFill>
@@ -5711,7 +6164,17 @@
           </a:bodyPr>
           <a:lstStyle/>
           <a:p>
-            <a:pPr algn="l"/>
+            <a:pPr algn="l">
+              <a:lnSpc>
+                <a:spcPct val="115000"/>
+              </a:lnSpc>
+              <a:spcBef>
+                <a:spcPts val="0"/>
+              </a:spcBef>
+              <a:spcAft>
+                <a:spcPts val="200"/>
+              </a:spcAft>
+            </a:pPr>
             <a:r>
               <a:rPr sz="900" b="0" i="0">
                 <a:solidFill>
@@ -5746,7 +6209,17 @@
           </a:bodyPr>
           <a:lstStyle/>
           <a:p>
-            <a:pPr algn="r"/>
+            <a:pPr algn="r">
+              <a:lnSpc>
+                <a:spcPct val="115000"/>
+              </a:lnSpc>
+              <a:spcBef>
+                <a:spcPts val="0"/>
+              </a:spcBef>
+              <a:spcAft>
+                <a:spcPts val="200"/>
+              </a:spcAft>
+            </a:pPr>
             <a:r>
               <a:rPr sz="900" b="0" i="0">
                 <a:solidFill>
@@ -5885,7 +6358,17 @@
           </a:bodyPr>
           <a:lstStyle/>
           <a:p>
-            <a:pPr algn="l"/>
+            <a:pPr algn="l">
+              <a:lnSpc>
+                <a:spcPct val="115000"/>
+              </a:lnSpc>
+              <a:spcBef>
+                <a:spcPts val="0"/>
+              </a:spcBef>
+              <a:spcAft>
+                <a:spcPts val="200"/>
+              </a:spcAft>
+            </a:pPr>
             <a:r>
               <a:rPr sz="1100" b="1" i="0">
                 <a:solidFill>
@@ -5920,7 +6403,17 @@
           </a:bodyPr>
           <a:lstStyle/>
           <a:p>
-            <a:pPr algn="l"/>
+            <a:pPr algn="l">
+              <a:lnSpc>
+                <a:spcPct val="115000"/>
+              </a:lnSpc>
+              <a:spcBef>
+                <a:spcPts val="0"/>
+              </a:spcBef>
+              <a:spcAft>
+                <a:spcPts val="200"/>
+              </a:spcAft>
+            </a:pPr>
             <a:r>
               <a:rPr sz="2400" b="1" i="0">
                 <a:solidFill>
@@ -5979,18 +6472,91 @@
           </a:bodyPr>
           <a:lstStyle/>
           <a:p>
-            <a:pPr algn="l"/>
-            <a:r>
-              <a:rPr sz="1600" b="0" i="0">
+            <a:pPr algn="l">
+              <a:lnSpc>
+                <a:spcPct val="128000"/>
+              </a:lnSpc>
+              <a:spcBef>
+                <a:spcPts val="0"/>
+              </a:spcBef>
+              <a:spcAft>
+                <a:spcPts val="1400"/>
+              </a:spcAft>
+            </a:pPr>
+            <a:r>
+              <a:rPr sz="2600" b="0" i="0">
                 <a:solidFill>
                   <a:srgbClr val="1E2F38"/>
                 </a:solidFill>
                 <a:latin typeface="Calibri"/>
               </a:rPr>
-              <a:t>• Real community health problem statements grounded in Kampala outreach
-• Mentorship from an operating medical centre — not a fictional case study
-• Portfolio project with social impact narrative for jobs and investors
-• Visibility with FairBanks partners in maternal, adolescent, and NCD work</a:t>
+              <a:t>• Real community health problem statements grounded in Kampala outreach</a:t>
+            </a:r>
+          </a:p>
+          <a:p>
+            <a:pPr algn="l">
+              <a:lnSpc>
+                <a:spcPct val="128000"/>
+              </a:lnSpc>
+              <a:spcBef>
+                <a:spcPts val="0"/>
+              </a:spcBef>
+              <a:spcAft>
+                <a:spcPts val="1400"/>
+              </a:spcAft>
+            </a:pPr>
+            <a:r>
+              <a:rPr sz="2600" b="0" i="0">
+                <a:solidFill>
+                  <a:srgbClr val="1E2F38"/>
+                </a:solidFill>
+                <a:latin typeface="Calibri"/>
+              </a:rPr>
+              <a:t>• Mentorship from an operating medical centre — not a fictional case study</a:t>
+            </a:r>
+          </a:p>
+          <a:p>
+            <a:pPr algn="l">
+              <a:lnSpc>
+                <a:spcPct val="128000"/>
+              </a:lnSpc>
+              <a:spcBef>
+                <a:spcPts val="0"/>
+              </a:spcBef>
+              <a:spcAft>
+                <a:spcPts val="1400"/>
+              </a:spcAft>
+            </a:pPr>
+            <a:r>
+              <a:rPr sz="2600" b="0" i="0">
+                <a:solidFill>
+                  <a:srgbClr val="1E2F38"/>
+                </a:solidFill>
+                <a:latin typeface="Calibri"/>
+              </a:rPr>
+              <a:t>• Portfolio project with social impact narrative for jobs and investors</a:t>
+            </a:r>
+          </a:p>
+          <a:p>
+            <a:pPr algn="l">
+              <a:lnSpc>
+                <a:spcPct val="128000"/>
+              </a:lnSpc>
+              <a:spcBef>
+                <a:spcPts val="0"/>
+              </a:spcBef>
+              <a:spcAft>
+                <a:spcPts val="200"/>
+              </a:spcAft>
+            </a:pPr>
+            <a:r>
+              <a:rPr sz="2600" b="0" i="0">
+                <a:solidFill>
+                  <a:srgbClr val="1E2F38"/>
+                </a:solidFill>
+                <a:latin typeface="Calibri"/>
+              </a:rPr>
+              <a:t>• Visibility with FairBanks partners in maternal, adolescent, and NCD work</a:t>
             </a:r>
           </a:p>
         </p:txBody>
@@ -6060,7 +6626,17 @@
           </a:bodyPr>
           <a:lstStyle/>
           <a:p>
-            <a:pPr algn="l"/>
+            <a:pPr algn="l">
+              <a:lnSpc>
+                <a:spcPct val="115000"/>
+              </a:lnSpc>
+              <a:spcBef>
+                <a:spcPts val="0"/>
+              </a:spcBef>
+              <a:spcAft>
+                <a:spcPts val="200"/>
+              </a:spcAft>
+            </a:pPr>
             <a:r>
               <a:rPr sz="900" b="0" i="0">
                 <a:solidFill>
@@ -6095,7 +6671,17 @@
           </a:bodyPr>
           <a:lstStyle/>
           <a:p>
-            <a:pPr algn="r"/>
+            <a:pPr algn="r">
+              <a:lnSpc>
+                <a:spcPct val="115000"/>
+              </a:lnSpc>
+              <a:spcBef>
+                <a:spcPts val="0"/>
+              </a:spcBef>
+              <a:spcAft>
+                <a:spcPts val="200"/>
+              </a:spcAft>
+            </a:pPr>
             <a:r>
               <a:rPr sz="900" b="0" i="0">
                 <a:solidFill>
@@ -6215,7 +6801,17 @@
           </a:bodyPr>
           <a:lstStyle/>
           <a:p>
-            <a:pPr algn="l"/>
+            <a:pPr algn="l">
+              <a:lnSpc>
+                <a:spcPct val="115000"/>
+              </a:lnSpc>
+              <a:spcBef>
+                <a:spcPts val="0"/>
+              </a:spcBef>
+              <a:spcAft>
+                <a:spcPts val="200"/>
+              </a:spcAft>
+            </a:pPr>
             <a:r>
               <a:rPr sz="2400" b="1" i="0">
                 <a:solidFill>
@@ -6250,7 +6846,17 @@
           </a:bodyPr>
           <a:lstStyle/>
           <a:p>
-            <a:pPr algn="l"/>
+            <a:pPr algn="l">
+              <a:lnSpc>
+                <a:spcPct val="115000"/>
+              </a:lnSpc>
+              <a:spcBef>
+                <a:spcPts val="0"/>
+              </a:spcBef>
+              <a:spcAft>
+                <a:spcPts val="200"/>
+              </a:spcAft>
+            </a:pPr>
             <a:r>
               <a:rPr sz="1400" b="1" i="0">
                 <a:solidFill>

--- a/applications/girlcode/documents/girlcode_ppt.pptx
+++ b/applications/girlcode/documents/girlcode_ppt.pptx
@@ -3393,6 +3393,96 @@
   <p:clrMapOvr>
     <a:masterClrMapping/>
   </p:clrMapOvr>
+  <p:timing>
+    <p:tnLst>
+      <p:par>
+        <p:cTn id="1" dur="indefinite" restart="never" nodeType="tmRoot">
+          <p:childTnLst>
+            <p:seq concurrent="true" nextAc="seek">
+              <p:cTn id="2" dur="indefinite" nodeType="mainSeq">
+                <p:childTnLst>
+                  <p:par>
+                    <p:cTn id="9" fill="hold">
+                      <p:stCondLst>
+                        <p:cond delay="0"/>
+                      </p:stCondLst>
+                      <p:childTnLst>
+                        <p:par>
+                          <p:cTn id="3" presetID="10" presetClass="entr" presetSubtype="0" fill="hold" nodeType="withEffect">
+                            <p:stCondLst>
+                              <p:cond delay="0"/>
+                            </p:stCondLst>
+                            <p:childTnLst>
+                              <p:animEffect transition="in" filter="fade">
+                                <p:cBhvr>
+                                  <p:cTn id="4" dur="450"/>
+                                  <p:tgtEl>
+                                    <p:spTgt spid="2"/>
+                                  </p:tgtEl>
+                                </p:cBhvr>
+                              </p:animEffect>
+                            </p:childTnLst>
+                          </p:cTn>
+                        </p:par>
+                        <p:par>
+                          <p:cTn id="5" presetID="10" presetClass="entr" presetSubtype="0" fill="hold" nodeType="withEffect">
+                            <p:stCondLst>
+                              <p:cond delay="200"/>
+                            </p:stCondLst>
+                            <p:childTnLst>
+                              <p:animEffect transition="in" filter="fade">
+                                <p:cBhvr>
+                                  <p:cTn id="6" dur="450"/>
+                                  <p:tgtEl>
+                                    <p:spTgt spid="3"/>
+                                  </p:tgtEl>
+                                </p:cBhvr>
+                              </p:animEffect>
+                            </p:childTnLst>
+                          </p:cTn>
+                        </p:par>
+                        <p:par>
+                          <p:cTn id="7" presetID="10" presetClass="entr" presetSubtype="0" fill="hold" nodeType="withEffect">
+                            <p:stCondLst>
+                              <p:cond delay="200"/>
+                            </p:stCondLst>
+                            <p:childTnLst>
+                              <p:animEffect transition="in" filter="fade">
+                                <p:cBhvr>
+                                  <p:cTn id="8" dur="450"/>
+                                  <p:tgtEl>
+                                    <p:spTgt spid="4"/>
+                                  </p:tgtEl>
+                                </p:cBhvr>
+                              </p:animEffect>
+                            </p:childTnLst>
+                          </p:cTn>
+                        </p:par>
+                      </p:childTnLst>
+                    </p:cTn>
+                  </p:par>
+                </p:childTnLst>
+              </p:cTn>
+              <p:prevCondLst>
+                <p:cond evt="onPrev" delay="0">
+                  <p:tgtEl>
+                    <p:sldTgt/>
+                  </p:tgtEl>
+                </p:cond>
+              </p:prevCondLst>
+              <p:nextCondLst>
+                <p:cond evt="onNext" delay="0">
+                  <p:tgtEl>
+                    <p:sldTgt/>
+                  </p:tgtEl>
+                </p:cond>
+              </p:nextCondLst>
+            </p:seq>
+          </p:childTnLst>
+        </p:cTn>
+      </p:par>
+    </p:tnLst>
+  </p:timing>
 </p:sld>
 </file>
 
@@ -3809,6 +3899,96 @@
   <p:clrMapOvr>
     <a:masterClrMapping/>
   </p:clrMapOvr>
+  <p:timing>
+    <p:tnLst>
+      <p:par>
+        <p:cTn id="1" dur="indefinite" restart="never" nodeType="tmRoot">
+          <p:childTnLst>
+            <p:seq concurrent="true" nextAc="seek">
+              <p:cTn id="2" dur="indefinite" nodeType="mainSeq">
+                <p:childTnLst>
+                  <p:par>
+                    <p:cTn id="9" fill="hold">
+                      <p:stCondLst>
+                        <p:cond delay="0"/>
+                      </p:stCondLst>
+                      <p:childTnLst>
+                        <p:par>
+                          <p:cTn id="3" presetID="10" presetClass="entr" presetSubtype="0" fill="hold" nodeType="withEffect">
+                            <p:stCondLst>
+                              <p:cond delay="0"/>
+                            </p:stCondLst>
+                            <p:childTnLst>
+                              <p:animEffect transition="in" filter="fade">
+                                <p:cBhvr>
+                                  <p:cTn id="4" dur="450"/>
+                                  <p:tgtEl>
+                                    <p:spTgt spid="2"/>
+                                  </p:tgtEl>
+                                </p:cBhvr>
+                              </p:animEffect>
+                            </p:childTnLst>
+                          </p:cTn>
+                        </p:par>
+                        <p:par>
+                          <p:cTn id="5" presetID="10" presetClass="entr" presetSubtype="0" fill="hold" nodeType="withEffect">
+                            <p:stCondLst>
+                              <p:cond delay="200"/>
+                            </p:stCondLst>
+                            <p:childTnLst>
+                              <p:animEffect transition="in" filter="fade">
+                                <p:cBhvr>
+                                  <p:cTn id="6" dur="450"/>
+                                  <p:tgtEl>
+                                    <p:spTgt spid="3"/>
+                                  </p:tgtEl>
+                                </p:cBhvr>
+                              </p:animEffect>
+                            </p:childTnLst>
+                          </p:cTn>
+                        </p:par>
+                        <p:par>
+                          <p:cTn id="7" presetID="10" presetClass="entr" presetSubtype="0" fill="hold" nodeType="withEffect">
+                            <p:stCondLst>
+                              <p:cond delay="200"/>
+                            </p:stCondLst>
+                            <p:childTnLst>
+                              <p:animEffect transition="in" filter="fade">
+                                <p:cBhvr>
+                                  <p:cTn id="8" dur="450"/>
+                                  <p:tgtEl>
+                                    <p:spTgt spid="4"/>
+                                  </p:tgtEl>
+                                </p:cBhvr>
+                              </p:animEffect>
+                            </p:childTnLst>
+                          </p:cTn>
+                        </p:par>
+                      </p:childTnLst>
+                    </p:cTn>
+                  </p:par>
+                </p:childTnLst>
+              </p:cTn>
+              <p:prevCondLst>
+                <p:cond evt="onPrev" delay="0">
+                  <p:tgtEl>
+                    <p:sldTgt/>
+                  </p:tgtEl>
+                </p:cond>
+              </p:prevCondLst>
+              <p:nextCondLst>
+                <p:cond evt="onNext" delay="0">
+                  <p:tgtEl>
+                    <p:sldTgt/>
+                  </p:tgtEl>
+                </p:cond>
+              </p:nextCondLst>
+            </p:seq>
+          </p:childTnLst>
+        </p:cTn>
+      </p:par>
+    </p:tnLst>
+  </p:timing>
 </p:sld>
 </file>
 
@@ -4227,6 +4407,96 @@
   <p:clrMapOvr>
     <a:masterClrMapping/>
   </p:clrMapOvr>
+  <p:timing>
+    <p:tnLst>
+      <p:par>
+        <p:cTn id="1" dur="indefinite" restart="never" nodeType="tmRoot">
+          <p:childTnLst>
+            <p:seq concurrent="true" nextAc="seek">
+              <p:cTn id="2" dur="indefinite" nodeType="mainSeq">
+                <p:childTnLst>
+                  <p:par>
+                    <p:cTn id="9" fill="hold">
+                      <p:stCondLst>
+                        <p:cond delay="0"/>
+                      </p:stCondLst>
+                      <p:childTnLst>
+                        <p:par>
+                          <p:cTn id="3" presetID="10" presetClass="entr" presetSubtype="0" fill="hold" nodeType="withEffect">
+                            <p:stCondLst>
+                              <p:cond delay="0"/>
+                            </p:stCondLst>
+                            <p:childTnLst>
+                              <p:animEffect transition="in" filter="fade">
+                                <p:cBhvr>
+                                  <p:cTn id="4" dur="450"/>
+                                  <p:tgtEl>
+                                    <p:spTgt spid="2"/>
+                                  </p:tgtEl>
+                                </p:cBhvr>
+                              </p:animEffect>
+                            </p:childTnLst>
+                          </p:cTn>
+                        </p:par>
+                        <p:par>
+                          <p:cTn id="5" presetID="10" presetClass="entr" presetSubtype="0" fill="hold" nodeType="withEffect">
+                            <p:stCondLst>
+                              <p:cond delay="200"/>
+                            </p:stCondLst>
+                            <p:childTnLst>
+                              <p:animEffect transition="in" filter="fade">
+                                <p:cBhvr>
+                                  <p:cTn id="6" dur="450"/>
+                                  <p:tgtEl>
+                                    <p:spTgt spid="3"/>
+                                  </p:tgtEl>
+                                </p:cBhvr>
+                              </p:animEffect>
+                            </p:childTnLst>
+                          </p:cTn>
+                        </p:par>
+                        <p:par>
+                          <p:cTn id="7" presetID="10" presetClass="entr" presetSubtype="0" fill="hold" nodeType="withEffect">
+                            <p:stCondLst>
+                              <p:cond delay="200"/>
+                            </p:stCondLst>
+                            <p:childTnLst>
+                              <p:animEffect transition="in" filter="fade">
+                                <p:cBhvr>
+                                  <p:cTn id="8" dur="450"/>
+                                  <p:tgtEl>
+                                    <p:spTgt spid="4"/>
+                                  </p:tgtEl>
+                                </p:cBhvr>
+                              </p:animEffect>
+                            </p:childTnLst>
+                          </p:cTn>
+                        </p:par>
+                      </p:childTnLst>
+                    </p:cTn>
+                  </p:par>
+                </p:childTnLst>
+              </p:cTn>
+              <p:prevCondLst>
+                <p:cond evt="onPrev" delay="0">
+                  <p:tgtEl>
+                    <p:sldTgt/>
+                  </p:tgtEl>
+                </p:cond>
+              </p:prevCondLst>
+              <p:nextCondLst>
+                <p:cond evt="onNext" delay="0">
+                  <p:tgtEl>
+                    <p:sldTgt/>
+                  </p:tgtEl>
+                </p:cond>
+              </p:nextCondLst>
+            </p:seq>
+          </p:childTnLst>
+        </p:cTn>
+      </p:par>
+    </p:tnLst>
+  </p:timing>
 </p:sld>
 </file>
 
@@ -4668,6 +4938,96 @@
   <p:clrMapOvr>
     <a:masterClrMapping/>
   </p:clrMapOvr>
+  <p:timing>
+    <p:tnLst>
+      <p:par>
+        <p:cTn id="1" dur="indefinite" restart="never" nodeType="tmRoot">
+          <p:childTnLst>
+            <p:seq concurrent="true" nextAc="seek">
+              <p:cTn id="2" dur="indefinite" nodeType="mainSeq">
+                <p:childTnLst>
+                  <p:par>
+                    <p:cTn id="9" fill="hold">
+                      <p:stCondLst>
+                        <p:cond delay="0"/>
+                      </p:stCondLst>
+                      <p:childTnLst>
+                        <p:par>
+                          <p:cTn id="3" presetID="10" presetClass="entr" presetSubtype="0" fill="hold" nodeType="withEffect">
+                            <p:stCondLst>
+                              <p:cond delay="0"/>
+                            </p:stCondLst>
+                            <p:childTnLst>
+                              <p:animEffect transition="in" filter="fade">
+                                <p:cBhvr>
+                                  <p:cTn id="4" dur="450"/>
+                                  <p:tgtEl>
+                                    <p:spTgt spid="2"/>
+                                  </p:tgtEl>
+                                </p:cBhvr>
+                              </p:animEffect>
+                            </p:childTnLst>
+                          </p:cTn>
+                        </p:par>
+                        <p:par>
+                          <p:cTn id="5" presetID="10" presetClass="entr" presetSubtype="0" fill="hold" nodeType="withEffect">
+                            <p:stCondLst>
+                              <p:cond delay="200"/>
+                            </p:stCondLst>
+                            <p:childTnLst>
+                              <p:animEffect transition="in" filter="fade">
+                                <p:cBhvr>
+                                  <p:cTn id="6" dur="450"/>
+                                  <p:tgtEl>
+                                    <p:spTgt spid="3"/>
+                                  </p:tgtEl>
+                                </p:cBhvr>
+                              </p:animEffect>
+                            </p:childTnLst>
+                          </p:cTn>
+                        </p:par>
+                        <p:par>
+                          <p:cTn id="7" presetID="10" presetClass="entr" presetSubtype="0" fill="hold" nodeType="withEffect">
+                            <p:stCondLst>
+                              <p:cond delay="200"/>
+                            </p:stCondLst>
+                            <p:childTnLst>
+                              <p:animEffect transition="in" filter="fade">
+                                <p:cBhvr>
+                                  <p:cTn id="8" dur="450"/>
+                                  <p:tgtEl>
+                                    <p:spTgt spid="4"/>
+                                  </p:tgtEl>
+                                </p:cBhvr>
+                              </p:animEffect>
+                            </p:childTnLst>
+                          </p:cTn>
+                        </p:par>
+                      </p:childTnLst>
+                    </p:cTn>
+                  </p:par>
+                </p:childTnLst>
+              </p:cTn>
+              <p:prevCondLst>
+                <p:cond evt="onPrev" delay="0">
+                  <p:tgtEl>
+                    <p:sldTgt/>
+                  </p:tgtEl>
+                </p:cond>
+              </p:prevCondLst>
+              <p:nextCondLst>
+                <p:cond evt="onNext" delay="0">
+                  <p:tgtEl>
+                    <p:sldTgt/>
+                  </p:tgtEl>
+                </p:cond>
+              </p:nextCondLst>
+            </p:seq>
+          </p:childTnLst>
+        </p:cTn>
+      </p:par>
+    </p:tnLst>
+  </p:timing>
 </p:sld>
 </file>
 
@@ -5109,6 +5469,96 @@
   <p:clrMapOvr>
     <a:masterClrMapping/>
   </p:clrMapOvr>
+  <p:timing>
+    <p:tnLst>
+      <p:par>
+        <p:cTn id="1" dur="indefinite" restart="never" nodeType="tmRoot">
+          <p:childTnLst>
+            <p:seq concurrent="true" nextAc="seek">
+              <p:cTn id="2" dur="indefinite" nodeType="mainSeq">
+                <p:childTnLst>
+                  <p:par>
+                    <p:cTn id="9" fill="hold">
+                      <p:stCondLst>
+                        <p:cond delay="0"/>
+                      </p:stCondLst>
+                      <p:childTnLst>
+                        <p:par>
+                          <p:cTn id="3" presetID="10" presetClass="entr" presetSubtype="0" fill="hold" nodeType="withEffect">
+                            <p:stCondLst>
+                              <p:cond delay="0"/>
+                            </p:stCondLst>
+                            <p:childTnLst>
+                              <p:animEffect transition="in" filter="fade">
+                                <p:cBhvr>
+                                  <p:cTn id="4" dur="450"/>
+                                  <p:tgtEl>
+                                    <p:spTgt spid="2"/>
+                                  </p:tgtEl>
+                                </p:cBhvr>
+                              </p:animEffect>
+                            </p:childTnLst>
+                          </p:cTn>
+                        </p:par>
+                        <p:par>
+                          <p:cTn id="5" presetID="10" presetClass="entr" presetSubtype="0" fill="hold" nodeType="withEffect">
+                            <p:stCondLst>
+                              <p:cond delay="200"/>
+                            </p:stCondLst>
+                            <p:childTnLst>
+                              <p:animEffect transition="in" filter="fade">
+                                <p:cBhvr>
+                                  <p:cTn id="6" dur="450"/>
+                                  <p:tgtEl>
+                                    <p:spTgt spid="3"/>
+                                  </p:tgtEl>
+                                </p:cBhvr>
+                              </p:animEffect>
+                            </p:childTnLst>
+                          </p:cTn>
+                        </p:par>
+                        <p:par>
+                          <p:cTn id="7" presetID="10" presetClass="entr" presetSubtype="0" fill="hold" nodeType="withEffect">
+                            <p:stCondLst>
+                              <p:cond delay="200"/>
+                            </p:stCondLst>
+                            <p:childTnLst>
+                              <p:animEffect transition="in" filter="fade">
+                                <p:cBhvr>
+                                  <p:cTn id="8" dur="450"/>
+                                  <p:tgtEl>
+                                    <p:spTgt spid="4"/>
+                                  </p:tgtEl>
+                                </p:cBhvr>
+                              </p:animEffect>
+                            </p:childTnLst>
+                          </p:cTn>
+                        </p:par>
+                      </p:childTnLst>
+                    </p:cTn>
+                  </p:par>
+                </p:childTnLst>
+              </p:cTn>
+              <p:prevCondLst>
+                <p:cond evt="onPrev" delay="0">
+                  <p:tgtEl>
+                    <p:sldTgt/>
+                  </p:tgtEl>
+                </p:cond>
+              </p:prevCondLst>
+              <p:nextCondLst>
+                <p:cond evt="onNext" delay="0">
+                  <p:tgtEl>
+                    <p:sldTgt/>
+                  </p:tgtEl>
+                </p:cond>
+              </p:nextCondLst>
+            </p:seq>
+          </p:childTnLst>
+        </p:cTn>
+      </p:par>
+    </p:tnLst>
+  </p:timing>
 </p:sld>
 </file>
 
@@ -5550,6 +6000,96 @@
   <p:clrMapOvr>
     <a:masterClrMapping/>
   </p:clrMapOvr>
+  <p:timing>
+    <p:tnLst>
+      <p:par>
+        <p:cTn id="1" dur="indefinite" restart="never" nodeType="tmRoot">
+          <p:childTnLst>
+            <p:seq concurrent="true" nextAc="seek">
+              <p:cTn id="2" dur="indefinite" nodeType="mainSeq">
+                <p:childTnLst>
+                  <p:par>
+                    <p:cTn id="9" fill="hold">
+                      <p:stCondLst>
+                        <p:cond delay="0"/>
+                      </p:stCondLst>
+                      <p:childTnLst>
+                        <p:par>
+                          <p:cTn id="3" presetID="10" presetClass="entr" presetSubtype="0" fill="hold" nodeType="withEffect">
+                            <p:stCondLst>
+                              <p:cond delay="0"/>
+                            </p:stCondLst>
+                            <p:childTnLst>
+                              <p:animEffect transition="in" filter="fade">
+                                <p:cBhvr>
+                                  <p:cTn id="4" dur="450"/>
+                                  <p:tgtEl>
+                                    <p:spTgt spid="2"/>
+                                  </p:tgtEl>
+                                </p:cBhvr>
+                              </p:animEffect>
+                            </p:childTnLst>
+                          </p:cTn>
+                        </p:par>
+                        <p:par>
+                          <p:cTn id="5" presetID="10" presetClass="entr" presetSubtype="0" fill="hold" nodeType="withEffect">
+                            <p:stCondLst>
+                              <p:cond delay="200"/>
+                            </p:stCondLst>
+                            <p:childTnLst>
+                              <p:animEffect transition="in" filter="fade">
+                                <p:cBhvr>
+                                  <p:cTn id="6" dur="450"/>
+                                  <p:tgtEl>
+                                    <p:spTgt spid="3"/>
+                                  </p:tgtEl>
+                                </p:cBhvr>
+                              </p:animEffect>
+                            </p:childTnLst>
+                          </p:cTn>
+                        </p:par>
+                        <p:par>
+                          <p:cTn id="7" presetID="10" presetClass="entr" presetSubtype="0" fill="hold" nodeType="withEffect">
+                            <p:stCondLst>
+                              <p:cond delay="200"/>
+                            </p:stCondLst>
+                            <p:childTnLst>
+                              <p:animEffect transition="in" filter="fade">
+                                <p:cBhvr>
+                                  <p:cTn id="8" dur="450"/>
+                                  <p:tgtEl>
+                                    <p:spTgt spid="4"/>
+                                  </p:tgtEl>
+                                </p:cBhvr>
+                              </p:animEffect>
+                            </p:childTnLst>
+                          </p:cTn>
+                        </p:par>
+                      </p:childTnLst>
+                    </p:cTn>
+                  </p:par>
+                </p:childTnLst>
+              </p:cTn>
+              <p:prevCondLst>
+                <p:cond evt="onPrev" delay="0">
+                  <p:tgtEl>
+                    <p:sldTgt/>
+                  </p:tgtEl>
+                </p:cond>
+              </p:prevCondLst>
+              <p:nextCondLst>
+                <p:cond evt="onNext" delay="0">
+                  <p:tgtEl>
+                    <p:sldTgt/>
+                  </p:tgtEl>
+                </p:cond>
+              </p:nextCondLst>
+            </p:seq>
+          </p:childTnLst>
+        </p:cTn>
+      </p:par>
+    </p:tnLst>
+  </p:timing>
 </p:sld>
 </file>
 
@@ -6237,6 +6777,96 @@
   <p:clrMapOvr>
     <a:masterClrMapping/>
   </p:clrMapOvr>
+  <p:timing>
+    <p:tnLst>
+      <p:par>
+        <p:cTn id="1" dur="indefinite" restart="never" nodeType="tmRoot">
+          <p:childTnLst>
+            <p:seq concurrent="true" nextAc="seek">
+              <p:cTn id="2" dur="indefinite" nodeType="mainSeq">
+                <p:childTnLst>
+                  <p:par>
+                    <p:cTn id="9" fill="hold">
+                      <p:stCondLst>
+                        <p:cond delay="0"/>
+                      </p:stCondLst>
+                      <p:childTnLst>
+                        <p:par>
+                          <p:cTn id="3" presetID="10" presetClass="entr" presetSubtype="0" fill="hold" nodeType="withEffect">
+                            <p:stCondLst>
+                              <p:cond delay="0"/>
+                            </p:stCondLst>
+                            <p:childTnLst>
+                              <p:animEffect transition="in" filter="fade">
+                                <p:cBhvr>
+                                  <p:cTn id="4" dur="450"/>
+                                  <p:tgtEl>
+                                    <p:spTgt spid="2"/>
+                                  </p:tgtEl>
+                                </p:cBhvr>
+                              </p:animEffect>
+                            </p:childTnLst>
+                          </p:cTn>
+                        </p:par>
+                        <p:par>
+                          <p:cTn id="5" presetID="10" presetClass="entr" presetSubtype="0" fill="hold" nodeType="withEffect">
+                            <p:stCondLst>
+                              <p:cond delay="200"/>
+                            </p:stCondLst>
+                            <p:childTnLst>
+                              <p:animEffect transition="in" filter="fade">
+                                <p:cBhvr>
+                                  <p:cTn id="6" dur="450"/>
+                                  <p:tgtEl>
+                                    <p:spTgt spid="3"/>
+                                  </p:tgtEl>
+                                </p:cBhvr>
+                              </p:animEffect>
+                            </p:childTnLst>
+                          </p:cTn>
+                        </p:par>
+                        <p:par>
+                          <p:cTn id="7" presetID="10" presetClass="entr" presetSubtype="0" fill="hold" nodeType="withEffect">
+                            <p:stCondLst>
+                              <p:cond delay="200"/>
+                            </p:stCondLst>
+                            <p:childTnLst>
+                              <p:animEffect transition="in" filter="fade">
+                                <p:cBhvr>
+                                  <p:cTn id="8" dur="450"/>
+                                  <p:tgtEl>
+                                    <p:spTgt spid="4"/>
+                                  </p:tgtEl>
+                                </p:cBhvr>
+                              </p:animEffect>
+                            </p:childTnLst>
+                          </p:cTn>
+                        </p:par>
+                      </p:childTnLst>
+                    </p:cTn>
+                  </p:par>
+                </p:childTnLst>
+              </p:cTn>
+              <p:prevCondLst>
+                <p:cond evt="onPrev" delay="0">
+                  <p:tgtEl>
+                    <p:sldTgt/>
+                  </p:tgtEl>
+                </p:cond>
+              </p:prevCondLst>
+              <p:nextCondLst>
+                <p:cond evt="onNext" delay="0">
+                  <p:tgtEl>
+                    <p:sldTgt/>
+                  </p:tgtEl>
+                </p:cond>
+              </p:nextCondLst>
+            </p:seq>
+          </p:childTnLst>
+        </p:cTn>
+      </p:par>
+    </p:tnLst>
+  </p:timing>
 </p:sld>
 </file>
 
@@ -6699,6 +7329,96 @@
   <p:clrMapOvr>
     <a:masterClrMapping/>
   </p:clrMapOvr>
+  <p:timing>
+    <p:tnLst>
+      <p:par>
+        <p:cTn id="1" dur="indefinite" restart="never" nodeType="tmRoot">
+          <p:childTnLst>
+            <p:seq concurrent="true" nextAc="seek">
+              <p:cTn id="2" dur="indefinite" nodeType="mainSeq">
+                <p:childTnLst>
+                  <p:par>
+                    <p:cTn id="9" fill="hold">
+                      <p:stCondLst>
+                        <p:cond delay="0"/>
+                      </p:stCondLst>
+                      <p:childTnLst>
+                        <p:par>
+                          <p:cTn id="3" presetID="10" presetClass="entr" presetSubtype="0" fill="hold" nodeType="withEffect">
+                            <p:stCondLst>
+                              <p:cond delay="0"/>
+                            </p:stCondLst>
+                            <p:childTnLst>
+                              <p:animEffect transition="in" filter="fade">
+                                <p:cBhvr>
+                                  <p:cTn id="4" dur="450"/>
+                                  <p:tgtEl>
+                                    <p:spTgt spid="2"/>
+                                  </p:tgtEl>
+                                </p:cBhvr>
+                              </p:animEffect>
+                            </p:childTnLst>
+                          </p:cTn>
+                        </p:par>
+                        <p:par>
+                          <p:cTn id="5" presetID="10" presetClass="entr" presetSubtype="0" fill="hold" nodeType="withEffect">
+                            <p:stCondLst>
+                              <p:cond delay="200"/>
+                            </p:stCondLst>
+                            <p:childTnLst>
+                              <p:animEffect transition="in" filter="fade">
+                                <p:cBhvr>
+                                  <p:cTn id="6" dur="450"/>
+                                  <p:tgtEl>
+                                    <p:spTgt spid="3"/>
+                                  </p:tgtEl>
+                                </p:cBhvr>
+                              </p:animEffect>
+                            </p:childTnLst>
+                          </p:cTn>
+                        </p:par>
+                        <p:par>
+                          <p:cTn id="7" presetID="10" presetClass="entr" presetSubtype="0" fill="hold" nodeType="withEffect">
+                            <p:stCondLst>
+                              <p:cond delay="200"/>
+                            </p:stCondLst>
+                            <p:childTnLst>
+                              <p:animEffect transition="in" filter="fade">
+                                <p:cBhvr>
+                                  <p:cTn id="8" dur="450"/>
+                                  <p:tgtEl>
+                                    <p:spTgt spid="4"/>
+                                  </p:tgtEl>
+                                </p:cBhvr>
+                              </p:animEffect>
+                            </p:childTnLst>
+                          </p:cTn>
+                        </p:par>
+                      </p:childTnLst>
+                    </p:cTn>
+                  </p:par>
+                </p:childTnLst>
+              </p:cTn>
+              <p:prevCondLst>
+                <p:cond evt="onPrev" delay="0">
+                  <p:tgtEl>
+                    <p:sldTgt/>
+                  </p:tgtEl>
+                </p:cond>
+              </p:prevCondLst>
+              <p:nextCondLst>
+                <p:cond evt="onNext" delay="0">
+                  <p:tgtEl>
+                    <p:sldTgt/>
+                  </p:tgtEl>
+                </p:cond>
+              </p:nextCondLst>
+            </p:seq>
+          </p:childTnLst>
+        </p:cTn>
+      </p:par>
+    </p:tnLst>
+  </p:timing>
 </p:sld>
 </file>
 
@@ -6874,6 +7594,96 @@
   <p:clrMapOvr>
     <a:masterClrMapping/>
   </p:clrMapOvr>
+  <p:timing>
+    <p:tnLst>
+      <p:par>
+        <p:cTn id="1" dur="indefinite" restart="never" nodeType="tmRoot">
+          <p:childTnLst>
+            <p:seq concurrent="true" nextAc="seek">
+              <p:cTn id="2" dur="indefinite" nodeType="mainSeq">
+                <p:childTnLst>
+                  <p:par>
+                    <p:cTn id="9" fill="hold">
+                      <p:stCondLst>
+                        <p:cond delay="0"/>
+                      </p:stCondLst>
+                      <p:childTnLst>
+                        <p:par>
+                          <p:cTn id="3" presetID="10" presetClass="entr" presetSubtype="0" fill="hold" nodeType="withEffect">
+                            <p:stCondLst>
+                              <p:cond delay="0"/>
+                            </p:stCondLst>
+                            <p:childTnLst>
+                              <p:animEffect transition="in" filter="fade">
+                                <p:cBhvr>
+                                  <p:cTn id="4" dur="450"/>
+                                  <p:tgtEl>
+                                    <p:spTgt spid="2"/>
+                                  </p:tgtEl>
+                                </p:cBhvr>
+                              </p:animEffect>
+                            </p:childTnLst>
+                          </p:cTn>
+                        </p:par>
+                        <p:par>
+                          <p:cTn id="5" presetID="10" presetClass="entr" presetSubtype="0" fill="hold" nodeType="withEffect">
+                            <p:stCondLst>
+                              <p:cond delay="200"/>
+                            </p:stCondLst>
+                            <p:childTnLst>
+                              <p:animEffect transition="in" filter="fade">
+                                <p:cBhvr>
+                                  <p:cTn id="6" dur="450"/>
+                                  <p:tgtEl>
+                                    <p:spTgt spid="3"/>
+                                  </p:tgtEl>
+                                </p:cBhvr>
+                              </p:animEffect>
+                            </p:childTnLst>
+                          </p:cTn>
+                        </p:par>
+                        <p:par>
+                          <p:cTn id="7" presetID="10" presetClass="entr" presetSubtype="0" fill="hold" nodeType="withEffect">
+                            <p:stCondLst>
+                              <p:cond delay="200"/>
+                            </p:stCondLst>
+                            <p:childTnLst>
+                              <p:animEffect transition="in" filter="fade">
+                                <p:cBhvr>
+                                  <p:cTn id="8" dur="450"/>
+                                  <p:tgtEl>
+                                    <p:spTgt spid="4"/>
+                                  </p:tgtEl>
+                                </p:cBhvr>
+                              </p:animEffect>
+                            </p:childTnLst>
+                          </p:cTn>
+                        </p:par>
+                      </p:childTnLst>
+                    </p:cTn>
+                  </p:par>
+                </p:childTnLst>
+              </p:cTn>
+              <p:prevCondLst>
+                <p:cond evt="onPrev" delay="0">
+                  <p:tgtEl>
+                    <p:sldTgt/>
+                  </p:tgtEl>
+                </p:cond>
+              </p:prevCondLst>
+              <p:nextCondLst>
+                <p:cond evt="onNext" delay="0">
+                  <p:tgtEl>
+                    <p:sldTgt/>
+                  </p:tgtEl>
+                </p:cond>
+              </p:nextCondLst>
+            </p:seq>
+          </p:childTnLst>
+        </p:cTn>
+      </p:par>
+    </p:tnLst>
+  </p:timing>
 </p:sld>
 </file>
 
